--- a/docs/ppt/grant_carbo_pctdiffcg_nonindexed_overdose.pptx
+++ b/docs/ppt/grant_carbo_pctdiffcg_nonindexed_overdose.pptx
@@ -2450,26 +2450,26 @@
           </p:nvSpPr>
           <p:spPr>
             <a:xfrm>
-              <a:off x="2259863" y="1557141"/>
-              <a:ext cx="0" cy="3837134"/>
+              <a:off x="941876" y="5219860"/>
+              <a:ext cx="7675334" cy="0"/>
             </a:xfrm>
             <a:custGeom>
               <a:avLst/>
               <a:pathLst>
-                <a:path w="0" h="3837134">
+                <a:path w="7675334" h="0">
                   <a:moveTo>
-                    <a:pt x="0" y="3837134"/>
+                    <a:pt x="0" y="0"/>
                   </a:moveTo>
                   <a:lnTo>
-                    <a:pt x="0" y="0"/>
-                  </a:lnTo>
-                  <a:lnTo>
-                    <a:pt x="0" y="0"/>
+                    <a:pt x="7675334" y="0"/>
+                  </a:lnTo>
+                  <a:lnTo>
+                    <a:pt x="7675334" y="0"/>
                   </a:lnTo>
                 </a:path>
               </a:pathLst>
             </a:custGeom>
-            <a:ln w="6775" cap="flat">
+            <a:ln w="13550" cap="flat">
               <a:solidFill>
                 <a:srgbClr val="EBEBEB">
                   <a:alpha val="100000"/>
@@ -2493,26 +2493,26 @@
           </p:nvSpPr>
           <p:spPr>
             <a:xfrm>
-              <a:off x="4198078" y="1557141"/>
-              <a:ext cx="0" cy="3837134"/>
+              <a:off x="941876" y="4347784"/>
+              <a:ext cx="7675334" cy="0"/>
             </a:xfrm>
             <a:custGeom>
               <a:avLst/>
               <a:pathLst>
-                <a:path w="0" h="3837134">
+                <a:path w="7675334" h="0">
                   <a:moveTo>
-                    <a:pt x="0" y="3837134"/>
+                    <a:pt x="0" y="0"/>
                   </a:moveTo>
                   <a:lnTo>
-                    <a:pt x="0" y="0"/>
-                  </a:lnTo>
-                  <a:lnTo>
-                    <a:pt x="0" y="0"/>
+                    <a:pt x="7675334" y="0"/>
+                  </a:lnTo>
+                  <a:lnTo>
+                    <a:pt x="7675334" y="0"/>
                   </a:lnTo>
                 </a:path>
               </a:pathLst>
             </a:custGeom>
-            <a:ln w="6775" cap="flat">
+            <a:ln w="13550" cap="flat">
               <a:solidFill>
                 <a:srgbClr val="EBEBEB">
                   <a:alpha val="100000"/>
@@ -2536,26 +2536,26 @@
           </p:nvSpPr>
           <p:spPr>
             <a:xfrm>
-              <a:off x="6136294" y="1557141"/>
-              <a:ext cx="0" cy="3837134"/>
+              <a:off x="941876" y="3475708"/>
+              <a:ext cx="7675334" cy="0"/>
             </a:xfrm>
             <a:custGeom>
               <a:avLst/>
               <a:pathLst>
-                <a:path w="0" h="3837134">
+                <a:path w="7675334" h="0">
                   <a:moveTo>
-                    <a:pt x="0" y="3837134"/>
+                    <a:pt x="0" y="0"/>
                   </a:moveTo>
                   <a:lnTo>
-                    <a:pt x="0" y="0"/>
-                  </a:lnTo>
-                  <a:lnTo>
-                    <a:pt x="0" y="0"/>
+                    <a:pt x="7675334" y="0"/>
+                  </a:lnTo>
+                  <a:lnTo>
+                    <a:pt x="7675334" y="0"/>
                   </a:lnTo>
                 </a:path>
               </a:pathLst>
             </a:custGeom>
-            <a:ln w="6775" cap="flat">
+            <a:ln w="13550" cap="flat">
               <a:solidFill>
                 <a:srgbClr val="EBEBEB">
                   <a:alpha val="100000"/>
@@ -2579,26 +2579,26 @@
           </p:nvSpPr>
           <p:spPr>
             <a:xfrm>
-              <a:off x="8074510" y="1557141"/>
-              <a:ext cx="0" cy="3837134"/>
+              <a:off x="941876" y="2603632"/>
+              <a:ext cx="7675334" cy="0"/>
             </a:xfrm>
             <a:custGeom>
               <a:avLst/>
               <a:pathLst>
-                <a:path w="0" h="3837134">
+                <a:path w="7675334" h="0">
                   <a:moveTo>
-                    <a:pt x="0" y="3837134"/>
+                    <a:pt x="0" y="0"/>
                   </a:moveTo>
                   <a:lnTo>
-                    <a:pt x="0" y="0"/>
-                  </a:lnTo>
-                  <a:lnTo>
-                    <a:pt x="0" y="0"/>
+                    <a:pt x="7675334" y="0"/>
+                  </a:lnTo>
+                  <a:lnTo>
+                    <a:pt x="7675334" y="0"/>
                   </a:lnTo>
                 </a:path>
               </a:pathLst>
             </a:custGeom>
-            <a:ln w="6775" cap="flat">
+            <a:ln w="13550" cap="flat">
               <a:solidFill>
                 <a:srgbClr val="EBEBEB">
                   <a:alpha val="100000"/>
@@ -2622,7 +2622,7 @@
           </p:nvSpPr>
           <p:spPr>
             <a:xfrm>
-              <a:off x="941876" y="5219860"/>
+              <a:off x="941876" y="1731556"/>
               <a:ext cx="7675334" cy="0"/>
             </a:xfrm>
             <a:custGeom>
@@ -2665,21 +2665,21 @@
           </p:nvSpPr>
           <p:spPr>
             <a:xfrm>
-              <a:off x="941876" y="4347784"/>
-              <a:ext cx="7675334" cy="0"/>
+              <a:off x="1290755" y="1557141"/>
+              <a:ext cx="0" cy="3837134"/>
             </a:xfrm>
             <a:custGeom>
               <a:avLst/>
               <a:pathLst>
-                <a:path w="7675334" h="0">
+                <a:path w="0" h="3837134">
                   <a:moveTo>
+                    <a:pt x="0" y="3837134"/>
+                  </a:moveTo>
+                  <a:lnTo>
                     <a:pt x="0" y="0"/>
-                  </a:moveTo>
-                  <a:lnTo>
-                    <a:pt x="7675334" y="0"/>
-                  </a:lnTo>
-                  <a:lnTo>
-                    <a:pt x="7675334" y="0"/>
+                  </a:lnTo>
+                  <a:lnTo>
+                    <a:pt x="0" y="0"/>
                   </a:lnTo>
                 </a:path>
               </a:pathLst>
@@ -2708,21 +2708,21 @@
           </p:nvSpPr>
           <p:spPr>
             <a:xfrm>
-              <a:off x="941876" y="3475708"/>
-              <a:ext cx="7675334" cy="0"/>
+              <a:off x="2066041" y="1557141"/>
+              <a:ext cx="0" cy="3837134"/>
             </a:xfrm>
             <a:custGeom>
               <a:avLst/>
               <a:pathLst>
-                <a:path w="7675334" h="0">
+                <a:path w="0" h="3837134">
                   <a:moveTo>
+                    <a:pt x="0" y="3837134"/>
+                  </a:moveTo>
+                  <a:lnTo>
                     <a:pt x="0" y="0"/>
-                  </a:moveTo>
-                  <a:lnTo>
-                    <a:pt x="7675334" y="0"/>
-                  </a:lnTo>
-                  <a:lnTo>
-                    <a:pt x="7675334" y="0"/>
+                  </a:lnTo>
+                  <a:lnTo>
+                    <a:pt x="0" y="0"/>
                   </a:lnTo>
                 </a:path>
               </a:pathLst>
@@ -2751,21 +2751,21 @@
           </p:nvSpPr>
           <p:spPr>
             <a:xfrm>
-              <a:off x="941876" y="2603632"/>
-              <a:ext cx="7675334" cy="0"/>
+              <a:off x="2841327" y="1557141"/>
+              <a:ext cx="0" cy="3837134"/>
             </a:xfrm>
             <a:custGeom>
               <a:avLst/>
               <a:pathLst>
-                <a:path w="7675334" h="0">
+                <a:path w="0" h="3837134">
                   <a:moveTo>
+                    <a:pt x="0" y="3837134"/>
+                  </a:moveTo>
+                  <a:lnTo>
                     <a:pt x="0" y="0"/>
-                  </a:moveTo>
-                  <a:lnTo>
-                    <a:pt x="7675334" y="0"/>
-                  </a:lnTo>
-                  <a:lnTo>
-                    <a:pt x="7675334" y="0"/>
+                  </a:lnTo>
+                  <a:lnTo>
+                    <a:pt x="0" y="0"/>
                   </a:lnTo>
                 </a:path>
               </a:pathLst>
@@ -2794,21 +2794,21 @@
           </p:nvSpPr>
           <p:spPr>
             <a:xfrm>
-              <a:off x="941876" y="1731556"/>
-              <a:ext cx="7675334" cy="0"/>
+              <a:off x="3616614" y="1557141"/>
+              <a:ext cx="0" cy="3837134"/>
             </a:xfrm>
             <a:custGeom>
               <a:avLst/>
               <a:pathLst>
-                <a:path w="7675334" h="0">
+                <a:path w="0" h="3837134">
                   <a:moveTo>
+                    <a:pt x="0" y="3837134"/>
+                  </a:moveTo>
+                  <a:lnTo>
                     <a:pt x="0" y="0"/>
-                  </a:moveTo>
-                  <a:lnTo>
-                    <a:pt x="7675334" y="0"/>
-                  </a:lnTo>
-                  <a:lnTo>
-                    <a:pt x="7675334" y="0"/>
+                  </a:lnTo>
+                  <a:lnTo>
+                    <a:pt x="0" y="0"/>
                   </a:lnTo>
                 </a:path>
               </a:pathLst>
@@ -2837,7 +2837,7 @@
           </p:nvSpPr>
           <p:spPr>
             <a:xfrm>
-              <a:off x="1290755" y="1557141"/>
+              <a:off x="4391900" y="1557141"/>
               <a:ext cx="0" cy="3837134"/>
             </a:xfrm>
             <a:custGeom>
@@ -2880,7 +2880,7 @@
           </p:nvSpPr>
           <p:spPr>
             <a:xfrm>
-              <a:off x="3228970" y="1557141"/>
+              <a:off x="5167186" y="1557141"/>
               <a:ext cx="0" cy="3837134"/>
             </a:xfrm>
             <a:custGeom>
@@ -2923,7 +2923,7 @@
           </p:nvSpPr>
           <p:spPr>
             <a:xfrm>
-              <a:off x="5167186" y="1557141"/>
+              <a:off x="5942473" y="1557141"/>
               <a:ext cx="0" cy="3837134"/>
             </a:xfrm>
             <a:custGeom>
@@ -2966,7 +2966,7 @@
           </p:nvSpPr>
           <p:spPr>
             <a:xfrm>
-              <a:off x="7105402" y="1557141"/>
+              <a:off x="6717759" y="1557141"/>
               <a:ext cx="0" cy="3837134"/>
             </a:xfrm>
             <a:custGeom>
@@ -3009,7 +3009,7 @@
           </p:nvSpPr>
           <p:spPr>
             <a:xfrm>
-              <a:off x="5167186" y="1557141"/>
+              <a:off x="7493045" y="1557141"/>
               <a:ext cx="0" cy="3837134"/>
             </a:xfrm>
             <a:custGeom>
@@ -3028,9 +3028,95 @@
                 </a:path>
               </a:pathLst>
             </a:custGeom>
-            <a:ln w="10840" cap="flat">
+            <a:ln w="13550" cap="flat">
               <a:solidFill>
-                <a:srgbClr val="8C8C8C">
+                <a:srgbClr val="EBEBEB">
+                  <a:alpha val="100000"/>
+                </a:srgbClr>
+              </a:solidFill>
+              <a:prstDash val="solid"/>
+              <a:round/>
+            </a:ln>
+          </p:spPr>
+          <p:txBody>
+            <a:bodyPr/>
+            <a:lstStyle/>
+            <a:p/>
+          </p:txBody>
+        </p:sp>
+        <p:sp>
+          <p:nvSpPr>
+            <p:cNvPr id="22" name="pl22"/>
+            <p:cNvSpPr/>
+            <p:nvPr/>
+          </p:nvSpPr>
+          <p:spPr>
+            <a:xfrm>
+              <a:off x="8268332" y="1557141"/>
+              <a:ext cx="0" cy="3837134"/>
+            </a:xfrm>
+            <a:custGeom>
+              <a:avLst/>
+              <a:pathLst>
+                <a:path w="0" h="3837134">
+                  <a:moveTo>
+                    <a:pt x="0" y="3837134"/>
+                  </a:moveTo>
+                  <a:lnTo>
+                    <a:pt x="0" y="0"/>
+                  </a:lnTo>
+                  <a:lnTo>
+                    <a:pt x="0" y="0"/>
+                  </a:lnTo>
+                </a:path>
+              </a:pathLst>
+            </a:custGeom>
+            <a:ln w="13550" cap="flat">
+              <a:solidFill>
+                <a:srgbClr val="EBEBEB">
+                  <a:alpha val="100000"/>
+                </a:srgbClr>
+              </a:solidFill>
+              <a:prstDash val="solid"/>
+              <a:round/>
+            </a:ln>
+          </p:spPr>
+          <p:txBody>
+            <a:bodyPr/>
+            <a:lstStyle/>
+            <a:p/>
+          </p:txBody>
+        </p:sp>
+        <p:sp>
+          <p:nvSpPr>
+            <p:cNvPr id="23" name="pl23"/>
+            <p:cNvSpPr/>
+            <p:nvPr/>
+          </p:nvSpPr>
+          <p:spPr>
+            <a:xfrm>
+              <a:off x="4391900" y="1557141"/>
+              <a:ext cx="0" cy="3837134"/>
+            </a:xfrm>
+            <a:custGeom>
+              <a:avLst/>
+              <a:pathLst>
+                <a:path w="0" h="3837134">
+                  <a:moveTo>
+                    <a:pt x="0" y="3837134"/>
+                  </a:moveTo>
+                  <a:lnTo>
+                    <a:pt x="0" y="0"/>
+                  </a:lnTo>
+                  <a:lnTo>
+                    <a:pt x="0" y="0"/>
+                  </a:lnTo>
+                </a:path>
+              </a:pathLst>
+            </a:custGeom>
+            <a:ln w="13550" cap="flat">
+              <a:solidFill>
+                <a:srgbClr val="000000">
                   <a:alpha val="100000"/>
                 </a:srgbClr>
               </a:solidFill>
@@ -3046,7 +3132,7 @@
         </p:sp>
         <p:sp>
           <p:nvSpPr>
-            <p:cNvPr id="22" name="pg22"/>
+            <p:cNvPr id="24" name="pg24"/>
             <p:cNvSpPr/>
             <p:nvPr/>
           </p:nvSpPr>
@@ -4277,7 +4363,7 @@
         </p:sp>
         <p:sp>
           <p:nvSpPr>
-            <p:cNvPr id="23" name="pl23"/>
+            <p:cNvPr id="25" name="pl25"/>
             <p:cNvSpPr/>
             <p:nvPr/>
           </p:nvSpPr>
@@ -4902,7 +4988,7 @@
         </p:sp>
         <p:sp>
           <p:nvSpPr>
-            <p:cNvPr id="24" name="pl24"/>
+            <p:cNvPr id="26" name="pl26"/>
             <p:cNvSpPr/>
             <p:nvPr/>
           </p:nvSpPr>
@@ -5527,7 +5613,7 @@
         </p:sp>
         <p:sp>
           <p:nvSpPr>
-            <p:cNvPr id="25" name="pl25"/>
+            <p:cNvPr id="27" name="pl27"/>
             <p:cNvSpPr/>
             <p:nvPr/>
           </p:nvSpPr>
@@ -6161,7 +6247,7 @@
         </p:sp>
         <p:sp>
           <p:nvSpPr>
-            <p:cNvPr id="26" name="tx26"/>
+            <p:cNvPr id="28" name="tx28"/>
             <p:cNvSpPr/>
             <p:nvPr/>
           </p:nvSpPr>
@@ -6207,7 +6293,7 @@
         </p:sp>
         <p:sp>
           <p:nvSpPr>
-            <p:cNvPr id="27" name="tx27"/>
+            <p:cNvPr id="29" name="tx29"/>
             <p:cNvSpPr/>
             <p:nvPr/>
           </p:nvSpPr>
@@ -6253,7 +6339,7 @@
         </p:sp>
         <p:sp>
           <p:nvSpPr>
-            <p:cNvPr id="28" name="tx28"/>
+            <p:cNvPr id="30" name="tx30"/>
             <p:cNvSpPr/>
             <p:nvPr/>
           </p:nvSpPr>
@@ -6299,7 +6385,7 @@
         </p:sp>
         <p:sp>
           <p:nvSpPr>
-            <p:cNvPr id="29" name="tx29"/>
+            <p:cNvPr id="31" name="tx31"/>
             <p:cNvSpPr/>
             <p:nvPr/>
           </p:nvSpPr>
@@ -6345,7 +6431,7 @@
         </p:sp>
         <p:sp>
           <p:nvSpPr>
-            <p:cNvPr id="30" name="tx30"/>
+            <p:cNvPr id="32" name="tx32"/>
             <p:cNvSpPr/>
             <p:nvPr/>
           </p:nvSpPr>
@@ -6391,14 +6477,14 @@
         </p:sp>
         <p:sp>
           <p:nvSpPr>
-            <p:cNvPr id="31" name="tx31"/>
+            <p:cNvPr id="33" name="tx33"/>
             <p:cNvSpPr/>
             <p:nvPr/>
           </p:nvSpPr>
           <p:spPr>
             <a:xfrm>
-              <a:off x="1209967" y="5456905"/>
-              <a:ext cx="161574" cy="80101"/>
+              <a:off x="1160315" y="5456905"/>
+              <a:ext cx="260878" cy="80101"/>
             </a:xfrm>
             <a:prstGeom prst="rect">
               <a:avLst/>
@@ -6430,21 +6516,21 @@
                   <a:latin typeface="Helvetica"/>
                   <a:cs typeface="Helvetica"/>
                 </a:rPr>
-                <a:t>-50</a:t>
+                <a:t>-50%</a:t>
               </a:r>
             </a:p>
           </p:txBody>
         </p:sp>
         <p:sp>
           <p:nvSpPr>
-            <p:cNvPr id="32" name="tx32"/>
+            <p:cNvPr id="34" name="tx34"/>
             <p:cNvSpPr/>
             <p:nvPr/>
           </p:nvSpPr>
           <p:spPr>
             <a:xfrm>
-              <a:off x="3148183" y="5456905"/>
-              <a:ext cx="161574" cy="80101"/>
+              <a:off x="1935602" y="5456905"/>
+              <a:ext cx="260878" cy="80101"/>
             </a:xfrm>
             <a:prstGeom prst="rect">
               <a:avLst/>
@@ -6476,21 +6562,21 @@
                   <a:latin typeface="Helvetica"/>
                   <a:cs typeface="Helvetica"/>
                 </a:rPr>
-                <a:t>-25</a:t>
+                <a:t>-40%</a:t>
               </a:r>
             </a:p>
           </p:txBody>
         </p:sp>
         <p:sp>
           <p:nvSpPr>
-            <p:cNvPr id="33" name="tx33"/>
+            <p:cNvPr id="35" name="tx35"/>
             <p:cNvSpPr/>
             <p:nvPr/>
           </p:nvSpPr>
           <p:spPr>
             <a:xfrm>
-              <a:off x="5136097" y="5456905"/>
-              <a:ext cx="62179" cy="80101"/>
+              <a:off x="2710888" y="5456905"/>
+              <a:ext cx="260878" cy="80101"/>
             </a:xfrm>
             <a:prstGeom prst="rect">
               <a:avLst/>
@@ -6522,21 +6608,21 @@
                   <a:latin typeface="Helvetica"/>
                   <a:cs typeface="Helvetica"/>
                 </a:rPr>
-                <a:t>0</a:t>
+                <a:t>-30%</a:t>
               </a:r>
             </a:p>
           </p:txBody>
         </p:sp>
         <p:sp>
           <p:nvSpPr>
-            <p:cNvPr id="34" name="tx34"/>
+            <p:cNvPr id="36" name="tx36"/>
             <p:cNvSpPr/>
             <p:nvPr/>
           </p:nvSpPr>
           <p:spPr>
             <a:xfrm>
-              <a:off x="7043223" y="5456905"/>
-              <a:ext cx="124358" cy="80101"/>
+              <a:off x="3486174" y="5456905"/>
+              <a:ext cx="260878" cy="80101"/>
             </a:xfrm>
             <a:prstGeom prst="rect">
               <a:avLst/>
@@ -6568,14 +6654,290 @@
                   <a:latin typeface="Helvetica"/>
                   <a:cs typeface="Helvetica"/>
                 </a:rPr>
-                <a:t>25</a:t>
+                <a:t>-20%</a:t>
               </a:r>
             </a:p>
           </p:txBody>
         </p:sp>
         <p:sp>
           <p:nvSpPr>
-            <p:cNvPr id="35" name="tx35"/>
+            <p:cNvPr id="37" name="tx37"/>
+            <p:cNvSpPr/>
+            <p:nvPr/>
+          </p:nvSpPr>
+          <p:spPr>
+            <a:xfrm>
+              <a:off x="4261461" y="5456905"/>
+              <a:ext cx="260878" cy="80101"/>
+            </a:xfrm>
+            <a:prstGeom prst="rect">
+              <a:avLst/>
+            </a:prstGeom>
+            <a:noFill/>
+          </p:spPr>
+          <p:txBody>
+            <a:bodyPr lIns="0" rIns="0" tIns="0" bIns="0" anchorCtr="1" anchor="ctr" wrap="none"/>
+            <a:lstStyle/>
+            <a:p>
+              <a:pPr algn="l" marL="0" marR="0" indent="0">
+                <a:lnSpc>
+                  <a:spcPts val="880"/>
+                </a:lnSpc>
+                <a:spcBef>
+                  <a:spcPts val="0"/>
+                </a:spcBef>
+                <a:spcAft>
+                  <a:spcPts val="0"/>
+                </a:spcAft>
+              </a:pPr>
+              <a:r>
+                <a:rPr sz="880">
+                  <a:solidFill>
+                    <a:srgbClr val="4D4D4D">
+                      <a:alpha val="100000"/>
+                    </a:srgbClr>
+                  </a:solidFill>
+                  <a:latin typeface="Helvetica"/>
+                  <a:cs typeface="Helvetica"/>
+                </a:rPr>
+                <a:t>-10%</a:t>
+              </a:r>
+            </a:p>
+          </p:txBody>
+        </p:sp>
+        <p:sp>
+          <p:nvSpPr>
+            <p:cNvPr id="38" name="tx38"/>
+            <p:cNvSpPr/>
+            <p:nvPr/>
+          </p:nvSpPr>
+          <p:spPr>
+            <a:xfrm>
+              <a:off x="5086445" y="5456905"/>
+              <a:ext cx="161483" cy="80101"/>
+            </a:xfrm>
+            <a:prstGeom prst="rect">
+              <a:avLst/>
+            </a:prstGeom>
+            <a:noFill/>
+          </p:spPr>
+          <p:txBody>
+            <a:bodyPr lIns="0" rIns="0" tIns="0" bIns="0" anchorCtr="1" anchor="ctr" wrap="none"/>
+            <a:lstStyle/>
+            <a:p>
+              <a:pPr algn="l" marL="0" marR="0" indent="0">
+                <a:lnSpc>
+                  <a:spcPts val="880"/>
+                </a:lnSpc>
+                <a:spcBef>
+                  <a:spcPts val="0"/>
+                </a:spcBef>
+                <a:spcAft>
+                  <a:spcPts val="0"/>
+                </a:spcAft>
+              </a:pPr>
+              <a:r>
+                <a:rPr sz="880">
+                  <a:solidFill>
+                    <a:srgbClr val="4D4D4D">
+                      <a:alpha val="100000"/>
+                    </a:srgbClr>
+                  </a:solidFill>
+                  <a:latin typeface="Helvetica"/>
+                  <a:cs typeface="Helvetica"/>
+                </a:rPr>
+                <a:t>0%</a:t>
+              </a:r>
+            </a:p>
+          </p:txBody>
+        </p:sp>
+        <p:sp>
+          <p:nvSpPr>
+            <p:cNvPr id="39" name="tx39"/>
+            <p:cNvSpPr/>
+            <p:nvPr/>
+          </p:nvSpPr>
+          <p:spPr>
+            <a:xfrm>
+              <a:off x="5830641" y="5456905"/>
+              <a:ext cx="223662" cy="80101"/>
+            </a:xfrm>
+            <a:prstGeom prst="rect">
+              <a:avLst/>
+            </a:prstGeom>
+            <a:noFill/>
+          </p:spPr>
+          <p:txBody>
+            <a:bodyPr lIns="0" rIns="0" tIns="0" bIns="0" anchorCtr="1" anchor="ctr" wrap="none"/>
+            <a:lstStyle/>
+            <a:p>
+              <a:pPr algn="l" marL="0" marR="0" indent="0">
+                <a:lnSpc>
+                  <a:spcPts val="880"/>
+                </a:lnSpc>
+                <a:spcBef>
+                  <a:spcPts val="0"/>
+                </a:spcBef>
+                <a:spcAft>
+                  <a:spcPts val="0"/>
+                </a:spcAft>
+              </a:pPr>
+              <a:r>
+                <a:rPr sz="880">
+                  <a:solidFill>
+                    <a:srgbClr val="4D4D4D">
+                      <a:alpha val="100000"/>
+                    </a:srgbClr>
+                  </a:solidFill>
+                  <a:latin typeface="Helvetica"/>
+                  <a:cs typeface="Helvetica"/>
+                </a:rPr>
+                <a:t>10%</a:t>
+              </a:r>
+            </a:p>
+          </p:txBody>
+        </p:sp>
+        <p:sp>
+          <p:nvSpPr>
+            <p:cNvPr id="40" name="tx40"/>
+            <p:cNvSpPr/>
+            <p:nvPr/>
+          </p:nvSpPr>
+          <p:spPr>
+            <a:xfrm>
+              <a:off x="6605928" y="5456905"/>
+              <a:ext cx="223662" cy="80101"/>
+            </a:xfrm>
+            <a:prstGeom prst="rect">
+              <a:avLst/>
+            </a:prstGeom>
+            <a:noFill/>
+          </p:spPr>
+          <p:txBody>
+            <a:bodyPr lIns="0" rIns="0" tIns="0" bIns="0" anchorCtr="1" anchor="ctr" wrap="none"/>
+            <a:lstStyle/>
+            <a:p>
+              <a:pPr algn="l" marL="0" marR="0" indent="0">
+                <a:lnSpc>
+                  <a:spcPts val="880"/>
+                </a:lnSpc>
+                <a:spcBef>
+                  <a:spcPts val="0"/>
+                </a:spcBef>
+                <a:spcAft>
+                  <a:spcPts val="0"/>
+                </a:spcAft>
+              </a:pPr>
+              <a:r>
+                <a:rPr sz="880">
+                  <a:solidFill>
+                    <a:srgbClr val="4D4D4D">
+                      <a:alpha val="100000"/>
+                    </a:srgbClr>
+                  </a:solidFill>
+                  <a:latin typeface="Helvetica"/>
+                  <a:cs typeface="Helvetica"/>
+                </a:rPr>
+                <a:t>20%</a:t>
+              </a:r>
+            </a:p>
+          </p:txBody>
+        </p:sp>
+        <p:sp>
+          <p:nvSpPr>
+            <p:cNvPr id="41" name="tx41"/>
+            <p:cNvSpPr/>
+            <p:nvPr/>
+          </p:nvSpPr>
+          <p:spPr>
+            <a:xfrm>
+              <a:off x="7381214" y="5456905"/>
+              <a:ext cx="223662" cy="80101"/>
+            </a:xfrm>
+            <a:prstGeom prst="rect">
+              <a:avLst/>
+            </a:prstGeom>
+            <a:noFill/>
+          </p:spPr>
+          <p:txBody>
+            <a:bodyPr lIns="0" rIns="0" tIns="0" bIns="0" anchorCtr="1" anchor="ctr" wrap="none"/>
+            <a:lstStyle/>
+            <a:p>
+              <a:pPr algn="l" marL="0" marR="0" indent="0">
+                <a:lnSpc>
+                  <a:spcPts val="880"/>
+                </a:lnSpc>
+                <a:spcBef>
+                  <a:spcPts val="0"/>
+                </a:spcBef>
+                <a:spcAft>
+                  <a:spcPts val="0"/>
+                </a:spcAft>
+              </a:pPr>
+              <a:r>
+                <a:rPr sz="880">
+                  <a:solidFill>
+                    <a:srgbClr val="4D4D4D">
+                      <a:alpha val="100000"/>
+                    </a:srgbClr>
+                  </a:solidFill>
+                  <a:latin typeface="Helvetica"/>
+                  <a:cs typeface="Helvetica"/>
+                </a:rPr>
+                <a:t>30%</a:t>
+              </a:r>
+            </a:p>
+          </p:txBody>
+        </p:sp>
+        <p:sp>
+          <p:nvSpPr>
+            <p:cNvPr id="42" name="tx42"/>
+            <p:cNvSpPr/>
+            <p:nvPr/>
+          </p:nvSpPr>
+          <p:spPr>
+            <a:xfrm>
+              <a:off x="8156500" y="5456905"/>
+              <a:ext cx="223662" cy="80101"/>
+            </a:xfrm>
+            <a:prstGeom prst="rect">
+              <a:avLst/>
+            </a:prstGeom>
+            <a:noFill/>
+          </p:spPr>
+          <p:txBody>
+            <a:bodyPr lIns="0" rIns="0" tIns="0" bIns="0" anchorCtr="1" anchor="ctr" wrap="none"/>
+            <a:lstStyle/>
+            <a:p>
+              <a:pPr algn="l" marL="0" marR="0" indent="0">
+                <a:lnSpc>
+                  <a:spcPts val="880"/>
+                </a:lnSpc>
+                <a:spcBef>
+                  <a:spcPts val="0"/>
+                </a:spcBef>
+                <a:spcAft>
+                  <a:spcPts val="0"/>
+                </a:spcAft>
+              </a:pPr>
+              <a:r>
+                <a:rPr sz="880">
+                  <a:solidFill>
+                    <a:srgbClr val="4D4D4D">
+                      <a:alpha val="100000"/>
+                    </a:srgbClr>
+                  </a:solidFill>
+                  <a:latin typeface="Helvetica"/>
+                  <a:cs typeface="Helvetica"/>
+                </a:rPr>
+                <a:t>40%</a:t>
+              </a:r>
+            </a:p>
+          </p:txBody>
+        </p:sp>
+        <p:sp>
+          <p:nvSpPr>
+            <p:cNvPr id="43" name="tx43"/>
             <p:cNvSpPr/>
             <p:nvPr/>
           </p:nvSpPr>
@@ -6621,7 +6983,7 @@
         </p:sp>
         <p:sp>
           <p:nvSpPr>
-            <p:cNvPr id="36" name="tx36"/>
+            <p:cNvPr id="44" name="tx44"/>
             <p:cNvSpPr/>
             <p:nvPr/>
           </p:nvSpPr>
@@ -6667,7 +7029,7 @@
         </p:sp>
         <p:sp>
           <p:nvSpPr>
-            <p:cNvPr id="37" name="tx37"/>
+            <p:cNvPr id="45" name="tx45"/>
             <p:cNvSpPr/>
             <p:nvPr/>
           </p:nvSpPr>
@@ -6713,7 +7075,7 @@
         </p:sp>
         <p:sp>
           <p:nvSpPr>
-            <p:cNvPr id="38" name="tx38"/>
+            <p:cNvPr id="46" name="tx46"/>
             <p:cNvSpPr/>
             <p:nvPr/>
           </p:nvSpPr>
@@ -7012,26 +7374,26 @@
           </p:nvSpPr>
           <p:spPr>
             <a:xfrm>
-              <a:off x="2259863" y="1557141"/>
-              <a:ext cx="0" cy="3837134"/>
+              <a:off x="941876" y="5219860"/>
+              <a:ext cx="7675334" cy="0"/>
             </a:xfrm>
             <a:custGeom>
               <a:avLst/>
               <a:pathLst>
-                <a:path w="0" h="3837134">
+                <a:path w="7675334" h="0">
                   <a:moveTo>
-                    <a:pt x="0" y="3837134"/>
+                    <a:pt x="0" y="0"/>
                   </a:moveTo>
                   <a:lnTo>
-                    <a:pt x="0" y="0"/>
-                  </a:lnTo>
-                  <a:lnTo>
-                    <a:pt x="0" y="0"/>
+                    <a:pt x="7675334" y="0"/>
+                  </a:lnTo>
+                  <a:lnTo>
+                    <a:pt x="7675334" y="0"/>
                   </a:lnTo>
                 </a:path>
               </a:pathLst>
             </a:custGeom>
-            <a:ln w="6775" cap="flat">
+            <a:ln w="13550" cap="flat">
               <a:solidFill>
                 <a:srgbClr val="EBEBEB">
                   <a:alpha val="100000"/>
@@ -7055,26 +7417,26 @@
           </p:nvSpPr>
           <p:spPr>
             <a:xfrm>
-              <a:off x="4198078" y="1557141"/>
-              <a:ext cx="0" cy="3837134"/>
+              <a:off x="941876" y="4347784"/>
+              <a:ext cx="7675334" cy="0"/>
             </a:xfrm>
             <a:custGeom>
               <a:avLst/>
               <a:pathLst>
-                <a:path w="0" h="3837134">
+                <a:path w="7675334" h="0">
                   <a:moveTo>
-                    <a:pt x="0" y="3837134"/>
+                    <a:pt x="0" y="0"/>
                   </a:moveTo>
                   <a:lnTo>
-                    <a:pt x="0" y="0"/>
-                  </a:lnTo>
-                  <a:lnTo>
-                    <a:pt x="0" y="0"/>
+                    <a:pt x="7675334" y="0"/>
+                  </a:lnTo>
+                  <a:lnTo>
+                    <a:pt x="7675334" y="0"/>
                   </a:lnTo>
                 </a:path>
               </a:pathLst>
             </a:custGeom>
-            <a:ln w="6775" cap="flat">
+            <a:ln w="13550" cap="flat">
               <a:solidFill>
                 <a:srgbClr val="EBEBEB">
                   <a:alpha val="100000"/>
@@ -7098,26 +7460,26 @@
           </p:nvSpPr>
           <p:spPr>
             <a:xfrm>
-              <a:off x="6136294" y="1557141"/>
-              <a:ext cx="0" cy="3837134"/>
+              <a:off x="941876" y="3475708"/>
+              <a:ext cx="7675334" cy="0"/>
             </a:xfrm>
             <a:custGeom>
               <a:avLst/>
               <a:pathLst>
-                <a:path w="0" h="3837134">
+                <a:path w="7675334" h="0">
                   <a:moveTo>
-                    <a:pt x="0" y="3837134"/>
+                    <a:pt x="0" y="0"/>
                   </a:moveTo>
                   <a:lnTo>
-                    <a:pt x="0" y="0"/>
-                  </a:lnTo>
-                  <a:lnTo>
-                    <a:pt x="0" y="0"/>
+                    <a:pt x="7675334" y="0"/>
+                  </a:lnTo>
+                  <a:lnTo>
+                    <a:pt x="7675334" y="0"/>
                   </a:lnTo>
                 </a:path>
               </a:pathLst>
             </a:custGeom>
-            <a:ln w="6775" cap="flat">
+            <a:ln w="13550" cap="flat">
               <a:solidFill>
                 <a:srgbClr val="EBEBEB">
                   <a:alpha val="100000"/>
@@ -7141,26 +7503,26 @@
           </p:nvSpPr>
           <p:spPr>
             <a:xfrm>
-              <a:off x="8074510" y="1557141"/>
-              <a:ext cx="0" cy="3837134"/>
+              <a:off x="941876" y="2603632"/>
+              <a:ext cx="7675334" cy="0"/>
             </a:xfrm>
             <a:custGeom>
               <a:avLst/>
               <a:pathLst>
-                <a:path w="0" h="3837134">
+                <a:path w="7675334" h="0">
                   <a:moveTo>
-                    <a:pt x="0" y="3837134"/>
+                    <a:pt x="0" y="0"/>
                   </a:moveTo>
                   <a:lnTo>
-                    <a:pt x="0" y="0"/>
-                  </a:lnTo>
-                  <a:lnTo>
-                    <a:pt x="0" y="0"/>
+                    <a:pt x="7675334" y="0"/>
+                  </a:lnTo>
+                  <a:lnTo>
+                    <a:pt x="7675334" y="0"/>
                   </a:lnTo>
                 </a:path>
               </a:pathLst>
             </a:custGeom>
-            <a:ln w="6775" cap="flat">
+            <a:ln w="13550" cap="flat">
               <a:solidFill>
                 <a:srgbClr val="EBEBEB">
                   <a:alpha val="100000"/>
@@ -7184,7 +7546,7 @@
           </p:nvSpPr>
           <p:spPr>
             <a:xfrm>
-              <a:off x="941876" y="5219860"/>
+              <a:off x="941876" y="1731556"/>
               <a:ext cx="7675334" cy="0"/>
             </a:xfrm>
             <a:custGeom>
@@ -7227,21 +7589,21 @@
           </p:nvSpPr>
           <p:spPr>
             <a:xfrm>
-              <a:off x="941876" y="4347784"/>
-              <a:ext cx="7675334" cy="0"/>
+              <a:off x="1290755" y="1557141"/>
+              <a:ext cx="0" cy="3837134"/>
             </a:xfrm>
             <a:custGeom>
               <a:avLst/>
               <a:pathLst>
-                <a:path w="7675334" h="0">
+                <a:path w="0" h="3837134">
                   <a:moveTo>
+                    <a:pt x="0" y="3837134"/>
+                  </a:moveTo>
+                  <a:lnTo>
                     <a:pt x="0" y="0"/>
-                  </a:moveTo>
-                  <a:lnTo>
-                    <a:pt x="7675334" y="0"/>
-                  </a:lnTo>
-                  <a:lnTo>
-                    <a:pt x="7675334" y="0"/>
+                  </a:lnTo>
+                  <a:lnTo>
+                    <a:pt x="0" y="0"/>
                   </a:lnTo>
                 </a:path>
               </a:pathLst>
@@ -7270,21 +7632,21 @@
           </p:nvSpPr>
           <p:spPr>
             <a:xfrm>
-              <a:off x="941876" y="3475708"/>
-              <a:ext cx="7675334" cy="0"/>
+              <a:off x="2066041" y="1557141"/>
+              <a:ext cx="0" cy="3837134"/>
             </a:xfrm>
             <a:custGeom>
               <a:avLst/>
               <a:pathLst>
-                <a:path w="7675334" h="0">
+                <a:path w="0" h="3837134">
                   <a:moveTo>
+                    <a:pt x="0" y="3837134"/>
+                  </a:moveTo>
+                  <a:lnTo>
                     <a:pt x="0" y="0"/>
-                  </a:moveTo>
-                  <a:lnTo>
-                    <a:pt x="7675334" y="0"/>
-                  </a:lnTo>
-                  <a:lnTo>
-                    <a:pt x="7675334" y="0"/>
+                  </a:lnTo>
+                  <a:lnTo>
+                    <a:pt x="0" y="0"/>
                   </a:lnTo>
                 </a:path>
               </a:pathLst>
@@ -7313,21 +7675,21 @@
           </p:nvSpPr>
           <p:spPr>
             <a:xfrm>
-              <a:off x="941876" y="2603632"/>
-              <a:ext cx="7675334" cy="0"/>
+              <a:off x="2841327" y="1557141"/>
+              <a:ext cx="0" cy="3837134"/>
             </a:xfrm>
             <a:custGeom>
               <a:avLst/>
               <a:pathLst>
-                <a:path w="7675334" h="0">
+                <a:path w="0" h="3837134">
                   <a:moveTo>
+                    <a:pt x="0" y="3837134"/>
+                  </a:moveTo>
+                  <a:lnTo>
                     <a:pt x="0" y="0"/>
-                  </a:moveTo>
-                  <a:lnTo>
-                    <a:pt x="7675334" y="0"/>
-                  </a:lnTo>
-                  <a:lnTo>
-                    <a:pt x="7675334" y="0"/>
+                  </a:lnTo>
+                  <a:lnTo>
+                    <a:pt x="0" y="0"/>
                   </a:lnTo>
                 </a:path>
               </a:pathLst>
@@ -7356,21 +7718,21 @@
           </p:nvSpPr>
           <p:spPr>
             <a:xfrm>
-              <a:off x="941876" y="1731556"/>
-              <a:ext cx="7675334" cy="0"/>
+              <a:off x="3616614" y="1557141"/>
+              <a:ext cx="0" cy="3837134"/>
             </a:xfrm>
             <a:custGeom>
               <a:avLst/>
               <a:pathLst>
-                <a:path w="7675334" h="0">
+                <a:path w="0" h="3837134">
                   <a:moveTo>
+                    <a:pt x="0" y="3837134"/>
+                  </a:moveTo>
+                  <a:lnTo>
                     <a:pt x="0" y="0"/>
-                  </a:moveTo>
-                  <a:lnTo>
-                    <a:pt x="7675334" y="0"/>
-                  </a:lnTo>
-                  <a:lnTo>
-                    <a:pt x="7675334" y="0"/>
+                  </a:lnTo>
+                  <a:lnTo>
+                    <a:pt x="0" y="0"/>
                   </a:lnTo>
                 </a:path>
               </a:pathLst>
@@ -7399,7 +7761,7 @@
           </p:nvSpPr>
           <p:spPr>
             <a:xfrm>
-              <a:off x="1290755" y="1557141"/>
+              <a:off x="4391900" y="1557141"/>
               <a:ext cx="0" cy="3837134"/>
             </a:xfrm>
             <a:custGeom>
@@ -7442,7 +7804,7 @@
           </p:nvSpPr>
           <p:spPr>
             <a:xfrm>
-              <a:off x="3228970" y="1557141"/>
+              <a:off x="5167186" y="1557141"/>
               <a:ext cx="0" cy="3837134"/>
             </a:xfrm>
             <a:custGeom>
@@ -7485,7 +7847,7 @@
           </p:nvSpPr>
           <p:spPr>
             <a:xfrm>
-              <a:off x="5167186" y="1557141"/>
+              <a:off x="5942473" y="1557141"/>
               <a:ext cx="0" cy="3837134"/>
             </a:xfrm>
             <a:custGeom>
@@ -7528,7 +7890,7 @@
           </p:nvSpPr>
           <p:spPr>
             <a:xfrm>
-              <a:off x="7105402" y="1557141"/>
+              <a:off x="6717759" y="1557141"/>
               <a:ext cx="0" cy="3837134"/>
             </a:xfrm>
             <a:custGeom>
@@ -7571,7 +7933,7 @@
           </p:nvSpPr>
           <p:spPr>
             <a:xfrm>
-              <a:off x="5167186" y="1557141"/>
+              <a:off x="7493045" y="1557141"/>
               <a:ext cx="0" cy="3837134"/>
             </a:xfrm>
             <a:custGeom>
@@ -7590,9 +7952,95 @@
                 </a:path>
               </a:pathLst>
             </a:custGeom>
-            <a:ln w="10840" cap="flat">
+            <a:ln w="13550" cap="flat">
               <a:solidFill>
-                <a:srgbClr val="8C8C8C">
+                <a:srgbClr val="EBEBEB">
+                  <a:alpha val="100000"/>
+                </a:srgbClr>
+              </a:solidFill>
+              <a:prstDash val="solid"/>
+              <a:round/>
+            </a:ln>
+          </p:spPr>
+          <p:txBody>
+            <a:bodyPr/>
+            <a:lstStyle/>
+            <a:p/>
+          </p:txBody>
+        </p:sp>
+        <p:sp>
+          <p:nvSpPr>
+            <p:cNvPr id="22" name="pl22"/>
+            <p:cNvSpPr/>
+            <p:nvPr/>
+          </p:nvSpPr>
+          <p:spPr>
+            <a:xfrm>
+              <a:off x="8268332" y="1557141"/>
+              <a:ext cx="0" cy="3837134"/>
+            </a:xfrm>
+            <a:custGeom>
+              <a:avLst/>
+              <a:pathLst>
+                <a:path w="0" h="3837134">
+                  <a:moveTo>
+                    <a:pt x="0" y="3837134"/>
+                  </a:moveTo>
+                  <a:lnTo>
+                    <a:pt x="0" y="0"/>
+                  </a:lnTo>
+                  <a:lnTo>
+                    <a:pt x="0" y="0"/>
+                  </a:lnTo>
+                </a:path>
+              </a:pathLst>
+            </a:custGeom>
+            <a:ln w="13550" cap="flat">
+              <a:solidFill>
+                <a:srgbClr val="EBEBEB">
+                  <a:alpha val="100000"/>
+                </a:srgbClr>
+              </a:solidFill>
+              <a:prstDash val="solid"/>
+              <a:round/>
+            </a:ln>
+          </p:spPr>
+          <p:txBody>
+            <a:bodyPr/>
+            <a:lstStyle/>
+            <a:p/>
+          </p:txBody>
+        </p:sp>
+        <p:sp>
+          <p:nvSpPr>
+            <p:cNvPr id="23" name="pl23"/>
+            <p:cNvSpPr/>
+            <p:nvPr/>
+          </p:nvSpPr>
+          <p:spPr>
+            <a:xfrm>
+              <a:off x="4391900" y="1557141"/>
+              <a:ext cx="0" cy="3837134"/>
+            </a:xfrm>
+            <a:custGeom>
+              <a:avLst/>
+              <a:pathLst>
+                <a:path w="0" h="3837134">
+                  <a:moveTo>
+                    <a:pt x="0" y="3837134"/>
+                  </a:moveTo>
+                  <a:lnTo>
+                    <a:pt x="0" y="0"/>
+                  </a:lnTo>
+                  <a:lnTo>
+                    <a:pt x="0" y="0"/>
+                  </a:lnTo>
+                </a:path>
+              </a:pathLst>
+            </a:custGeom>
+            <a:ln w="13550" cap="flat">
+              <a:solidFill>
+                <a:srgbClr val="000000">
                   <a:alpha val="100000"/>
                 </a:srgbClr>
               </a:solidFill>
@@ -7608,7 +8056,7 @@
         </p:sp>
         <p:sp>
           <p:nvSpPr>
-            <p:cNvPr id="22" name="pg22"/>
+            <p:cNvPr id="24" name="pg24"/>
             <p:cNvSpPr/>
             <p:nvPr/>
           </p:nvSpPr>
@@ -8839,7 +9287,7 @@
         </p:sp>
         <p:sp>
           <p:nvSpPr>
-            <p:cNvPr id="23" name="pl23"/>
+            <p:cNvPr id="25" name="pl25"/>
             <p:cNvSpPr/>
             <p:nvPr/>
           </p:nvSpPr>
@@ -9464,7 +9912,7 @@
         </p:sp>
         <p:sp>
           <p:nvSpPr>
-            <p:cNvPr id="24" name="pl24"/>
+            <p:cNvPr id="26" name="pl26"/>
             <p:cNvSpPr/>
             <p:nvPr/>
           </p:nvSpPr>
@@ -10089,7 +10537,7 @@
         </p:sp>
         <p:sp>
           <p:nvSpPr>
-            <p:cNvPr id="25" name="pl25"/>
+            <p:cNvPr id="27" name="pl27"/>
             <p:cNvSpPr/>
             <p:nvPr/>
           </p:nvSpPr>
@@ -10723,7 +11171,7 @@
         </p:sp>
         <p:sp>
           <p:nvSpPr>
-            <p:cNvPr id="26" name="tx26"/>
+            <p:cNvPr id="28" name="tx28"/>
             <p:cNvSpPr/>
             <p:nvPr/>
           </p:nvSpPr>
@@ -10769,7 +11217,7 @@
         </p:sp>
         <p:sp>
           <p:nvSpPr>
-            <p:cNvPr id="27" name="tx27"/>
+            <p:cNvPr id="29" name="tx29"/>
             <p:cNvSpPr/>
             <p:nvPr/>
           </p:nvSpPr>
@@ -10815,7 +11263,7 @@
         </p:sp>
         <p:sp>
           <p:nvSpPr>
-            <p:cNvPr id="28" name="tx28"/>
+            <p:cNvPr id="30" name="tx30"/>
             <p:cNvSpPr/>
             <p:nvPr/>
           </p:nvSpPr>
@@ -10861,7 +11309,7 @@
         </p:sp>
         <p:sp>
           <p:nvSpPr>
-            <p:cNvPr id="29" name="tx29"/>
+            <p:cNvPr id="31" name="tx31"/>
             <p:cNvSpPr/>
             <p:nvPr/>
           </p:nvSpPr>
@@ -10907,7 +11355,7 @@
         </p:sp>
         <p:sp>
           <p:nvSpPr>
-            <p:cNvPr id="30" name="tx30"/>
+            <p:cNvPr id="32" name="tx32"/>
             <p:cNvSpPr/>
             <p:nvPr/>
           </p:nvSpPr>
@@ -10953,14 +11401,14 @@
         </p:sp>
         <p:sp>
           <p:nvSpPr>
-            <p:cNvPr id="31" name="tx31"/>
+            <p:cNvPr id="33" name="tx33"/>
             <p:cNvSpPr/>
             <p:nvPr/>
           </p:nvSpPr>
           <p:spPr>
             <a:xfrm>
-              <a:off x="1209967" y="5456905"/>
-              <a:ext cx="161574" cy="80101"/>
+              <a:off x="1160315" y="5456905"/>
+              <a:ext cx="260878" cy="80101"/>
             </a:xfrm>
             <a:prstGeom prst="rect">
               <a:avLst/>
@@ -10992,21 +11440,21 @@
                   <a:latin typeface="Helvetica"/>
                   <a:cs typeface="Helvetica"/>
                 </a:rPr>
-                <a:t>-50</a:t>
+                <a:t>-50%</a:t>
               </a:r>
             </a:p>
           </p:txBody>
         </p:sp>
         <p:sp>
           <p:nvSpPr>
-            <p:cNvPr id="32" name="tx32"/>
+            <p:cNvPr id="34" name="tx34"/>
             <p:cNvSpPr/>
             <p:nvPr/>
           </p:nvSpPr>
           <p:spPr>
             <a:xfrm>
-              <a:off x="3148183" y="5456905"/>
-              <a:ext cx="161574" cy="80101"/>
+              <a:off x="1935602" y="5456905"/>
+              <a:ext cx="260878" cy="80101"/>
             </a:xfrm>
             <a:prstGeom prst="rect">
               <a:avLst/>
@@ -11038,21 +11486,21 @@
                   <a:latin typeface="Helvetica"/>
                   <a:cs typeface="Helvetica"/>
                 </a:rPr>
-                <a:t>-25</a:t>
+                <a:t>-40%</a:t>
               </a:r>
             </a:p>
           </p:txBody>
         </p:sp>
         <p:sp>
           <p:nvSpPr>
-            <p:cNvPr id="33" name="tx33"/>
+            <p:cNvPr id="35" name="tx35"/>
             <p:cNvSpPr/>
             <p:nvPr/>
           </p:nvSpPr>
           <p:spPr>
             <a:xfrm>
-              <a:off x="5136097" y="5456905"/>
-              <a:ext cx="62179" cy="80101"/>
+              <a:off x="2710888" y="5456905"/>
+              <a:ext cx="260878" cy="80101"/>
             </a:xfrm>
             <a:prstGeom prst="rect">
               <a:avLst/>
@@ -11084,21 +11532,21 @@
                   <a:latin typeface="Helvetica"/>
                   <a:cs typeface="Helvetica"/>
                 </a:rPr>
-                <a:t>0</a:t>
+                <a:t>-30%</a:t>
               </a:r>
             </a:p>
           </p:txBody>
         </p:sp>
         <p:sp>
           <p:nvSpPr>
-            <p:cNvPr id="34" name="tx34"/>
+            <p:cNvPr id="36" name="tx36"/>
             <p:cNvSpPr/>
             <p:nvPr/>
           </p:nvSpPr>
           <p:spPr>
             <a:xfrm>
-              <a:off x="7043223" y="5456905"/>
-              <a:ext cx="124358" cy="80101"/>
+              <a:off x="3486174" y="5456905"/>
+              <a:ext cx="260878" cy="80101"/>
             </a:xfrm>
             <a:prstGeom prst="rect">
               <a:avLst/>
@@ -11130,14 +11578,290 @@
                   <a:latin typeface="Helvetica"/>
                   <a:cs typeface="Helvetica"/>
                 </a:rPr>
-                <a:t>25</a:t>
+                <a:t>-20%</a:t>
               </a:r>
             </a:p>
           </p:txBody>
         </p:sp>
         <p:sp>
           <p:nvSpPr>
-            <p:cNvPr id="35" name="tx35"/>
+            <p:cNvPr id="37" name="tx37"/>
+            <p:cNvSpPr/>
+            <p:nvPr/>
+          </p:nvSpPr>
+          <p:spPr>
+            <a:xfrm>
+              <a:off x="4261461" y="5456905"/>
+              <a:ext cx="260878" cy="80101"/>
+            </a:xfrm>
+            <a:prstGeom prst="rect">
+              <a:avLst/>
+            </a:prstGeom>
+            <a:noFill/>
+          </p:spPr>
+          <p:txBody>
+            <a:bodyPr lIns="0" rIns="0" tIns="0" bIns="0" anchorCtr="1" anchor="ctr" wrap="none"/>
+            <a:lstStyle/>
+            <a:p>
+              <a:pPr algn="l" marL="0" marR="0" indent="0">
+                <a:lnSpc>
+                  <a:spcPts val="880"/>
+                </a:lnSpc>
+                <a:spcBef>
+                  <a:spcPts val="0"/>
+                </a:spcBef>
+                <a:spcAft>
+                  <a:spcPts val="0"/>
+                </a:spcAft>
+              </a:pPr>
+              <a:r>
+                <a:rPr sz="880">
+                  <a:solidFill>
+                    <a:srgbClr val="4D4D4D">
+                      <a:alpha val="100000"/>
+                    </a:srgbClr>
+                  </a:solidFill>
+                  <a:latin typeface="Helvetica"/>
+                  <a:cs typeface="Helvetica"/>
+                </a:rPr>
+                <a:t>-10%</a:t>
+              </a:r>
+            </a:p>
+          </p:txBody>
+        </p:sp>
+        <p:sp>
+          <p:nvSpPr>
+            <p:cNvPr id="38" name="tx38"/>
+            <p:cNvSpPr/>
+            <p:nvPr/>
+          </p:nvSpPr>
+          <p:spPr>
+            <a:xfrm>
+              <a:off x="5086445" y="5456905"/>
+              <a:ext cx="161483" cy="80101"/>
+            </a:xfrm>
+            <a:prstGeom prst="rect">
+              <a:avLst/>
+            </a:prstGeom>
+            <a:noFill/>
+          </p:spPr>
+          <p:txBody>
+            <a:bodyPr lIns="0" rIns="0" tIns="0" bIns="0" anchorCtr="1" anchor="ctr" wrap="none"/>
+            <a:lstStyle/>
+            <a:p>
+              <a:pPr algn="l" marL="0" marR="0" indent="0">
+                <a:lnSpc>
+                  <a:spcPts val="880"/>
+                </a:lnSpc>
+                <a:spcBef>
+                  <a:spcPts val="0"/>
+                </a:spcBef>
+                <a:spcAft>
+                  <a:spcPts val="0"/>
+                </a:spcAft>
+              </a:pPr>
+              <a:r>
+                <a:rPr sz="880">
+                  <a:solidFill>
+                    <a:srgbClr val="4D4D4D">
+                      <a:alpha val="100000"/>
+                    </a:srgbClr>
+                  </a:solidFill>
+                  <a:latin typeface="Helvetica"/>
+                  <a:cs typeface="Helvetica"/>
+                </a:rPr>
+                <a:t>0%</a:t>
+              </a:r>
+            </a:p>
+          </p:txBody>
+        </p:sp>
+        <p:sp>
+          <p:nvSpPr>
+            <p:cNvPr id="39" name="tx39"/>
+            <p:cNvSpPr/>
+            <p:nvPr/>
+          </p:nvSpPr>
+          <p:spPr>
+            <a:xfrm>
+              <a:off x="5830641" y="5456905"/>
+              <a:ext cx="223662" cy="80101"/>
+            </a:xfrm>
+            <a:prstGeom prst="rect">
+              <a:avLst/>
+            </a:prstGeom>
+            <a:noFill/>
+          </p:spPr>
+          <p:txBody>
+            <a:bodyPr lIns="0" rIns="0" tIns="0" bIns="0" anchorCtr="1" anchor="ctr" wrap="none"/>
+            <a:lstStyle/>
+            <a:p>
+              <a:pPr algn="l" marL="0" marR="0" indent="0">
+                <a:lnSpc>
+                  <a:spcPts val="880"/>
+                </a:lnSpc>
+                <a:spcBef>
+                  <a:spcPts val="0"/>
+                </a:spcBef>
+                <a:spcAft>
+                  <a:spcPts val="0"/>
+                </a:spcAft>
+              </a:pPr>
+              <a:r>
+                <a:rPr sz="880">
+                  <a:solidFill>
+                    <a:srgbClr val="4D4D4D">
+                      <a:alpha val="100000"/>
+                    </a:srgbClr>
+                  </a:solidFill>
+                  <a:latin typeface="Helvetica"/>
+                  <a:cs typeface="Helvetica"/>
+                </a:rPr>
+                <a:t>10%</a:t>
+              </a:r>
+            </a:p>
+          </p:txBody>
+        </p:sp>
+        <p:sp>
+          <p:nvSpPr>
+            <p:cNvPr id="40" name="tx40"/>
+            <p:cNvSpPr/>
+            <p:nvPr/>
+          </p:nvSpPr>
+          <p:spPr>
+            <a:xfrm>
+              <a:off x="6605928" y="5456905"/>
+              <a:ext cx="223662" cy="80101"/>
+            </a:xfrm>
+            <a:prstGeom prst="rect">
+              <a:avLst/>
+            </a:prstGeom>
+            <a:noFill/>
+          </p:spPr>
+          <p:txBody>
+            <a:bodyPr lIns="0" rIns="0" tIns="0" bIns="0" anchorCtr="1" anchor="ctr" wrap="none"/>
+            <a:lstStyle/>
+            <a:p>
+              <a:pPr algn="l" marL="0" marR="0" indent="0">
+                <a:lnSpc>
+                  <a:spcPts val="880"/>
+                </a:lnSpc>
+                <a:spcBef>
+                  <a:spcPts val="0"/>
+                </a:spcBef>
+                <a:spcAft>
+                  <a:spcPts val="0"/>
+                </a:spcAft>
+              </a:pPr>
+              <a:r>
+                <a:rPr sz="880">
+                  <a:solidFill>
+                    <a:srgbClr val="4D4D4D">
+                      <a:alpha val="100000"/>
+                    </a:srgbClr>
+                  </a:solidFill>
+                  <a:latin typeface="Helvetica"/>
+                  <a:cs typeface="Helvetica"/>
+                </a:rPr>
+                <a:t>20%</a:t>
+              </a:r>
+            </a:p>
+          </p:txBody>
+        </p:sp>
+        <p:sp>
+          <p:nvSpPr>
+            <p:cNvPr id="41" name="tx41"/>
+            <p:cNvSpPr/>
+            <p:nvPr/>
+          </p:nvSpPr>
+          <p:spPr>
+            <a:xfrm>
+              <a:off x="7381214" y="5456905"/>
+              <a:ext cx="223662" cy="80101"/>
+            </a:xfrm>
+            <a:prstGeom prst="rect">
+              <a:avLst/>
+            </a:prstGeom>
+            <a:noFill/>
+          </p:spPr>
+          <p:txBody>
+            <a:bodyPr lIns="0" rIns="0" tIns="0" bIns="0" anchorCtr="1" anchor="ctr" wrap="none"/>
+            <a:lstStyle/>
+            <a:p>
+              <a:pPr algn="l" marL="0" marR="0" indent="0">
+                <a:lnSpc>
+                  <a:spcPts val="880"/>
+                </a:lnSpc>
+                <a:spcBef>
+                  <a:spcPts val="0"/>
+                </a:spcBef>
+                <a:spcAft>
+                  <a:spcPts val="0"/>
+                </a:spcAft>
+              </a:pPr>
+              <a:r>
+                <a:rPr sz="880">
+                  <a:solidFill>
+                    <a:srgbClr val="4D4D4D">
+                      <a:alpha val="100000"/>
+                    </a:srgbClr>
+                  </a:solidFill>
+                  <a:latin typeface="Helvetica"/>
+                  <a:cs typeface="Helvetica"/>
+                </a:rPr>
+                <a:t>30%</a:t>
+              </a:r>
+            </a:p>
+          </p:txBody>
+        </p:sp>
+        <p:sp>
+          <p:nvSpPr>
+            <p:cNvPr id="42" name="tx42"/>
+            <p:cNvSpPr/>
+            <p:nvPr/>
+          </p:nvSpPr>
+          <p:spPr>
+            <a:xfrm>
+              <a:off x="8156500" y="5456905"/>
+              <a:ext cx="223662" cy="80101"/>
+            </a:xfrm>
+            <a:prstGeom prst="rect">
+              <a:avLst/>
+            </a:prstGeom>
+            <a:noFill/>
+          </p:spPr>
+          <p:txBody>
+            <a:bodyPr lIns="0" rIns="0" tIns="0" bIns="0" anchorCtr="1" anchor="ctr" wrap="none"/>
+            <a:lstStyle/>
+            <a:p>
+              <a:pPr algn="l" marL="0" marR="0" indent="0">
+                <a:lnSpc>
+                  <a:spcPts val="880"/>
+                </a:lnSpc>
+                <a:spcBef>
+                  <a:spcPts val="0"/>
+                </a:spcBef>
+                <a:spcAft>
+                  <a:spcPts val="0"/>
+                </a:spcAft>
+              </a:pPr>
+              <a:r>
+                <a:rPr sz="880">
+                  <a:solidFill>
+                    <a:srgbClr val="4D4D4D">
+                      <a:alpha val="100000"/>
+                    </a:srgbClr>
+                  </a:solidFill>
+                  <a:latin typeface="Helvetica"/>
+                  <a:cs typeface="Helvetica"/>
+                </a:rPr>
+                <a:t>40%</a:t>
+              </a:r>
+            </a:p>
+          </p:txBody>
+        </p:sp>
+        <p:sp>
+          <p:nvSpPr>
+            <p:cNvPr id="43" name="tx43"/>
             <p:cNvSpPr/>
             <p:nvPr/>
           </p:nvSpPr>
@@ -11183,7 +11907,7 @@
         </p:sp>
         <p:sp>
           <p:nvSpPr>
-            <p:cNvPr id="36" name="tx36"/>
+            <p:cNvPr id="44" name="tx44"/>
             <p:cNvSpPr/>
             <p:nvPr/>
           </p:nvSpPr>
@@ -11229,7 +11953,7 @@
         </p:sp>
         <p:sp>
           <p:nvSpPr>
-            <p:cNvPr id="37" name="tx37"/>
+            <p:cNvPr id="45" name="tx45"/>
             <p:cNvSpPr/>
             <p:nvPr/>
           </p:nvSpPr>
@@ -11275,7 +11999,7 @@
         </p:sp>
         <p:sp>
           <p:nvSpPr>
-            <p:cNvPr id="38" name="tx38"/>
+            <p:cNvPr id="46" name="tx46"/>
             <p:cNvSpPr/>
             <p:nvPr/>
           </p:nvSpPr>
@@ -11574,26 +12298,26 @@
           </p:nvSpPr>
           <p:spPr>
             <a:xfrm>
-              <a:off x="2259863" y="1557141"/>
-              <a:ext cx="0" cy="3837134"/>
+              <a:off x="941876" y="5219860"/>
+              <a:ext cx="7675334" cy="0"/>
             </a:xfrm>
             <a:custGeom>
               <a:avLst/>
               <a:pathLst>
-                <a:path w="0" h="3837134">
+                <a:path w="7675334" h="0">
                   <a:moveTo>
-                    <a:pt x="0" y="3837134"/>
+                    <a:pt x="0" y="0"/>
                   </a:moveTo>
                   <a:lnTo>
-                    <a:pt x="0" y="0"/>
-                  </a:lnTo>
-                  <a:lnTo>
-                    <a:pt x="0" y="0"/>
+                    <a:pt x="7675334" y="0"/>
+                  </a:lnTo>
+                  <a:lnTo>
+                    <a:pt x="7675334" y="0"/>
                   </a:lnTo>
                 </a:path>
               </a:pathLst>
             </a:custGeom>
-            <a:ln w="6775" cap="flat">
+            <a:ln w="13550" cap="flat">
               <a:solidFill>
                 <a:srgbClr val="EBEBEB">
                   <a:alpha val="100000"/>
@@ -11617,26 +12341,26 @@
           </p:nvSpPr>
           <p:spPr>
             <a:xfrm>
-              <a:off x="4198078" y="1557141"/>
-              <a:ext cx="0" cy="3837134"/>
+              <a:off x="941876" y="4347784"/>
+              <a:ext cx="7675334" cy="0"/>
             </a:xfrm>
             <a:custGeom>
               <a:avLst/>
               <a:pathLst>
-                <a:path w="0" h="3837134">
+                <a:path w="7675334" h="0">
                   <a:moveTo>
-                    <a:pt x="0" y="3837134"/>
+                    <a:pt x="0" y="0"/>
                   </a:moveTo>
                   <a:lnTo>
-                    <a:pt x="0" y="0"/>
-                  </a:lnTo>
-                  <a:lnTo>
-                    <a:pt x="0" y="0"/>
+                    <a:pt x="7675334" y="0"/>
+                  </a:lnTo>
+                  <a:lnTo>
+                    <a:pt x="7675334" y="0"/>
                   </a:lnTo>
                 </a:path>
               </a:pathLst>
             </a:custGeom>
-            <a:ln w="6775" cap="flat">
+            <a:ln w="13550" cap="flat">
               <a:solidFill>
                 <a:srgbClr val="EBEBEB">
                   <a:alpha val="100000"/>
@@ -11660,26 +12384,26 @@
           </p:nvSpPr>
           <p:spPr>
             <a:xfrm>
-              <a:off x="6136294" y="1557141"/>
-              <a:ext cx="0" cy="3837134"/>
+              <a:off x="941876" y="3475708"/>
+              <a:ext cx="7675334" cy="0"/>
             </a:xfrm>
             <a:custGeom>
               <a:avLst/>
               <a:pathLst>
-                <a:path w="0" h="3837134">
+                <a:path w="7675334" h="0">
                   <a:moveTo>
-                    <a:pt x="0" y="3837134"/>
+                    <a:pt x="0" y="0"/>
                   </a:moveTo>
                   <a:lnTo>
-                    <a:pt x="0" y="0"/>
-                  </a:lnTo>
-                  <a:lnTo>
-                    <a:pt x="0" y="0"/>
+                    <a:pt x="7675334" y="0"/>
+                  </a:lnTo>
+                  <a:lnTo>
+                    <a:pt x="7675334" y="0"/>
                   </a:lnTo>
                 </a:path>
               </a:pathLst>
             </a:custGeom>
-            <a:ln w="6775" cap="flat">
+            <a:ln w="13550" cap="flat">
               <a:solidFill>
                 <a:srgbClr val="EBEBEB">
                   <a:alpha val="100000"/>
@@ -11703,26 +12427,26 @@
           </p:nvSpPr>
           <p:spPr>
             <a:xfrm>
-              <a:off x="8074510" y="1557141"/>
-              <a:ext cx="0" cy="3837134"/>
+              <a:off x="941876" y="2603632"/>
+              <a:ext cx="7675334" cy="0"/>
             </a:xfrm>
             <a:custGeom>
               <a:avLst/>
               <a:pathLst>
-                <a:path w="0" h="3837134">
+                <a:path w="7675334" h="0">
                   <a:moveTo>
-                    <a:pt x="0" y="3837134"/>
+                    <a:pt x="0" y="0"/>
                   </a:moveTo>
                   <a:lnTo>
-                    <a:pt x="0" y="0"/>
-                  </a:lnTo>
-                  <a:lnTo>
-                    <a:pt x="0" y="0"/>
+                    <a:pt x="7675334" y="0"/>
+                  </a:lnTo>
+                  <a:lnTo>
+                    <a:pt x="7675334" y="0"/>
                   </a:lnTo>
                 </a:path>
               </a:pathLst>
             </a:custGeom>
-            <a:ln w="6775" cap="flat">
+            <a:ln w="13550" cap="flat">
               <a:solidFill>
                 <a:srgbClr val="EBEBEB">
                   <a:alpha val="100000"/>
@@ -11746,7 +12470,7 @@
           </p:nvSpPr>
           <p:spPr>
             <a:xfrm>
-              <a:off x="941876" y="5219860"/>
+              <a:off x="941876" y="1731556"/>
               <a:ext cx="7675334" cy="0"/>
             </a:xfrm>
             <a:custGeom>
@@ -11789,21 +12513,21 @@
           </p:nvSpPr>
           <p:spPr>
             <a:xfrm>
-              <a:off x="941876" y="4347784"/>
-              <a:ext cx="7675334" cy="0"/>
+              <a:off x="1290755" y="1557141"/>
+              <a:ext cx="0" cy="3837134"/>
             </a:xfrm>
             <a:custGeom>
               <a:avLst/>
               <a:pathLst>
-                <a:path w="7675334" h="0">
+                <a:path w="0" h="3837134">
                   <a:moveTo>
+                    <a:pt x="0" y="3837134"/>
+                  </a:moveTo>
+                  <a:lnTo>
                     <a:pt x="0" y="0"/>
-                  </a:moveTo>
-                  <a:lnTo>
-                    <a:pt x="7675334" y="0"/>
-                  </a:lnTo>
-                  <a:lnTo>
-                    <a:pt x="7675334" y="0"/>
+                  </a:lnTo>
+                  <a:lnTo>
+                    <a:pt x="0" y="0"/>
                   </a:lnTo>
                 </a:path>
               </a:pathLst>
@@ -11832,21 +12556,21 @@
           </p:nvSpPr>
           <p:spPr>
             <a:xfrm>
-              <a:off x="941876" y="3475708"/>
-              <a:ext cx="7675334" cy="0"/>
+              <a:off x="2066041" y="1557141"/>
+              <a:ext cx="0" cy="3837134"/>
             </a:xfrm>
             <a:custGeom>
               <a:avLst/>
               <a:pathLst>
-                <a:path w="7675334" h="0">
+                <a:path w="0" h="3837134">
                   <a:moveTo>
+                    <a:pt x="0" y="3837134"/>
+                  </a:moveTo>
+                  <a:lnTo>
                     <a:pt x="0" y="0"/>
-                  </a:moveTo>
-                  <a:lnTo>
-                    <a:pt x="7675334" y="0"/>
-                  </a:lnTo>
-                  <a:lnTo>
-                    <a:pt x="7675334" y="0"/>
+                  </a:lnTo>
+                  <a:lnTo>
+                    <a:pt x="0" y="0"/>
                   </a:lnTo>
                 </a:path>
               </a:pathLst>
@@ -11875,21 +12599,21 @@
           </p:nvSpPr>
           <p:spPr>
             <a:xfrm>
-              <a:off x="941876" y="2603632"/>
-              <a:ext cx="7675334" cy="0"/>
+              <a:off x="2841327" y="1557141"/>
+              <a:ext cx="0" cy="3837134"/>
             </a:xfrm>
             <a:custGeom>
               <a:avLst/>
               <a:pathLst>
-                <a:path w="7675334" h="0">
+                <a:path w="0" h="3837134">
                   <a:moveTo>
+                    <a:pt x="0" y="3837134"/>
+                  </a:moveTo>
+                  <a:lnTo>
                     <a:pt x="0" y="0"/>
-                  </a:moveTo>
-                  <a:lnTo>
-                    <a:pt x="7675334" y="0"/>
-                  </a:lnTo>
-                  <a:lnTo>
-                    <a:pt x="7675334" y="0"/>
+                  </a:lnTo>
+                  <a:lnTo>
+                    <a:pt x="0" y="0"/>
                   </a:lnTo>
                 </a:path>
               </a:pathLst>
@@ -11918,21 +12642,21 @@
           </p:nvSpPr>
           <p:spPr>
             <a:xfrm>
-              <a:off x="941876" y="1731556"/>
-              <a:ext cx="7675334" cy="0"/>
+              <a:off x="3616614" y="1557141"/>
+              <a:ext cx="0" cy="3837134"/>
             </a:xfrm>
             <a:custGeom>
               <a:avLst/>
               <a:pathLst>
-                <a:path w="7675334" h="0">
+                <a:path w="0" h="3837134">
                   <a:moveTo>
+                    <a:pt x="0" y="3837134"/>
+                  </a:moveTo>
+                  <a:lnTo>
                     <a:pt x="0" y="0"/>
-                  </a:moveTo>
-                  <a:lnTo>
-                    <a:pt x="7675334" y="0"/>
-                  </a:lnTo>
-                  <a:lnTo>
-                    <a:pt x="7675334" y="0"/>
+                  </a:lnTo>
+                  <a:lnTo>
+                    <a:pt x="0" y="0"/>
                   </a:lnTo>
                 </a:path>
               </a:pathLst>
@@ -11961,7 +12685,7 @@
           </p:nvSpPr>
           <p:spPr>
             <a:xfrm>
-              <a:off x="1290755" y="1557141"/>
+              <a:off x="4391900" y="1557141"/>
               <a:ext cx="0" cy="3837134"/>
             </a:xfrm>
             <a:custGeom>
@@ -12004,7 +12728,7 @@
           </p:nvSpPr>
           <p:spPr>
             <a:xfrm>
-              <a:off x="3228970" y="1557141"/>
+              <a:off x="5167186" y="1557141"/>
               <a:ext cx="0" cy="3837134"/>
             </a:xfrm>
             <a:custGeom>
@@ -12047,7 +12771,7 @@
           </p:nvSpPr>
           <p:spPr>
             <a:xfrm>
-              <a:off x="5167186" y="1557141"/>
+              <a:off x="5942473" y="1557141"/>
               <a:ext cx="0" cy="3837134"/>
             </a:xfrm>
             <a:custGeom>
@@ -12090,7 +12814,7 @@
           </p:nvSpPr>
           <p:spPr>
             <a:xfrm>
-              <a:off x="7105402" y="1557141"/>
+              <a:off x="6717759" y="1557141"/>
               <a:ext cx="0" cy="3837134"/>
             </a:xfrm>
             <a:custGeom>
@@ -12133,7 +12857,7 @@
           </p:nvSpPr>
           <p:spPr>
             <a:xfrm>
-              <a:off x="5167186" y="1557141"/>
+              <a:off x="7493045" y="1557141"/>
               <a:ext cx="0" cy="3837134"/>
             </a:xfrm>
             <a:custGeom>
@@ -12152,9 +12876,95 @@
                 </a:path>
               </a:pathLst>
             </a:custGeom>
-            <a:ln w="10840" cap="flat">
+            <a:ln w="13550" cap="flat">
               <a:solidFill>
-                <a:srgbClr val="8C8C8C">
+                <a:srgbClr val="EBEBEB">
+                  <a:alpha val="100000"/>
+                </a:srgbClr>
+              </a:solidFill>
+              <a:prstDash val="solid"/>
+              <a:round/>
+            </a:ln>
+          </p:spPr>
+          <p:txBody>
+            <a:bodyPr/>
+            <a:lstStyle/>
+            <a:p/>
+          </p:txBody>
+        </p:sp>
+        <p:sp>
+          <p:nvSpPr>
+            <p:cNvPr id="22" name="pl22"/>
+            <p:cNvSpPr/>
+            <p:nvPr/>
+          </p:nvSpPr>
+          <p:spPr>
+            <a:xfrm>
+              <a:off x="8268332" y="1557141"/>
+              <a:ext cx="0" cy="3837134"/>
+            </a:xfrm>
+            <a:custGeom>
+              <a:avLst/>
+              <a:pathLst>
+                <a:path w="0" h="3837134">
+                  <a:moveTo>
+                    <a:pt x="0" y="3837134"/>
+                  </a:moveTo>
+                  <a:lnTo>
+                    <a:pt x="0" y="0"/>
+                  </a:lnTo>
+                  <a:lnTo>
+                    <a:pt x="0" y="0"/>
+                  </a:lnTo>
+                </a:path>
+              </a:pathLst>
+            </a:custGeom>
+            <a:ln w="13550" cap="flat">
+              <a:solidFill>
+                <a:srgbClr val="EBEBEB">
+                  <a:alpha val="100000"/>
+                </a:srgbClr>
+              </a:solidFill>
+              <a:prstDash val="solid"/>
+              <a:round/>
+            </a:ln>
+          </p:spPr>
+          <p:txBody>
+            <a:bodyPr/>
+            <a:lstStyle/>
+            <a:p/>
+          </p:txBody>
+        </p:sp>
+        <p:sp>
+          <p:nvSpPr>
+            <p:cNvPr id="23" name="pl23"/>
+            <p:cNvSpPr/>
+            <p:nvPr/>
+          </p:nvSpPr>
+          <p:spPr>
+            <a:xfrm>
+              <a:off x="4391900" y="1557141"/>
+              <a:ext cx="0" cy="3837134"/>
+            </a:xfrm>
+            <a:custGeom>
+              <a:avLst/>
+              <a:pathLst>
+                <a:path w="0" h="3837134">
+                  <a:moveTo>
+                    <a:pt x="0" y="3837134"/>
+                  </a:moveTo>
+                  <a:lnTo>
+                    <a:pt x="0" y="0"/>
+                  </a:lnTo>
+                  <a:lnTo>
+                    <a:pt x="0" y="0"/>
+                  </a:lnTo>
+                </a:path>
+              </a:pathLst>
+            </a:custGeom>
+            <a:ln w="13550" cap="flat">
+              <a:solidFill>
+                <a:srgbClr val="000000">
                   <a:alpha val="100000"/>
                 </a:srgbClr>
               </a:solidFill>
@@ -12170,7 +12980,7 @@
         </p:sp>
         <p:sp>
           <p:nvSpPr>
-            <p:cNvPr id="22" name="pg22"/>
+            <p:cNvPr id="24" name="pg24"/>
             <p:cNvSpPr/>
             <p:nvPr/>
           </p:nvSpPr>
@@ -13401,7 +14211,7 @@
         </p:sp>
         <p:sp>
           <p:nvSpPr>
-            <p:cNvPr id="23" name="pl23"/>
+            <p:cNvPr id="25" name="pl25"/>
             <p:cNvSpPr/>
             <p:nvPr/>
           </p:nvSpPr>
@@ -14026,7 +14836,7 @@
         </p:sp>
         <p:sp>
           <p:nvSpPr>
-            <p:cNvPr id="24" name="pl24"/>
+            <p:cNvPr id="26" name="pl26"/>
             <p:cNvSpPr/>
             <p:nvPr/>
           </p:nvSpPr>
@@ -14651,7 +15461,7 @@
         </p:sp>
         <p:sp>
           <p:nvSpPr>
-            <p:cNvPr id="25" name="pl25"/>
+            <p:cNvPr id="27" name="pl27"/>
             <p:cNvSpPr/>
             <p:nvPr/>
           </p:nvSpPr>
@@ -15285,7 +16095,7 @@
         </p:sp>
         <p:sp>
           <p:nvSpPr>
-            <p:cNvPr id="26" name="tx26"/>
+            <p:cNvPr id="28" name="tx28"/>
             <p:cNvSpPr/>
             <p:nvPr/>
           </p:nvSpPr>
@@ -15331,7 +16141,7 @@
         </p:sp>
         <p:sp>
           <p:nvSpPr>
-            <p:cNvPr id="27" name="tx27"/>
+            <p:cNvPr id="29" name="tx29"/>
             <p:cNvSpPr/>
             <p:nvPr/>
           </p:nvSpPr>
@@ -15377,7 +16187,7 @@
         </p:sp>
         <p:sp>
           <p:nvSpPr>
-            <p:cNvPr id="28" name="tx28"/>
+            <p:cNvPr id="30" name="tx30"/>
             <p:cNvSpPr/>
             <p:nvPr/>
           </p:nvSpPr>
@@ -15423,7 +16233,7 @@
         </p:sp>
         <p:sp>
           <p:nvSpPr>
-            <p:cNvPr id="29" name="tx29"/>
+            <p:cNvPr id="31" name="tx31"/>
             <p:cNvSpPr/>
             <p:nvPr/>
           </p:nvSpPr>
@@ -15469,7 +16279,7 @@
         </p:sp>
         <p:sp>
           <p:nvSpPr>
-            <p:cNvPr id="30" name="tx30"/>
+            <p:cNvPr id="32" name="tx32"/>
             <p:cNvSpPr/>
             <p:nvPr/>
           </p:nvSpPr>
@@ -15515,14 +16325,14 @@
         </p:sp>
         <p:sp>
           <p:nvSpPr>
-            <p:cNvPr id="31" name="tx31"/>
+            <p:cNvPr id="33" name="tx33"/>
             <p:cNvSpPr/>
             <p:nvPr/>
           </p:nvSpPr>
           <p:spPr>
             <a:xfrm>
-              <a:off x="1209967" y="5456905"/>
-              <a:ext cx="161574" cy="80101"/>
+              <a:off x="1160315" y="5456905"/>
+              <a:ext cx="260878" cy="80101"/>
             </a:xfrm>
             <a:prstGeom prst="rect">
               <a:avLst/>
@@ -15554,21 +16364,21 @@
                   <a:latin typeface="Helvetica"/>
                   <a:cs typeface="Helvetica"/>
                 </a:rPr>
-                <a:t>-50</a:t>
+                <a:t>-50%</a:t>
               </a:r>
             </a:p>
           </p:txBody>
         </p:sp>
         <p:sp>
           <p:nvSpPr>
-            <p:cNvPr id="32" name="tx32"/>
+            <p:cNvPr id="34" name="tx34"/>
             <p:cNvSpPr/>
             <p:nvPr/>
           </p:nvSpPr>
           <p:spPr>
             <a:xfrm>
-              <a:off x="3148183" y="5456905"/>
-              <a:ext cx="161574" cy="80101"/>
+              <a:off x="1935602" y="5456905"/>
+              <a:ext cx="260878" cy="80101"/>
             </a:xfrm>
             <a:prstGeom prst="rect">
               <a:avLst/>
@@ -15600,21 +16410,21 @@
                   <a:latin typeface="Helvetica"/>
                   <a:cs typeface="Helvetica"/>
                 </a:rPr>
-                <a:t>-25</a:t>
+                <a:t>-40%</a:t>
               </a:r>
             </a:p>
           </p:txBody>
         </p:sp>
         <p:sp>
           <p:nvSpPr>
-            <p:cNvPr id="33" name="tx33"/>
+            <p:cNvPr id="35" name="tx35"/>
             <p:cNvSpPr/>
             <p:nvPr/>
           </p:nvSpPr>
           <p:spPr>
             <a:xfrm>
-              <a:off x="5136097" y="5456905"/>
-              <a:ext cx="62179" cy="80101"/>
+              <a:off x="2710888" y="5456905"/>
+              <a:ext cx="260878" cy="80101"/>
             </a:xfrm>
             <a:prstGeom prst="rect">
               <a:avLst/>
@@ -15646,21 +16456,21 @@
                   <a:latin typeface="Helvetica"/>
                   <a:cs typeface="Helvetica"/>
                 </a:rPr>
-                <a:t>0</a:t>
+                <a:t>-30%</a:t>
               </a:r>
             </a:p>
           </p:txBody>
         </p:sp>
         <p:sp>
           <p:nvSpPr>
-            <p:cNvPr id="34" name="tx34"/>
+            <p:cNvPr id="36" name="tx36"/>
             <p:cNvSpPr/>
             <p:nvPr/>
           </p:nvSpPr>
           <p:spPr>
             <a:xfrm>
-              <a:off x="7043223" y="5456905"/>
-              <a:ext cx="124358" cy="80101"/>
+              <a:off x="3486174" y="5456905"/>
+              <a:ext cx="260878" cy="80101"/>
             </a:xfrm>
             <a:prstGeom prst="rect">
               <a:avLst/>
@@ -15692,14 +16502,290 @@
                   <a:latin typeface="Helvetica"/>
                   <a:cs typeface="Helvetica"/>
                 </a:rPr>
-                <a:t>25</a:t>
+                <a:t>-20%</a:t>
               </a:r>
             </a:p>
           </p:txBody>
         </p:sp>
         <p:sp>
           <p:nvSpPr>
-            <p:cNvPr id="35" name="tx35"/>
+            <p:cNvPr id="37" name="tx37"/>
+            <p:cNvSpPr/>
+            <p:nvPr/>
+          </p:nvSpPr>
+          <p:spPr>
+            <a:xfrm>
+              <a:off x="4261461" y="5456905"/>
+              <a:ext cx="260878" cy="80101"/>
+            </a:xfrm>
+            <a:prstGeom prst="rect">
+              <a:avLst/>
+            </a:prstGeom>
+            <a:noFill/>
+          </p:spPr>
+          <p:txBody>
+            <a:bodyPr lIns="0" rIns="0" tIns="0" bIns="0" anchorCtr="1" anchor="ctr" wrap="none"/>
+            <a:lstStyle/>
+            <a:p>
+              <a:pPr algn="l" marL="0" marR="0" indent="0">
+                <a:lnSpc>
+                  <a:spcPts val="880"/>
+                </a:lnSpc>
+                <a:spcBef>
+                  <a:spcPts val="0"/>
+                </a:spcBef>
+                <a:spcAft>
+                  <a:spcPts val="0"/>
+                </a:spcAft>
+              </a:pPr>
+              <a:r>
+                <a:rPr sz="880">
+                  <a:solidFill>
+                    <a:srgbClr val="4D4D4D">
+                      <a:alpha val="100000"/>
+                    </a:srgbClr>
+                  </a:solidFill>
+                  <a:latin typeface="Helvetica"/>
+                  <a:cs typeface="Helvetica"/>
+                </a:rPr>
+                <a:t>-10%</a:t>
+              </a:r>
+            </a:p>
+          </p:txBody>
+        </p:sp>
+        <p:sp>
+          <p:nvSpPr>
+            <p:cNvPr id="38" name="tx38"/>
+            <p:cNvSpPr/>
+            <p:nvPr/>
+          </p:nvSpPr>
+          <p:spPr>
+            <a:xfrm>
+              <a:off x="5086445" y="5456905"/>
+              <a:ext cx="161483" cy="80101"/>
+            </a:xfrm>
+            <a:prstGeom prst="rect">
+              <a:avLst/>
+            </a:prstGeom>
+            <a:noFill/>
+          </p:spPr>
+          <p:txBody>
+            <a:bodyPr lIns="0" rIns="0" tIns="0" bIns="0" anchorCtr="1" anchor="ctr" wrap="none"/>
+            <a:lstStyle/>
+            <a:p>
+              <a:pPr algn="l" marL="0" marR="0" indent="0">
+                <a:lnSpc>
+                  <a:spcPts val="880"/>
+                </a:lnSpc>
+                <a:spcBef>
+                  <a:spcPts val="0"/>
+                </a:spcBef>
+                <a:spcAft>
+                  <a:spcPts val="0"/>
+                </a:spcAft>
+              </a:pPr>
+              <a:r>
+                <a:rPr sz="880">
+                  <a:solidFill>
+                    <a:srgbClr val="4D4D4D">
+                      <a:alpha val="100000"/>
+                    </a:srgbClr>
+                  </a:solidFill>
+                  <a:latin typeface="Helvetica"/>
+                  <a:cs typeface="Helvetica"/>
+                </a:rPr>
+                <a:t>0%</a:t>
+              </a:r>
+            </a:p>
+          </p:txBody>
+        </p:sp>
+        <p:sp>
+          <p:nvSpPr>
+            <p:cNvPr id="39" name="tx39"/>
+            <p:cNvSpPr/>
+            <p:nvPr/>
+          </p:nvSpPr>
+          <p:spPr>
+            <a:xfrm>
+              <a:off x="5830641" y="5456905"/>
+              <a:ext cx="223662" cy="80101"/>
+            </a:xfrm>
+            <a:prstGeom prst="rect">
+              <a:avLst/>
+            </a:prstGeom>
+            <a:noFill/>
+          </p:spPr>
+          <p:txBody>
+            <a:bodyPr lIns="0" rIns="0" tIns="0" bIns="0" anchorCtr="1" anchor="ctr" wrap="none"/>
+            <a:lstStyle/>
+            <a:p>
+              <a:pPr algn="l" marL="0" marR="0" indent="0">
+                <a:lnSpc>
+                  <a:spcPts val="880"/>
+                </a:lnSpc>
+                <a:spcBef>
+                  <a:spcPts val="0"/>
+                </a:spcBef>
+                <a:spcAft>
+                  <a:spcPts val="0"/>
+                </a:spcAft>
+              </a:pPr>
+              <a:r>
+                <a:rPr sz="880">
+                  <a:solidFill>
+                    <a:srgbClr val="4D4D4D">
+                      <a:alpha val="100000"/>
+                    </a:srgbClr>
+                  </a:solidFill>
+                  <a:latin typeface="Helvetica"/>
+                  <a:cs typeface="Helvetica"/>
+                </a:rPr>
+                <a:t>10%</a:t>
+              </a:r>
+            </a:p>
+          </p:txBody>
+        </p:sp>
+        <p:sp>
+          <p:nvSpPr>
+            <p:cNvPr id="40" name="tx40"/>
+            <p:cNvSpPr/>
+            <p:nvPr/>
+          </p:nvSpPr>
+          <p:spPr>
+            <a:xfrm>
+              <a:off x="6605928" y="5456905"/>
+              <a:ext cx="223662" cy="80101"/>
+            </a:xfrm>
+            <a:prstGeom prst="rect">
+              <a:avLst/>
+            </a:prstGeom>
+            <a:noFill/>
+          </p:spPr>
+          <p:txBody>
+            <a:bodyPr lIns="0" rIns="0" tIns="0" bIns="0" anchorCtr="1" anchor="ctr" wrap="none"/>
+            <a:lstStyle/>
+            <a:p>
+              <a:pPr algn="l" marL="0" marR="0" indent="0">
+                <a:lnSpc>
+                  <a:spcPts val="880"/>
+                </a:lnSpc>
+                <a:spcBef>
+                  <a:spcPts val="0"/>
+                </a:spcBef>
+                <a:spcAft>
+                  <a:spcPts val="0"/>
+                </a:spcAft>
+              </a:pPr>
+              <a:r>
+                <a:rPr sz="880">
+                  <a:solidFill>
+                    <a:srgbClr val="4D4D4D">
+                      <a:alpha val="100000"/>
+                    </a:srgbClr>
+                  </a:solidFill>
+                  <a:latin typeface="Helvetica"/>
+                  <a:cs typeface="Helvetica"/>
+                </a:rPr>
+                <a:t>20%</a:t>
+              </a:r>
+            </a:p>
+          </p:txBody>
+        </p:sp>
+        <p:sp>
+          <p:nvSpPr>
+            <p:cNvPr id="41" name="tx41"/>
+            <p:cNvSpPr/>
+            <p:nvPr/>
+          </p:nvSpPr>
+          <p:spPr>
+            <a:xfrm>
+              <a:off x="7381214" y="5456905"/>
+              <a:ext cx="223662" cy="80101"/>
+            </a:xfrm>
+            <a:prstGeom prst="rect">
+              <a:avLst/>
+            </a:prstGeom>
+            <a:noFill/>
+          </p:spPr>
+          <p:txBody>
+            <a:bodyPr lIns="0" rIns="0" tIns="0" bIns="0" anchorCtr="1" anchor="ctr" wrap="none"/>
+            <a:lstStyle/>
+            <a:p>
+              <a:pPr algn="l" marL="0" marR="0" indent="0">
+                <a:lnSpc>
+                  <a:spcPts val="880"/>
+                </a:lnSpc>
+                <a:spcBef>
+                  <a:spcPts val="0"/>
+                </a:spcBef>
+                <a:spcAft>
+                  <a:spcPts val="0"/>
+                </a:spcAft>
+              </a:pPr>
+              <a:r>
+                <a:rPr sz="880">
+                  <a:solidFill>
+                    <a:srgbClr val="4D4D4D">
+                      <a:alpha val="100000"/>
+                    </a:srgbClr>
+                  </a:solidFill>
+                  <a:latin typeface="Helvetica"/>
+                  <a:cs typeface="Helvetica"/>
+                </a:rPr>
+                <a:t>30%</a:t>
+              </a:r>
+            </a:p>
+          </p:txBody>
+        </p:sp>
+        <p:sp>
+          <p:nvSpPr>
+            <p:cNvPr id="42" name="tx42"/>
+            <p:cNvSpPr/>
+            <p:nvPr/>
+          </p:nvSpPr>
+          <p:spPr>
+            <a:xfrm>
+              <a:off x="8156500" y="5456905"/>
+              <a:ext cx="223662" cy="80101"/>
+            </a:xfrm>
+            <a:prstGeom prst="rect">
+              <a:avLst/>
+            </a:prstGeom>
+            <a:noFill/>
+          </p:spPr>
+          <p:txBody>
+            <a:bodyPr lIns="0" rIns="0" tIns="0" bIns="0" anchorCtr="1" anchor="ctr" wrap="none"/>
+            <a:lstStyle/>
+            <a:p>
+              <a:pPr algn="l" marL="0" marR="0" indent="0">
+                <a:lnSpc>
+                  <a:spcPts val="880"/>
+                </a:lnSpc>
+                <a:spcBef>
+                  <a:spcPts val="0"/>
+                </a:spcBef>
+                <a:spcAft>
+                  <a:spcPts val="0"/>
+                </a:spcAft>
+              </a:pPr>
+              <a:r>
+                <a:rPr sz="880">
+                  <a:solidFill>
+                    <a:srgbClr val="4D4D4D">
+                      <a:alpha val="100000"/>
+                    </a:srgbClr>
+                  </a:solidFill>
+                  <a:latin typeface="Helvetica"/>
+                  <a:cs typeface="Helvetica"/>
+                </a:rPr>
+                <a:t>40%</a:t>
+              </a:r>
+            </a:p>
+          </p:txBody>
+        </p:sp>
+        <p:sp>
+          <p:nvSpPr>
+            <p:cNvPr id="43" name="tx43"/>
             <p:cNvSpPr/>
             <p:nvPr/>
           </p:nvSpPr>
@@ -15745,7 +16831,7 @@
         </p:sp>
         <p:sp>
           <p:nvSpPr>
-            <p:cNvPr id="36" name="tx36"/>
+            <p:cNvPr id="44" name="tx44"/>
             <p:cNvSpPr/>
             <p:nvPr/>
           </p:nvSpPr>
@@ -15791,7 +16877,7 @@
         </p:sp>
         <p:sp>
           <p:nvSpPr>
-            <p:cNvPr id="37" name="tx37"/>
+            <p:cNvPr id="45" name="tx45"/>
             <p:cNvSpPr/>
             <p:nvPr/>
           </p:nvSpPr>
@@ -15837,7 +16923,7 @@
         </p:sp>
         <p:sp>
           <p:nvSpPr>
-            <p:cNvPr id="38" name="tx38"/>
+            <p:cNvPr id="46" name="tx46"/>
             <p:cNvSpPr/>
             <p:nvPr/>
           </p:nvSpPr>
@@ -16136,26 +17222,26 @@
           </p:nvSpPr>
           <p:spPr>
             <a:xfrm>
-              <a:off x="2259863" y="1557141"/>
-              <a:ext cx="0" cy="3837134"/>
+              <a:off x="941876" y="5219860"/>
+              <a:ext cx="7675334" cy="0"/>
             </a:xfrm>
             <a:custGeom>
               <a:avLst/>
               <a:pathLst>
-                <a:path w="0" h="3837134">
+                <a:path w="7675334" h="0">
                   <a:moveTo>
-                    <a:pt x="0" y="3837134"/>
+                    <a:pt x="0" y="0"/>
                   </a:moveTo>
                   <a:lnTo>
-                    <a:pt x="0" y="0"/>
-                  </a:lnTo>
-                  <a:lnTo>
-                    <a:pt x="0" y="0"/>
+                    <a:pt x="7675334" y="0"/>
+                  </a:lnTo>
+                  <a:lnTo>
+                    <a:pt x="7675334" y="0"/>
                   </a:lnTo>
                 </a:path>
               </a:pathLst>
             </a:custGeom>
-            <a:ln w="6775" cap="flat">
+            <a:ln w="13550" cap="flat">
               <a:solidFill>
                 <a:srgbClr val="EBEBEB">
                   <a:alpha val="100000"/>
@@ -16179,26 +17265,26 @@
           </p:nvSpPr>
           <p:spPr>
             <a:xfrm>
-              <a:off x="4198078" y="1557141"/>
-              <a:ext cx="0" cy="3837134"/>
+              <a:off x="941876" y="4347784"/>
+              <a:ext cx="7675334" cy="0"/>
             </a:xfrm>
             <a:custGeom>
               <a:avLst/>
               <a:pathLst>
-                <a:path w="0" h="3837134">
+                <a:path w="7675334" h="0">
                   <a:moveTo>
-                    <a:pt x="0" y="3837134"/>
+                    <a:pt x="0" y="0"/>
                   </a:moveTo>
                   <a:lnTo>
-                    <a:pt x="0" y="0"/>
-                  </a:lnTo>
-                  <a:lnTo>
-                    <a:pt x="0" y="0"/>
+                    <a:pt x="7675334" y="0"/>
+                  </a:lnTo>
+                  <a:lnTo>
+                    <a:pt x="7675334" y="0"/>
                   </a:lnTo>
                 </a:path>
               </a:pathLst>
             </a:custGeom>
-            <a:ln w="6775" cap="flat">
+            <a:ln w="13550" cap="flat">
               <a:solidFill>
                 <a:srgbClr val="EBEBEB">
                   <a:alpha val="100000"/>
@@ -16222,26 +17308,26 @@
           </p:nvSpPr>
           <p:spPr>
             <a:xfrm>
-              <a:off x="6136294" y="1557141"/>
-              <a:ext cx="0" cy="3837134"/>
+              <a:off x="941876" y="3475708"/>
+              <a:ext cx="7675334" cy="0"/>
             </a:xfrm>
             <a:custGeom>
               <a:avLst/>
               <a:pathLst>
-                <a:path w="0" h="3837134">
+                <a:path w="7675334" h="0">
                   <a:moveTo>
-                    <a:pt x="0" y="3837134"/>
+                    <a:pt x="0" y="0"/>
                   </a:moveTo>
                   <a:lnTo>
-                    <a:pt x="0" y="0"/>
-                  </a:lnTo>
-                  <a:lnTo>
-                    <a:pt x="0" y="0"/>
+                    <a:pt x="7675334" y="0"/>
+                  </a:lnTo>
+                  <a:lnTo>
+                    <a:pt x="7675334" y="0"/>
                   </a:lnTo>
                 </a:path>
               </a:pathLst>
             </a:custGeom>
-            <a:ln w="6775" cap="flat">
+            <a:ln w="13550" cap="flat">
               <a:solidFill>
                 <a:srgbClr val="EBEBEB">
                   <a:alpha val="100000"/>
@@ -16265,26 +17351,26 @@
           </p:nvSpPr>
           <p:spPr>
             <a:xfrm>
-              <a:off x="8074510" y="1557141"/>
-              <a:ext cx="0" cy="3837134"/>
+              <a:off x="941876" y="2603632"/>
+              <a:ext cx="7675334" cy="0"/>
             </a:xfrm>
             <a:custGeom>
               <a:avLst/>
               <a:pathLst>
-                <a:path w="0" h="3837134">
+                <a:path w="7675334" h="0">
                   <a:moveTo>
-                    <a:pt x="0" y="3837134"/>
+                    <a:pt x="0" y="0"/>
                   </a:moveTo>
                   <a:lnTo>
-                    <a:pt x="0" y="0"/>
-                  </a:lnTo>
-                  <a:lnTo>
-                    <a:pt x="0" y="0"/>
+                    <a:pt x="7675334" y="0"/>
+                  </a:lnTo>
+                  <a:lnTo>
+                    <a:pt x="7675334" y="0"/>
                   </a:lnTo>
                 </a:path>
               </a:pathLst>
             </a:custGeom>
-            <a:ln w="6775" cap="flat">
+            <a:ln w="13550" cap="flat">
               <a:solidFill>
                 <a:srgbClr val="EBEBEB">
                   <a:alpha val="100000"/>
@@ -16308,7 +17394,7 @@
           </p:nvSpPr>
           <p:spPr>
             <a:xfrm>
-              <a:off x="941876" y="5219860"/>
+              <a:off x="941876" y="1731556"/>
               <a:ext cx="7675334" cy="0"/>
             </a:xfrm>
             <a:custGeom>
@@ -16351,21 +17437,21 @@
           </p:nvSpPr>
           <p:spPr>
             <a:xfrm>
-              <a:off x="941876" y="4347784"/>
-              <a:ext cx="7675334" cy="0"/>
+              <a:off x="1290755" y="1557141"/>
+              <a:ext cx="0" cy="3837134"/>
             </a:xfrm>
             <a:custGeom>
               <a:avLst/>
               <a:pathLst>
-                <a:path w="7675334" h="0">
+                <a:path w="0" h="3837134">
                   <a:moveTo>
+                    <a:pt x="0" y="3837134"/>
+                  </a:moveTo>
+                  <a:lnTo>
                     <a:pt x="0" y="0"/>
-                  </a:moveTo>
-                  <a:lnTo>
-                    <a:pt x="7675334" y="0"/>
-                  </a:lnTo>
-                  <a:lnTo>
-                    <a:pt x="7675334" y="0"/>
+                  </a:lnTo>
+                  <a:lnTo>
+                    <a:pt x="0" y="0"/>
                   </a:lnTo>
                 </a:path>
               </a:pathLst>
@@ -16394,21 +17480,21 @@
           </p:nvSpPr>
           <p:spPr>
             <a:xfrm>
-              <a:off x="941876" y="3475708"/>
-              <a:ext cx="7675334" cy="0"/>
+              <a:off x="2066041" y="1557141"/>
+              <a:ext cx="0" cy="3837134"/>
             </a:xfrm>
             <a:custGeom>
               <a:avLst/>
               <a:pathLst>
-                <a:path w="7675334" h="0">
+                <a:path w="0" h="3837134">
                   <a:moveTo>
+                    <a:pt x="0" y="3837134"/>
+                  </a:moveTo>
+                  <a:lnTo>
                     <a:pt x="0" y="0"/>
-                  </a:moveTo>
-                  <a:lnTo>
-                    <a:pt x="7675334" y="0"/>
-                  </a:lnTo>
-                  <a:lnTo>
-                    <a:pt x="7675334" y="0"/>
+                  </a:lnTo>
+                  <a:lnTo>
+                    <a:pt x="0" y="0"/>
                   </a:lnTo>
                 </a:path>
               </a:pathLst>
@@ -16437,21 +17523,21 @@
           </p:nvSpPr>
           <p:spPr>
             <a:xfrm>
-              <a:off x="941876" y="2603632"/>
-              <a:ext cx="7675334" cy="0"/>
+              <a:off x="2841327" y="1557141"/>
+              <a:ext cx="0" cy="3837134"/>
             </a:xfrm>
             <a:custGeom>
               <a:avLst/>
               <a:pathLst>
-                <a:path w="7675334" h="0">
+                <a:path w="0" h="3837134">
                   <a:moveTo>
+                    <a:pt x="0" y="3837134"/>
+                  </a:moveTo>
+                  <a:lnTo>
                     <a:pt x="0" y="0"/>
-                  </a:moveTo>
-                  <a:lnTo>
-                    <a:pt x="7675334" y="0"/>
-                  </a:lnTo>
-                  <a:lnTo>
-                    <a:pt x="7675334" y="0"/>
+                  </a:lnTo>
+                  <a:lnTo>
+                    <a:pt x="0" y="0"/>
                   </a:lnTo>
                 </a:path>
               </a:pathLst>
@@ -16480,21 +17566,21 @@
           </p:nvSpPr>
           <p:spPr>
             <a:xfrm>
-              <a:off x="941876" y="1731556"/>
-              <a:ext cx="7675334" cy="0"/>
+              <a:off x="3616614" y="1557141"/>
+              <a:ext cx="0" cy="3837134"/>
             </a:xfrm>
             <a:custGeom>
               <a:avLst/>
               <a:pathLst>
-                <a:path w="7675334" h="0">
+                <a:path w="0" h="3837134">
                   <a:moveTo>
+                    <a:pt x="0" y="3837134"/>
+                  </a:moveTo>
+                  <a:lnTo>
                     <a:pt x="0" y="0"/>
-                  </a:moveTo>
-                  <a:lnTo>
-                    <a:pt x="7675334" y="0"/>
-                  </a:lnTo>
-                  <a:lnTo>
-                    <a:pt x="7675334" y="0"/>
+                  </a:lnTo>
+                  <a:lnTo>
+                    <a:pt x="0" y="0"/>
                   </a:lnTo>
                 </a:path>
               </a:pathLst>
@@ -16523,7 +17609,7 @@
           </p:nvSpPr>
           <p:spPr>
             <a:xfrm>
-              <a:off x="1290755" y="1557141"/>
+              <a:off x="4391900" y="1557141"/>
               <a:ext cx="0" cy="3837134"/>
             </a:xfrm>
             <a:custGeom>
@@ -16566,7 +17652,7 @@
           </p:nvSpPr>
           <p:spPr>
             <a:xfrm>
-              <a:off x="3228970" y="1557141"/>
+              <a:off x="5167186" y="1557141"/>
               <a:ext cx="0" cy="3837134"/>
             </a:xfrm>
             <a:custGeom>
@@ -16609,7 +17695,7 @@
           </p:nvSpPr>
           <p:spPr>
             <a:xfrm>
-              <a:off x="5167186" y="1557141"/>
+              <a:off x="5942473" y="1557141"/>
               <a:ext cx="0" cy="3837134"/>
             </a:xfrm>
             <a:custGeom>
@@ -16652,7 +17738,7 @@
           </p:nvSpPr>
           <p:spPr>
             <a:xfrm>
-              <a:off x="7105402" y="1557141"/>
+              <a:off x="6717759" y="1557141"/>
               <a:ext cx="0" cy="3837134"/>
             </a:xfrm>
             <a:custGeom>
@@ -16695,7 +17781,7 @@
           </p:nvSpPr>
           <p:spPr>
             <a:xfrm>
-              <a:off x="5167186" y="1557141"/>
+              <a:off x="7493045" y="1557141"/>
               <a:ext cx="0" cy="3837134"/>
             </a:xfrm>
             <a:custGeom>
@@ -16714,9 +17800,95 @@
                 </a:path>
               </a:pathLst>
             </a:custGeom>
-            <a:ln w="10840" cap="flat">
+            <a:ln w="13550" cap="flat">
               <a:solidFill>
-                <a:srgbClr val="8C8C8C">
+                <a:srgbClr val="EBEBEB">
+                  <a:alpha val="100000"/>
+                </a:srgbClr>
+              </a:solidFill>
+              <a:prstDash val="solid"/>
+              <a:round/>
+            </a:ln>
+          </p:spPr>
+          <p:txBody>
+            <a:bodyPr/>
+            <a:lstStyle/>
+            <a:p/>
+          </p:txBody>
+        </p:sp>
+        <p:sp>
+          <p:nvSpPr>
+            <p:cNvPr id="22" name="pl22"/>
+            <p:cNvSpPr/>
+            <p:nvPr/>
+          </p:nvSpPr>
+          <p:spPr>
+            <a:xfrm>
+              <a:off x="8268332" y="1557141"/>
+              <a:ext cx="0" cy="3837134"/>
+            </a:xfrm>
+            <a:custGeom>
+              <a:avLst/>
+              <a:pathLst>
+                <a:path w="0" h="3837134">
+                  <a:moveTo>
+                    <a:pt x="0" y="3837134"/>
+                  </a:moveTo>
+                  <a:lnTo>
+                    <a:pt x="0" y="0"/>
+                  </a:lnTo>
+                  <a:lnTo>
+                    <a:pt x="0" y="0"/>
+                  </a:lnTo>
+                </a:path>
+              </a:pathLst>
+            </a:custGeom>
+            <a:ln w="13550" cap="flat">
+              <a:solidFill>
+                <a:srgbClr val="EBEBEB">
+                  <a:alpha val="100000"/>
+                </a:srgbClr>
+              </a:solidFill>
+              <a:prstDash val="solid"/>
+              <a:round/>
+            </a:ln>
+          </p:spPr>
+          <p:txBody>
+            <a:bodyPr/>
+            <a:lstStyle/>
+            <a:p/>
+          </p:txBody>
+        </p:sp>
+        <p:sp>
+          <p:nvSpPr>
+            <p:cNvPr id="23" name="pl23"/>
+            <p:cNvSpPr/>
+            <p:nvPr/>
+          </p:nvSpPr>
+          <p:spPr>
+            <a:xfrm>
+              <a:off x="4391900" y="1557141"/>
+              <a:ext cx="0" cy="3837134"/>
+            </a:xfrm>
+            <a:custGeom>
+              <a:avLst/>
+              <a:pathLst>
+                <a:path w="0" h="3837134">
+                  <a:moveTo>
+                    <a:pt x="0" y="3837134"/>
+                  </a:moveTo>
+                  <a:lnTo>
+                    <a:pt x="0" y="0"/>
+                  </a:lnTo>
+                  <a:lnTo>
+                    <a:pt x="0" y="0"/>
+                  </a:lnTo>
+                </a:path>
+              </a:pathLst>
+            </a:custGeom>
+            <a:ln w="13550" cap="flat">
+              <a:solidFill>
+                <a:srgbClr val="000000">
                   <a:alpha val="100000"/>
                 </a:srgbClr>
               </a:solidFill>
@@ -16732,7 +17904,7 @@
         </p:sp>
         <p:sp>
           <p:nvSpPr>
-            <p:cNvPr id="22" name="pg22"/>
+            <p:cNvPr id="24" name="pg24"/>
             <p:cNvSpPr/>
             <p:nvPr/>
           </p:nvSpPr>
@@ -17963,7 +19135,7 @@
         </p:sp>
         <p:sp>
           <p:nvSpPr>
-            <p:cNvPr id="23" name="pl23"/>
+            <p:cNvPr id="25" name="pl25"/>
             <p:cNvSpPr/>
             <p:nvPr/>
           </p:nvSpPr>
@@ -18588,7 +19760,7 @@
         </p:sp>
         <p:sp>
           <p:nvSpPr>
-            <p:cNvPr id="24" name="pl24"/>
+            <p:cNvPr id="26" name="pl26"/>
             <p:cNvSpPr/>
             <p:nvPr/>
           </p:nvSpPr>
@@ -19213,7 +20385,7 @@
         </p:sp>
         <p:sp>
           <p:nvSpPr>
-            <p:cNvPr id="25" name="pl25"/>
+            <p:cNvPr id="27" name="pl27"/>
             <p:cNvSpPr/>
             <p:nvPr/>
           </p:nvSpPr>
@@ -19847,7 +21019,7 @@
         </p:sp>
         <p:sp>
           <p:nvSpPr>
-            <p:cNvPr id="26" name="tx26"/>
+            <p:cNvPr id="28" name="tx28"/>
             <p:cNvSpPr/>
             <p:nvPr/>
           </p:nvSpPr>
@@ -19893,7 +21065,7 @@
         </p:sp>
         <p:sp>
           <p:nvSpPr>
-            <p:cNvPr id="27" name="tx27"/>
+            <p:cNvPr id="29" name="tx29"/>
             <p:cNvSpPr/>
             <p:nvPr/>
           </p:nvSpPr>
@@ -19939,7 +21111,7 @@
         </p:sp>
         <p:sp>
           <p:nvSpPr>
-            <p:cNvPr id="28" name="tx28"/>
+            <p:cNvPr id="30" name="tx30"/>
             <p:cNvSpPr/>
             <p:nvPr/>
           </p:nvSpPr>
@@ -19985,7 +21157,7 @@
         </p:sp>
         <p:sp>
           <p:nvSpPr>
-            <p:cNvPr id="29" name="tx29"/>
+            <p:cNvPr id="31" name="tx31"/>
             <p:cNvSpPr/>
             <p:nvPr/>
           </p:nvSpPr>
@@ -20031,7 +21203,7 @@
         </p:sp>
         <p:sp>
           <p:nvSpPr>
-            <p:cNvPr id="30" name="tx30"/>
+            <p:cNvPr id="32" name="tx32"/>
             <p:cNvSpPr/>
             <p:nvPr/>
           </p:nvSpPr>
@@ -20077,14 +21249,14 @@
         </p:sp>
         <p:sp>
           <p:nvSpPr>
-            <p:cNvPr id="31" name="tx31"/>
+            <p:cNvPr id="33" name="tx33"/>
             <p:cNvSpPr/>
             <p:nvPr/>
           </p:nvSpPr>
           <p:spPr>
             <a:xfrm>
-              <a:off x="1209967" y="5456905"/>
-              <a:ext cx="161574" cy="80101"/>
+              <a:off x="1160315" y="5456905"/>
+              <a:ext cx="260878" cy="80101"/>
             </a:xfrm>
             <a:prstGeom prst="rect">
               <a:avLst/>
@@ -20116,21 +21288,21 @@
                   <a:latin typeface="Helvetica"/>
                   <a:cs typeface="Helvetica"/>
                 </a:rPr>
-                <a:t>-50</a:t>
+                <a:t>-50%</a:t>
               </a:r>
             </a:p>
           </p:txBody>
         </p:sp>
         <p:sp>
           <p:nvSpPr>
-            <p:cNvPr id="32" name="tx32"/>
+            <p:cNvPr id="34" name="tx34"/>
             <p:cNvSpPr/>
             <p:nvPr/>
           </p:nvSpPr>
           <p:spPr>
             <a:xfrm>
-              <a:off x="3148183" y="5456905"/>
-              <a:ext cx="161574" cy="80101"/>
+              <a:off x="1935602" y="5456905"/>
+              <a:ext cx="260878" cy="80101"/>
             </a:xfrm>
             <a:prstGeom prst="rect">
               <a:avLst/>
@@ -20162,21 +21334,21 @@
                   <a:latin typeface="Helvetica"/>
                   <a:cs typeface="Helvetica"/>
                 </a:rPr>
-                <a:t>-25</a:t>
+                <a:t>-40%</a:t>
               </a:r>
             </a:p>
           </p:txBody>
         </p:sp>
         <p:sp>
           <p:nvSpPr>
-            <p:cNvPr id="33" name="tx33"/>
+            <p:cNvPr id="35" name="tx35"/>
             <p:cNvSpPr/>
             <p:nvPr/>
           </p:nvSpPr>
           <p:spPr>
             <a:xfrm>
-              <a:off x="5136097" y="5456905"/>
-              <a:ext cx="62179" cy="80101"/>
+              <a:off x="2710888" y="5456905"/>
+              <a:ext cx="260878" cy="80101"/>
             </a:xfrm>
             <a:prstGeom prst="rect">
               <a:avLst/>
@@ -20208,21 +21380,21 @@
                   <a:latin typeface="Helvetica"/>
                   <a:cs typeface="Helvetica"/>
                 </a:rPr>
-                <a:t>0</a:t>
+                <a:t>-30%</a:t>
               </a:r>
             </a:p>
           </p:txBody>
         </p:sp>
         <p:sp>
           <p:nvSpPr>
-            <p:cNvPr id="34" name="tx34"/>
+            <p:cNvPr id="36" name="tx36"/>
             <p:cNvSpPr/>
             <p:nvPr/>
           </p:nvSpPr>
           <p:spPr>
             <a:xfrm>
-              <a:off x="7043223" y="5456905"/>
-              <a:ext cx="124358" cy="80101"/>
+              <a:off x="3486174" y="5456905"/>
+              <a:ext cx="260878" cy="80101"/>
             </a:xfrm>
             <a:prstGeom prst="rect">
               <a:avLst/>
@@ -20254,14 +21426,290 @@
                   <a:latin typeface="Helvetica"/>
                   <a:cs typeface="Helvetica"/>
                 </a:rPr>
-                <a:t>25</a:t>
+                <a:t>-20%</a:t>
               </a:r>
             </a:p>
           </p:txBody>
         </p:sp>
         <p:sp>
           <p:nvSpPr>
-            <p:cNvPr id="35" name="tx35"/>
+            <p:cNvPr id="37" name="tx37"/>
+            <p:cNvSpPr/>
+            <p:nvPr/>
+          </p:nvSpPr>
+          <p:spPr>
+            <a:xfrm>
+              <a:off x="4261461" y="5456905"/>
+              <a:ext cx="260878" cy="80101"/>
+            </a:xfrm>
+            <a:prstGeom prst="rect">
+              <a:avLst/>
+            </a:prstGeom>
+            <a:noFill/>
+          </p:spPr>
+          <p:txBody>
+            <a:bodyPr lIns="0" rIns="0" tIns="0" bIns="0" anchorCtr="1" anchor="ctr" wrap="none"/>
+            <a:lstStyle/>
+            <a:p>
+              <a:pPr algn="l" marL="0" marR="0" indent="0">
+                <a:lnSpc>
+                  <a:spcPts val="880"/>
+                </a:lnSpc>
+                <a:spcBef>
+                  <a:spcPts val="0"/>
+                </a:spcBef>
+                <a:spcAft>
+                  <a:spcPts val="0"/>
+                </a:spcAft>
+              </a:pPr>
+              <a:r>
+                <a:rPr sz="880">
+                  <a:solidFill>
+                    <a:srgbClr val="4D4D4D">
+                      <a:alpha val="100000"/>
+                    </a:srgbClr>
+                  </a:solidFill>
+                  <a:latin typeface="Helvetica"/>
+                  <a:cs typeface="Helvetica"/>
+                </a:rPr>
+                <a:t>-10%</a:t>
+              </a:r>
+            </a:p>
+          </p:txBody>
+        </p:sp>
+        <p:sp>
+          <p:nvSpPr>
+            <p:cNvPr id="38" name="tx38"/>
+            <p:cNvSpPr/>
+            <p:nvPr/>
+          </p:nvSpPr>
+          <p:spPr>
+            <a:xfrm>
+              <a:off x="5086445" y="5456905"/>
+              <a:ext cx="161483" cy="80101"/>
+            </a:xfrm>
+            <a:prstGeom prst="rect">
+              <a:avLst/>
+            </a:prstGeom>
+            <a:noFill/>
+          </p:spPr>
+          <p:txBody>
+            <a:bodyPr lIns="0" rIns="0" tIns="0" bIns="0" anchorCtr="1" anchor="ctr" wrap="none"/>
+            <a:lstStyle/>
+            <a:p>
+              <a:pPr algn="l" marL="0" marR="0" indent="0">
+                <a:lnSpc>
+                  <a:spcPts val="880"/>
+                </a:lnSpc>
+                <a:spcBef>
+                  <a:spcPts val="0"/>
+                </a:spcBef>
+                <a:spcAft>
+                  <a:spcPts val="0"/>
+                </a:spcAft>
+              </a:pPr>
+              <a:r>
+                <a:rPr sz="880">
+                  <a:solidFill>
+                    <a:srgbClr val="4D4D4D">
+                      <a:alpha val="100000"/>
+                    </a:srgbClr>
+                  </a:solidFill>
+                  <a:latin typeface="Helvetica"/>
+                  <a:cs typeface="Helvetica"/>
+                </a:rPr>
+                <a:t>0%</a:t>
+              </a:r>
+            </a:p>
+          </p:txBody>
+        </p:sp>
+        <p:sp>
+          <p:nvSpPr>
+            <p:cNvPr id="39" name="tx39"/>
+            <p:cNvSpPr/>
+            <p:nvPr/>
+          </p:nvSpPr>
+          <p:spPr>
+            <a:xfrm>
+              <a:off x="5830641" y="5456905"/>
+              <a:ext cx="223662" cy="80101"/>
+            </a:xfrm>
+            <a:prstGeom prst="rect">
+              <a:avLst/>
+            </a:prstGeom>
+            <a:noFill/>
+          </p:spPr>
+          <p:txBody>
+            <a:bodyPr lIns="0" rIns="0" tIns="0" bIns="0" anchorCtr="1" anchor="ctr" wrap="none"/>
+            <a:lstStyle/>
+            <a:p>
+              <a:pPr algn="l" marL="0" marR="0" indent="0">
+                <a:lnSpc>
+                  <a:spcPts val="880"/>
+                </a:lnSpc>
+                <a:spcBef>
+                  <a:spcPts val="0"/>
+                </a:spcBef>
+                <a:spcAft>
+                  <a:spcPts val="0"/>
+                </a:spcAft>
+              </a:pPr>
+              <a:r>
+                <a:rPr sz="880">
+                  <a:solidFill>
+                    <a:srgbClr val="4D4D4D">
+                      <a:alpha val="100000"/>
+                    </a:srgbClr>
+                  </a:solidFill>
+                  <a:latin typeface="Helvetica"/>
+                  <a:cs typeface="Helvetica"/>
+                </a:rPr>
+                <a:t>10%</a:t>
+              </a:r>
+            </a:p>
+          </p:txBody>
+        </p:sp>
+        <p:sp>
+          <p:nvSpPr>
+            <p:cNvPr id="40" name="tx40"/>
+            <p:cNvSpPr/>
+            <p:nvPr/>
+          </p:nvSpPr>
+          <p:spPr>
+            <a:xfrm>
+              <a:off x="6605928" y="5456905"/>
+              <a:ext cx="223662" cy="80101"/>
+            </a:xfrm>
+            <a:prstGeom prst="rect">
+              <a:avLst/>
+            </a:prstGeom>
+            <a:noFill/>
+          </p:spPr>
+          <p:txBody>
+            <a:bodyPr lIns="0" rIns="0" tIns="0" bIns="0" anchorCtr="1" anchor="ctr" wrap="none"/>
+            <a:lstStyle/>
+            <a:p>
+              <a:pPr algn="l" marL="0" marR="0" indent="0">
+                <a:lnSpc>
+                  <a:spcPts val="880"/>
+                </a:lnSpc>
+                <a:spcBef>
+                  <a:spcPts val="0"/>
+                </a:spcBef>
+                <a:spcAft>
+                  <a:spcPts val="0"/>
+                </a:spcAft>
+              </a:pPr>
+              <a:r>
+                <a:rPr sz="880">
+                  <a:solidFill>
+                    <a:srgbClr val="4D4D4D">
+                      <a:alpha val="100000"/>
+                    </a:srgbClr>
+                  </a:solidFill>
+                  <a:latin typeface="Helvetica"/>
+                  <a:cs typeface="Helvetica"/>
+                </a:rPr>
+                <a:t>20%</a:t>
+              </a:r>
+            </a:p>
+          </p:txBody>
+        </p:sp>
+        <p:sp>
+          <p:nvSpPr>
+            <p:cNvPr id="41" name="tx41"/>
+            <p:cNvSpPr/>
+            <p:nvPr/>
+          </p:nvSpPr>
+          <p:spPr>
+            <a:xfrm>
+              <a:off x="7381214" y="5456905"/>
+              <a:ext cx="223662" cy="80101"/>
+            </a:xfrm>
+            <a:prstGeom prst="rect">
+              <a:avLst/>
+            </a:prstGeom>
+            <a:noFill/>
+          </p:spPr>
+          <p:txBody>
+            <a:bodyPr lIns="0" rIns="0" tIns="0" bIns="0" anchorCtr="1" anchor="ctr" wrap="none"/>
+            <a:lstStyle/>
+            <a:p>
+              <a:pPr algn="l" marL="0" marR="0" indent="0">
+                <a:lnSpc>
+                  <a:spcPts val="880"/>
+                </a:lnSpc>
+                <a:spcBef>
+                  <a:spcPts val="0"/>
+                </a:spcBef>
+                <a:spcAft>
+                  <a:spcPts val="0"/>
+                </a:spcAft>
+              </a:pPr>
+              <a:r>
+                <a:rPr sz="880">
+                  <a:solidFill>
+                    <a:srgbClr val="4D4D4D">
+                      <a:alpha val="100000"/>
+                    </a:srgbClr>
+                  </a:solidFill>
+                  <a:latin typeface="Helvetica"/>
+                  <a:cs typeface="Helvetica"/>
+                </a:rPr>
+                <a:t>30%</a:t>
+              </a:r>
+            </a:p>
+          </p:txBody>
+        </p:sp>
+        <p:sp>
+          <p:nvSpPr>
+            <p:cNvPr id="42" name="tx42"/>
+            <p:cNvSpPr/>
+            <p:nvPr/>
+          </p:nvSpPr>
+          <p:spPr>
+            <a:xfrm>
+              <a:off x="8156500" y="5456905"/>
+              <a:ext cx="223662" cy="80101"/>
+            </a:xfrm>
+            <a:prstGeom prst="rect">
+              <a:avLst/>
+            </a:prstGeom>
+            <a:noFill/>
+          </p:spPr>
+          <p:txBody>
+            <a:bodyPr lIns="0" rIns="0" tIns="0" bIns="0" anchorCtr="1" anchor="ctr" wrap="none"/>
+            <a:lstStyle/>
+            <a:p>
+              <a:pPr algn="l" marL="0" marR="0" indent="0">
+                <a:lnSpc>
+                  <a:spcPts val="880"/>
+                </a:lnSpc>
+                <a:spcBef>
+                  <a:spcPts val="0"/>
+                </a:spcBef>
+                <a:spcAft>
+                  <a:spcPts val="0"/>
+                </a:spcAft>
+              </a:pPr>
+              <a:r>
+                <a:rPr sz="880">
+                  <a:solidFill>
+                    <a:srgbClr val="4D4D4D">
+                      <a:alpha val="100000"/>
+                    </a:srgbClr>
+                  </a:solidFill>
+                  <a:latin typeface="Helvetica"/>
+                  <a:cs typeface="Helvetica"/>
+                </a:rPr>
+                <a:t>40%</a:t>
+              </a:r>
+            </a:p>
+          </p:txBody>
+        </p:sp>
+        <p:sp>
+          <p:nvSpPr>
+            <p:cNvPr id="43" name="tx43"/>
             <p:cNvSpPr/>
             <p:nvPr/>
           </p:nvSpPr>
@@ -20307,7 +21755,7 @@
         </p:sp>
         <p:sp>
           <p:nvSpPr>
-            <p:cNvPr id="36" name="tx36"/>
+            <p:cNvPr id="44" name="tx44"/>
             <p:cNvSpPr/>
             <p:nvPr/>
           </p:nvSpPr>
@@ -20353,7 +21801,7 @@
         </p:sp>
         <p:sp>
           <p:nvSpPr>
-            <p:cNvPr id="37" name="tx37"/>
+            <p:cNvPr id="45" name="tx45"/>
             <p:cNvSpPr/>
             <p:nvPr/>
           </p:nvSpPr>
@@ -20399,7 +21847,7 @@
         </p:sp>
         <p:sp>
           <p:nvSpPr>
-            <p:cNvPr id="38" name="tx38"/>
+            <p:cNvPr id="46" name="tx46"/>
             <p:cNvSpPr/>
             <p:nvPr/>
           </p:nvSpPr>
@@ -20698,26 +22146,26 @@
           </p:nvSpPr>
           <p:spPr>
             <a:xfrm>
-              <a:off x="2259863" y="1557141"/>
-              <a:ext cx="0" cy="3837134"/>
+              <a:off x="941876" y="5219860"/>
+              <a:ext cx="7675334" cy="0"/>
             </a:xfrm>
             <a:custGeom>
               <a:avLst/>
               <a:pathLst>
-                <a:path w="0" h="3837134">
+                <a:path w="7675334" h="0">
                   <a:moveTo>
-                    <a:pt x="0" y="3837134"/>
+                    <a:pt x="0" y="0"/>
                   </a:moveTo>
                   <a:lnTo>
-                    <a:pt x="0" y="0"/>
-                  </a:lnTo>
-                  <a:lnTo>
-                    <a:pt x="0" y="0"/>
+                    <a:pt x="7675334" y="0"/>
+                  </a:lnTo>
+                  <a:lnTo>
+                    <a:pt x="7675334" y="0"/>
                   </a:lnTo>
                 </a:path>
               </a:pathLst>
             </a:custGeom>
-            <a:ln w="6775" cap="flat">
+            <a:ln w="13550" cap="flat">
               <a:solidFill>
                 <a:srgbClr val="EBEBEB">
                   <a:alpha val="100000"/>
@@ -20741,26 +22189,26 @@
           </p:nvSpPr>
           <p:spPr>
             <a:xfrm>
-              <a:off x="4198078" y="1557141"/>
-              <a:ext cx="0" cy="3837134"/>
+              <a:off x="941876" y="4347784"/>
+              <a:ext cx="7675334" cy="0"/>
             </a:xfrm>
             <a:custGeom>
               <a:avLst/>
               <a:pathLst>
-                <a:path w="0" h="3837134">
+                <a:path w="7675334" h="0">
                   <a:moveTo>
-                    <a:pt x="0" y="3837134"/>
+                    <a:pt x="0" y="0"/>
                   </a:moveTo>
                   <a:lnTo>
-                    <a:pt x="0" y="0"/>
-                  </a:lnTo>
-                  <a:lnTo>
-                    <a:pt x="0" y="0"/>
+                    <a:pt x="7675334" y="0"/>
+                  </a:lnTo>
+                  <a:lnTo>
+                    <a:pt x="7675334" y="0"/>
                   </a:lnTo>
                 </a:path>
               </a:pathLst>
             </a:custGeom>
-            <a:ln w="6775" cap="flat">
+            <a:ln w="13550" cap="flat">
               <a:solidFill>
                 <a:srgbClr val="EBEBEB">
                   <a:alpha val="100000"/>
@@ -20784,26 +22232,26 @@
           </p:nvSpPr>
           <p:spPr>
             <a:xfrm>
-              <a:off x="6136294" y="1557141"/>
-              <a:ext cx="0" cy="3837134"/>
+              <a:off x="941876" y="3475708"/>
+              <a:ext cx="7675334" cy="0"/>
             </a:xfrm>
             <a:custGeom>
               <a:avLst/>
               <a:pathLst>
-                <a:path w="0" h="3837134">
+                <a:path w="7675334" h="0">
                   <a:moveTo>
-                    <a:pt x="0" y="3837134"/>
+                    <a:pt x="0" y="0"/>
                   </a:moveTo>
                   <a:lnTo>
-                    <a:pt x="0" y="0"/>
-                  </a:lnTo>
-                  <a:lnTo>
-                    <a:pt x="0" y="0"/>
+                    <a:pt x="7675334" y="0"/>
+                  </a:lnTo>
+                  <a:lnTo>
+                    <a:pt x="7675334" y="0"/>
                   </a:lnTo>
                 </a:path>
               </a:pathLst>
             </a:custGeom>
-            <a:ln w="6775" cap="flat">
+            <a:ln w="13550" cap="flat">
               <a:solidFill>
                 <a:srgbClr val="EBEBEB">
                   <a:alpha val="100000"/>
@@ -20827,26 +22275,26 @@
           </p:nvSpPr>
           <p:spPr>
             <a:xfrm>
-              <a:off x="8074510" y="1557141"/>
-              <a:ext cx="0" cy="3837134"/>
+              <a:off x="941876" y="2603632"/>
+              <a:ext cx="7675334" cy="0"/>
             </a:xfrm>
             <a:custGeom>
               <a:avLst/>
               <a:pathLst>
-                <a:path w="0" h="3837134">
+                <a:path w="7675334" h="0">
                   <a:moveTo>
-                    <a:pt x="0" y="3837134"/>
+                    <a:pt x="0" y="0"/>
                   </a:moveTo>
                   <a:lnTo>
-                    <a:pt x="0" y="0"/>
-                  </a:lnTo>
-                  <a:lnTo>
-                    <a:pt x="0" y="0"/>
+                    <a:pt x="7675334" y="0"/>
+                  </a:lnTo>
+                  <a:lnTo>
+                    <a:pt x="7675334" y="0"/>
                   </a:lnTo>
                 </a:path>
               </a:pathLst>
             </a:custGeom>
-            <a:ln w="6775" cap="flat">
+            <a:ln w="13550" cap="flat">
               <a:solidFill>
                 <a:srgbClr val="EBEBEB">
                   <a:alpha val="100000"/>
@@ -20870,7 +22318,7 @@
           </p:nvSpPr>
           <p:spPr>
             <a:xfrm>
-              <a:off x="941876" y="5219860"/>
+              <a:off x="941876" y="1731556"/>
               <a:ext cx="7675334" cy="0"/>
             </a:xfrm>
             <a:custGeom>
@@ -20913,21 +22361,21 @@
           </p:nvSpPr>
           <p:spPr>
             <a:xfrm>
-              <a:off x="941876" y="4347784"/>
-              <a:ext cx="7675334" cy="0"/>
+              <a:off x="1290755" y="1557141"/>
+              <a:ext cx="0" cy="3837134"/>
             </a:xfrm>
             <a:custGeom>
               <a:avLst/>
               <a:pathLst>
-                <a:path w="7675334" h="0">
+                <a:path w="0" h="3837134">
                   <a:moveTo>
+                    <a:pt x="0" y="3837134"/>
+                  </a:moveTo>
+                  <a:lnTo>
                     <a:pt x="0" y="0"/>
-                  </a:moveTo>
-                  <a:lnTo>
-                    <a:pt x="7675334" y="0"/>
-                  </a:lnTo>
-                  <a:lnTo>
-                    <a:pt x="7675334" y="0"/>
+                  </a:lnTo>
+                  <a:lnTo>
+                    <a:pt x="0" y="0"/>
                   </a:lnTo>
                 </a:path>
               </a:pathLst>
@@ -20956,21 +22404,21 @@
           </p:nvSpPr>
           <p:spPr>
             <a:xfrm>
-              <a:off x="941876" y="3475708"/>
-              <a:ext cx="7675334" cy="0"/>
+              <a:off x="2066041" y="1557141"/>
+              <a:ext cx="0" cy="3837134"/>
             </a:xfrm>
             <a:custGeom>
               <a:avLst/>
               <a:pathLst>
-                <a:path w="7675334" h="0">
+                <a:path w="0" h="3837134">
                   <a:moveTo>
+                    <a:pt x="0" y="3837134"/>
+                  </a:moveTo>
+                  <a:lnTo>
                     <a:pt x="0" y="0"/>
-                  </a:moveTo>
-                  <a:lnTo>
-                    <a:pt x="7675334" y="0"/>
-                  </a:lnTo>
-                  <a:lnTo>
-                    <a:pt x="7675334" y="0"/>
+                  </a:lnTo>
+                  <a:lnTo>
+                    <a:pt x="0" y="0"/>
                   </a:lnTo>
                 </a:path>
               </a:pathLst>
@@ -20999,21 +22447,21 @@
           </p:nvSpPr>
           <p:spPr>
             <a:xfrm>
-              <a:off x="941876" y="2603632"/>
-              <a:ext cx="7675334" cy="0"/>
+              <a:off x="2841327" y="1557141"/>
+              <a:ext cx="0" cy="3837134"/>
             </a:xfrm>
             <a:custGeom>
               <a:avLst/>
               <a:pathLst>
-                <a:path w="7675334" h="0">
+                <a:path w="0" h="3837134">
                   <a:moveTo>
+                    <a:pt x="0" y="3837134"/>
+                  </a:moveTo>
+                  <a:lnTo>
                     <a:pt x="0" y="0"/>
-                  </a:moveTo>
-                  <a:lnTo>
-                    <a:pt x="7675334" y="0"/>
-                  </a:lnTo>
-                  <a:lnTo>
-                    <a:pt x="7675334" y="0"/>
+                  </a:lnTo>
+                  <a:lnTo>
+                    <a:pt x="0" y="0"/>
                   </a:lnTo>
                 </a:path>
               </a:pathLst>
@@ -21042,21 +22490,21 @@
           </p:nvSpPr>
           <p:spPr>
             <a:xfrm>
-              <a:off x="941876" y="1731556"/>
-              <a:ext cx="7675334" cy="0"/>
+              <a:off x="3616614" y="1557141"/>
+              <a:ext cx="0" cy="3837134"/>
             </a:xfrm>
             <a:custGeom>
               <a:avLst/>
               <a:pathLst>
-                <a:path w="7675334" h="0">
+                <a:path w="0" h="3837134">
                   <a:moveTo>
+                    <a:pt x="0" y="3837134"/>
+                  </a:moveTo>
+                  <a:lnTo>
                     <a:pt x="0" y="0"/>
-                  </a:moveTo>
-                  <a:lnTo>
-                    <a:pt x="7675334" y="0"/>
-                  </a:lnTo>
-                  <a:lnTo>
-                    <a:pt x="7675334" y="0"/>
+                  </a:lnTo>
+                  <a:lnTo>
+                    <a:pt x="0" y="0"/>
                   </a:lnTo>
                 </a:path>
               </a:pathLst>
@@ -21085,7 +22533,7 @@
           </p:nvSpPr>
           <p:spPr>
             <a:xfrm>
-              <a:off x="1290755" y="1557141"/>
+              <a:off x="4391900" y="1557141"/>
               <a:ext cx="0" cy="3837134"/>
             </a:xfrm>
             <a:custGeom>
@@ -21128,7 +22576,7 @@
           </p:nvSpPr>
           <p:spPr>
             <a:xfrm>
-              <a:off x="3228970" y="1557141"/>
+              <a:off x="5167186" y="1557141"/>
               <a:ext cx="0" cy="3837134"/>
             </a:xfrm>
             <a:custGeom>
@@ -21171,7 +22619,7 @@
           </p:nvSpPr>
           <p:spPr>
             <a:xfrm>
-              <a:off x="5167186" y="1557141"/>
+              <a:off x="5942473" y="1557141"/>
               <a:ext cx="0" cy="3837134"/>
             </a:xfrm>
             <a:custGeom>
@@ -21214,7 +22662,7 @@
           </p:nvSpPr>
           <p:spPr>
             <a:xfrm>
-              <a:off x="7105402" y="1557141"/>
+              <a:off x="6717759" y="1557141"/>
               <a:ext cx="0" cy="3837134"/>
             </a:xfrm>
             <a:custGeom>
@@ -21257,7 +22705,7 @@
           </p:nvSpPr>
           <p:spPr>
             <a:xfrm>
-              <a:off x="5167186" y="1557141"/>
+              <a:off x="7493045" y="1557141"/>
               <a:ext cx="0" cy="3837134"/>
             </a:xfrm>
             <a:custGeom>
@@ -21276,9 +22724,95 @@
                 </a:path>
               </a:pathLst>
             </a:custGeom>
-            <a:ln w="10840" cap="flat">
+            <a:ln w="13550" cap="flat">
               <a:solidFill>
-                <a:srgbClr val="8C8C8C">
+                <a:srgbClr val="EBEBEB">
+                  <a:alpha val="100000"/>
+                </a:srgbClr>
+              </a:solidFill>
+              <a:prstDash val="solid"/>
+              <a:round/>
+            </a:ln>
+          </p:spPr>
+          <p:txBody>
+            <a:bodyPr/>
+            <a:lstStyle/>
+            <a:p/>
+          </p:txBody>
+        </p:sp>
+        <p:sp>
+          <p:nvSpPr>
+            <p:cNvPr id="22" name="pl22"/>
+            <p:cNvSpPr/>
+            <p:nvPr/>
+          </p:nvSpPr>
+          <p:spPr>
+            <a:xfrm>
+              <a:off x="8268332" y="1557141"/>
+              <a:ext cx="0" cy="3837134"/>
+            </a:xfrm>
+            <a:custGeom>
+              <a:avLst/>
+              <a:pathLst>
+                <a:path w="0" h="3837134">
+                  <a:moveTo>
+                    <a:pt x="0" y="3837134"/>
+                  </a:moveTo>
+                  <a:lnTo>
+                    <a:pt x="0" y="0"/>
+                  </a:lnTo>
+                  <a:lnTo>
+                    <a:pt x="0" y="0"/>
+                  </a:lnTo>
+                </a:path>
+              </a:pathLst>
+            </a:custGeom>
+            <a:ln w="13550" cap="flat">
+              <a:solidFill>
+                <a:srgbClr val="EBEBEB">
+                  <a:alpha val="100000"/>
+                </a:srgbClr>
+              </a:solidFill>
+              <a:prstDash val="solid"/>
+              <a:round/>
+            </a:ln>
+          </p:spPr>
+          <p:txBody>
+            <a:bodyPr/>
+            <a:lstStyle/>
+            <a:p/>
+          </p:txBody>
+        </p:sp>
+        <p:sp>
+          <p:nvSpPr>
+            <p:cNvPr id="23" name="pl23"/>
+            <p:cNvSpPr/>
+            <p:nvPr/>
+          </p:nvSpPr>
+          <p:spPr>
+            <a:xfrm>
+              <a:off x="4391900" y="1557141"/>
+              <a:ext cx="0" cy="3837134"/>
+            </a:xfrm>
+            <a:custGeom>
+              <a:avLst/>
+              <a:pathLst>
+                <a:path w="0" h="3837134">
+                  <a:moveTo>
+                    <a:pt x="0" y="3837134"/>
+                  </a:moveTo>
+                  <a:lnTo>
+                    <a:pt x="0" y="0"/>
+                  </a:lnTo>
+                  <a:lnTo>
+                    <a:pt x="0" y="0"/>
+                  </a:lnTo>
+                </a:path>
+              </a:pathLst>
+            </a:custGeom>
+            <a:ln w="13550" cap="flat">
+              <a:solidFill>
+                <a:srgbClr val="000000">
                   <a:alpha val="100000"/>
                 </a:srgbClr>
               </a:solidFill>
@@ -21294,7 +22828,7 @@
         </p:sp>
         <p:sp>
           <p:nvSpPr>
-            <p:cNvPr id="22" name="pg22"/>
+            <p:cNvPr id="24" name="pg24"/>
             <p:cNvSpPr/>
             <p:nvPr/>
           </p:nvSpPr>
@@ -22525,7 +24059,7 @@
         </p:sp>
         <p:sp>
           <p:nvSpPr>
-            <p:cNvPr id="23" name="pl23"/>
+            <p:cNvPr id="25" name="pl25"/>
             <p:cNvSpPr/>
             <p:nvPr/>
           </p:nvSpPr>
@@ -23150,7 +24684,7 @@
         </p:sp>
         <p:sp>
           <p:nvSpPr>
-            <p:cNvPr id="24" name="pl24"/>
+            <p:cNvPr id="26" name="pl26"/>
             <p:cNvSpPr/>
             <p:nvPr/>
           </p:nvSpPr>
@@ -23775,7 +25309,7 @@
         </p:sp>
         <p:sp>
           <p:nvSpPr>
-            <p:cNvPr id="25" name="pl25"/>
+            <p:cNvPr id="27" name="pl27"/>
             <p:cNvSpPr/>
             <p:nvPr/>
           </p:nvSpPr>
@@ -24409,7 +25943,7 @@
         </p:sp>
         <p:sp>
           <p:nvSpPr>
-            <p:cNvPr id="26" name="tx26"/>
+            <p:cNvPr id="28" name="tx28"/>
             <p:cNvSpPr/>
             <p:nvPr/>
           </p:nvSpPr>
@@ -24455,7 +25989,7 @@
         </p:sp>
         <p:sp>
           <p:nvSpPr>
-            <p:cNvPr id="27" name="tx27"/>
+            <p:cNvPr id="29" name="tx29"/>
             <p:cNvSpPr/>
             <p:nvPr/>
           </p:nvSpPr>
@@ -24501,7 +26035,7 @@
         </p:sp>
         <p:sp>
           <p:nvSpPr>
-            <p:cNvPr id="28" name="tx28"/>
+            <p:cNvPr id="30" name="tx30"/>
             <p:cNvSpPr/>
             <p:nvPr/>
           </p:nvSpPr>
@@ -24547,7 +26081,7 @@
         </p:sp>
         <p:sp>
           <p:nvSpPr>
-            <p:cNvPr id="29" name="tx29"/>
+            <p:cNvPr id="31" name="tx31"/>
             <p:cNvSpPr/>
             <p:nvPr/>
           </p:nvSpPr>
@@ -24593,7 +26127,7 @@
         </p:sp>
         <p:sp>
           <p:nvSpPr>
-            <p:cNvPr id="30" name="tx30"/>
+            <p:cNvPr id="32" name="tx32"/>
             <p:cNvSpPr/>
             <p:nvPr/>
           </p:nvSpPr>
@@ -24639,14 +26173,14 @@
         </p:sp>
         <p:sp>
           <p:nvSpPr>
-            <p:cNvPr id="31" name="tx31"/>
+            <p:cNvPr id="33" name="tx33"/>
             <p:cNvSpPr/>
             <p:nvPr/>
           </p:nvSpPr>
           <p:spPr>
             <a:xfrm>
-              <a:off x="1209967" y="5456905"/>
-              <a:ext cx="161574" cy="80101"/>
+              <a:off x="1160315" y="5456905"/>
+              <a:ext cx="260878" cy="80101"/>
             </a:xfrm>
             <a:prstGeom prst="rect">
               <a:avLst/>
@@ -24678,21 +26212,21 @@
                   <a:latin typeface="Helvetica"/>
                   <a:cs typeface="Helvetica"/>
                 </a:rPr>
-                <a:t>-50</a:t>
+                <a:t>-50%</a:t>
               </a:r>
             </a:p>
           </p:txBody>
         </p:sp>
         <p:sp>
           <p:nvSpPr>
-            <p:cNvPr id="32" name="tx32"/>
+            <p:cNvPr id="34" name="tx34"/>
             <p:cNvSpPr/>
             <p:nvPr/>
           </p:nvSpPr>
           <p:spPr>
             <a:xfrm>
-              <a:off x="3148183" y="5456905"/>
-              <a:ext cx="161574" cy="80101"/>
+              <a:off x="1935602" y="5456905"/>
+              <a:ext cx="260878" cy="80101"/>
             </a:xfrm>
             <a:prstGeom prst="rect">
               <a:avLst/>
@@ -24724,21 +26258,21 @@
                   <a:latin typeface="Helvetica"/>
                   <a:cs typeface="Helvetica"/>
                 </a:rPr>
-                <a:t>-25</a:t>
+                <a:t>-40%</a:t>
               </a:r>
             </a:p>
           </p:txBody>
         </p:sp>
         <p:sp>
           <p:nvSpPr>
-            <p:cNvPr id="33" name="tx33"/>
+            <p:cNvPr id="35" name="tx35"/>
             <p:cNvSpPr/>
             <p:nvPr/>
           </p:nvSpPr>
           <p:spPr>
             <a:xfrm>
-              <a:off x="5136097" y="5456905"/>
-              <a:ext cx="62179" cy="80101"/>
+              <a:off x="2710888" y="5456905"/>
+              <a:ext cx="260878" cy="80101"/>
             </a:xfrm>
             <a:prstGeom prst="rect">
               <a:avLst/>
@@ -24770,21 +26304,21 @@
                   <a:latin typeface="Helvetica"/>
                   <a:cs typeface="Helvetica"/>
                 </a:rPr>
-                <a:t>0</a:t>
+                <a:t>-30%</a:t>
               </a:r>
             </a:p>
           </p:txBody>
         </p:sp>
         <p:sp>
           <p:nvSpPr>
-            <p:cNvPr id="34" name="tx34"/>
+            <p:cNvPr id="36" name="tx36"/>
             <p:cNvSpPr/>
             <p:nvPr/>
           </p:nvSpPr>
           <p:spPr>
             <a:xfrm>
-              <a:off x="7043223" y="5456905"/>
-              <a:ext cx="124358" cy="80101"/>
+              <a:off x="3486174" y="5456905"/>
+              <a:ext cx="260878" cy="80101"/>
             </a:xfrm>
             <a:prstGeom prst="rect">
               <a:avLst/>
@@ -24816,14 +26350,290 @@
                   <a:latin typeface="Helvetica"/>
                   <a:cs typeface="Helvetica"/>
                 </a:rPr>
-                <a:t>25</a:t>
+                <a:t>-20%</a:t>
               </a:r>
             </a:p>
           </p:txBody>
         </p:sp>
         <p:sp>
           <p:nvSpPr>
-            <p:cNvPr id="35" name="tx35"/>
+            <p:cNvPr id="37" name="tx37"/>
+            <p:cNvSpPr/>
+            <p:nvPr/>
+          </p:nvSpPr>
+          <p:spPr>
+            <a:xfrm>
+              <a:off x="4261461" y="5456905"/>
+              <a:ext cx="260878" cy="80101"/>
+            </a:xfrm>
+            <a:prstGeom prst="rect">
+              <a:avLst/>
+            </a:prstGeom>
+            <a:noFill/>
+          </p:spPr>
+          <p:txBody>
+            <a:bodyPr lIns="0" rIns="0" tIns="0" bIns="0" anchorCtr="1" anchor="ctr" wrap="none"/>
+            <a:lstStyle/>
+            <a:p>
+              <a:pPr algn="l" marL="0" marR="0" indent="0">
+                <a:lnSpc>
+                  <a:spcPts val="880"/>
+                </a:lnSpc>
+                <a:spcBef>
+                  <a:spcPts val="0"/>
+                </a:spcBef>
+                <a:spcAft>
+                  <a:spcPts val="0"/>
+                </a:spcAft>
+              </a:pPr>
+              <a:r>
+                <a:rPr sz="880">
+                  <a:solidFill>
+                    <a:srgbClr val="4D4D4D">
+                      <a:alpha val="100000"/>
+                    </a:srgbClr>
+                  </a:solidFill>
+                  <a:latin typeface="Helvetica"/>
+                  <a:cs typeface="Helvetica"/>
+                </a:rPr>
+                <a:t>-10%</a:t>
+              </a:r>
+            </a:p>
+          </p:txBody>
+        </p:sp>
+        <p:sp>
+          <p:nvSpPr>
+            <p:cNvPr id="38" name="tx38"/>
+            <p:cNvSpPr/>
+            <p:nvPr/>
+          </p:nvSpPr>
+          <p:spPr>
+            <a:xfrm>
+              <a:off x="5086445" y="5456905"/>
+              <a:ext cx="161483" cy="80101"/>
+            </a:xfrm>
+            <a:prstGeom prst="rect">
+              <a:avLst/>
+            </a:prstGeom>
+            <a:noFill/>
+          </p:spPr>
+          <p:txBody>
+            <a:bodyPr lIns="0" rIns="0" tIns="0" bIns="0" anchorCtr="1" anchor="ctr" wrap="none"/>
+            <a:lstStyle/>
+            <a:p>
+              <a:pPr algn="l" marL="0" marR="0" indent="0">
+                <a:lnSpc>
+                  <a:spcPts val="880"/>
+                </a:lnSpc>
+                <a:spcBef>
+                  <a:spcPts val="0"/>
+                </a:spcBef>
+                <a:spcAft>
+                  <a:spcPts val="0"/>
+                </a:spcAft>
+              </a:pPr>
+              <a:r>
+                <a:rPr sz="880">
+                  <a:solidFill>
+                    <a:srgbClr val="4D4D4D">
+                      <a:alpha val="100000"/>
+                    </a:srgbClr>
+                  </a:solidFill>
+                  <a:latin typeface="Helvetica"/>
+                  <a:cs typeface="Helvetica"/>
+                </a:rPr>
+                <a:t>0%</a:t>
+              </a:r>
+            </a:p>
+          </p:txBody>
+        </p:sp>
+        <p:sp>
+          <p:nvSpPr>
+            <p:cNvPr id="39" name="tx39"/>
+            <p:cNvSpPr/>
+            <p:nvPr/>
+          </p:nvSpPr>
+          <p:spPr>
+            <a:xfrm>
+              <a:off x="5830641" y="5456905"/>
+              <a:ext cx="223662" cy="80101"/>
+            </a:xfrm>
+            <a:prstGeom prst="rect">
+              <a:avLst/>
+            </a:prstGeom>
+            <a:noFill/>
+          </p:spPr>
+          <p:txBody>
+            <a:bodyPr lIns="0" rIns="0" tIns="0" bIns="0" anchorCtr="1" anchor="ctr" wrap="none"/>
+            <a:lstStyle/>
+            <a:p>
+              <a:pPr algn="l" marL="0" marR="0" indent="0">
+                <a:lnSpc>
+                  <a:spcPts val="880"/>
+                </a:lnSpc>
+                <a:spcBef>
+                  <a:spcPts val="0"/>
+                </a:spcBef>
+                <a:spcAft>
+                  <a:spcPts val="0"/>
+                </a:spcAft>
+              </a:pPr>
+              <a:r>
+                <a:rPr sz="880">
+                  <a:solidFill>
+                    <a:srgbClr val="4D4D4D">
+                      <a:alpha val="100000"/>
+                    </a:srgbClr>
+                  </a:solidFill>
+                  <a:latin typeface="Helvetica"/>
+                  <a:cs typeface="Helvetica"/>
+                </a:rPr>
+                <a:t>10%</a:t>
+              </a:r>
+            </a:p>
+          </p:txBody>
+        </p:sp>
+        <p:sp>
+          <p:nvSpPr>
+            <p:cNvPr id="40" name="tx40"/>
+            <p:cNvSpPr/>
+            <p:nvPr/>
+          </p:nvSpPr>
+          <p:spPr>
+            <a:xfrm>
+              <a:off x="6605928" y="5456905"/>
+              <a:ext cx="223662" cy="80101"/>
+            </a:xfrm>
+            <a:prstGeom prst="rect">
+              <a:avLst/>
+            </a:prstGeom>
+            <a:noFill/>
+          </p:spPr>
+          <p:txBody>
+            <a:bodyPr lIns="0" rIns="0" tIns="0" bIns="0" anchorCtr="1" anchor="ctr" wrap="none"/>
+            <a:lstStyle/>
+            <a:p>
+              <a:pPr algn="l" marL="0" marR="0" indent="0">
+                <a:lnSpc>
+                  <a:spcPts val="880"/>
+                </a:lnSpc>
+                <a:spcBef>
+                  <a:spcPts val="0"/>
+                </a:spcBef>
+                <a:spcAft>
+                  <a:spcPts val="0"/>
+                </a:spcAft>
+              </a:pPr>
+              <a:r>
+                <a:rPr sz="880">
+                  <a:solidFill>
+                    <a:srgbClr val="4D4D4D">
+                      <a:alpha val="100000"/>
+                    </a:srgbClr>
+                  </a:solidFill>
+                  <a:latin typeface="Helvetica"/>
+                  <a:cs typeface="Helvetica"/>
+                </a:rPr>
+                <a:t>20%</a:t>
+              </a:r>
+            </a:p>
+          </p:txBody>
+        </p:sp>
+        <p:sp>
+          <p:nvSpPr>
+            <p:cNvPr id="41" name="tx41"/>
+            <p:cNvSpPr/>
+            <p:nvPr/>
+          </p:nvSpPr>
+          <p:spPr>
+            <a:xfrm>
+              <a:off x="7381214" y="5456905"/>
+              <a:ext cx="223662" cy="80101"/>
+            </a:xfrm>
+            <a:prstGeom prst="rect">
+              <a:avLst/>
+            </a:prstGeom>
+            <a:noFill/>
+          </p:spPr>
+          <p:txBody>
+            <a:bodyPr lIns="0" rIns="0" tIns="0" bIns="0" anchorCtr="1" anchor="ctr" wrap="none"/>
+            <a:lstStyle/>
+            <a:p>
+              <a:pPr algn="l" marL="0" marR="0" indent="0">
+                <a:lnSpc>
+                  <a:spcPts val="880"/>
+                </a:lnSpc>
+                <a:spcBef>
+                  <a:spcPts val="0"/>
+                </a:spcBef>
+                <a:spcAft>
+                  <a:spcPts val="0"/>
+                </a:spcAft>
+              </a:pPr>
+              <a:r>
+                <a:rPr sz="880">
+                  <a:solidFill>
+                    <a:srgbClr val="4D4D4D">
+                      <a:alpha val="100000"/>
+                    </a:srgbClr>
+                  </a:solidFill>
+                  <a:latin typeface="Helvetica"/>
+                  <a:cs typeface="Helvetica"/>
+                </a:rPr>
+                <a:t>30%</a:t>
+              </a:r>
+            </a:p>
+          </p:txBody>
+        </p:sp>
+        <p:sp>
+          <p:nvSpPr>
+            <p:cNvPr id="42" name="tx42"/>
+            <p:cNvSpPr/>
+            <p:nvPr/>
+          </p:nvSpPr>
+          <p:spPr>
+            <a:xfrm>
+              <a:off x="8156500" y="5456905"/>
+              <a:ext cx="223662" cy="80101"/>
+            </a:xfrm>
+            <a:prstGeom prst="rect">
+              <a:avLst/>
+            </a:prstGeom>
+            <a:noFill/>
+          </p:spPr>
+          <p:txBody>
+            <a:bodyPr lIns="0" rIns="0" tIns="0" bIns="0" anchorCtr="1" anchor="ctr" wrap="none"/>
+            <a:lstStyle/>
+            <a:p>
+              <a:pPr algn="l" marL="0" marR="0" indent="0">
+                <a:lnSpc>
+                  <a:spcPts val="880"/>
+                </a:lnSpc>
+                <a:spcBef>
+                  <a:spcPts val="0"/>
+                </a:spcBef>
+                <a:spcAft>
+                  <a:spcPts val="0"/>
+                </a:spcAft>
+              </a:pPr>
+              <a:r>
+                <a:rPr sz="880">
+                  <a:solidFill>
+                    <a:srgbClr val="4D4D4D">
+                      <a:alpha val="100000"/>
+                    </a:srgbClr>
+                  </a:solidFill>
+                  <a:latin typeface="Helvetica"/>
+                  <a:cs typeface="Helvetica"/>
+                </a:rPr>
+                <a:t>40%</a:t>
+              </a:r>
+            </a:p>
+          </p:txBody>
+        </p:sp>
+        <p:sp>
+          <p:nvSpPr>
+            <p:cNvPr id="43" name="tx43"/>
             <p:cNvSpPr/>
             <p:nvPr/>
           </p:nvSpPr>
@@ -24869,7 +26679,7 @@
         </p:sp>
         <p:sp>
           <p:nvSpPr>
-            <p:cNvPr id="36" name="tx36"/>
+            <p:cNvPr id="44" name="tx44"/>
             <p:cNvSpPr/>
             <p:nvPr/>
           </p:nvSpPr>
@@ -24915,7 +26725,7 @@
         </p:sp>
         <p:sp>
           <p:nvSpPr>
-            <p:cNvPr id="37" name="tx37"/>
+            <p:cNvPr id="45" name="tx45"/>
             <p:cNvSpPr/>
             <p:nvPr/>
           </p:nvSpPr>
@@ -24961,7 +26771,7 @@
         </p:sp>
         <p:sp>
           <p:nvSpPr>
-            <p:cNvPr id="38" name="tx38"/>
+            <p:cNvPr id="46" name="tx46"/>
             <p:cNvSpPr/>
             <p:nvPr/>
           </p:nvSpPr>
@@ -25260,26 +27070,26 @@
           </p:nvSpPr>
           <p:spPr>
             <a:xfrm>
-              <a:off x="2259863" y="1557141"/>
-              <a:ext cx="0" cy="3837134"/>
+              <a:off x="941876" y="5219860"/>
+              <a:ext cx="7675334" cy="0"/>
             </a:xfrm>
             <a:custGeom>
               <a:avLst/>
               <a:pathLst>
-                <a:path w="0" h="3837134">
+                <a:path w="7675334" h="0">
                   <a:moveTo>
-                    <a:pt x="0" y="3837134"/>
+                    <a:pt x="0" y="0"/>
                   </a:moveTo>
                   <a:lnTo>
-                    <a:pt x="0" y="0"/>
-                  </a:lnTo>
-                  <a:lnTo>
-                    <a:pt x="0" y="0"/>
+                    <a:pt x="7675334" y="0"/>
+                  </a:lnTo>
+                  <a:lnTo>
+                    <a:pt x="7675334" y="0"/>
                   </a:lnTo>
                 </a:path>
               </a:pathLst>
             </a:custGeom>
-            <a:ln w="6775" cap="flat">
+            <a:ln w="13550" cap="flat">
               <a:solidFill>
                 <a:srgbClr val="EBEBEB">
                   <a:alpha val="100000"/>
@@ -25303,26 +27113,26 @@
           </p:nvSpPr>
           <p:spPr>
             <a:xfrm>
-              <a:off x="4198078" y="1557141"/>
-              <a:ext cx="0" cy="3837134"/>
+              <a:off x="941876" y="4347784"/>
+              <a:ext cx="7675334" cy="0"/>
             </a:xfrm>
             <a:custGeom>
               <a:avLst/>
               <a:pathLst>
-                <a:path w="0" h="3837134">
+                <a:path w="7675334" h="0">
                   <a:moveTo>
-                    <a:pt x="0" y="3837134"/>
+                    <a:pt x="0" y="0"/>
                   </a:moveTo>
                   <a:lnTo>
-                    <a:pt x="0" y="0"/>
-                  </a:lnTo>
-                  <a:lnTo>
-                    <a:pt x="0" y="0"/>
+                    <a:pt x="7675334" y="0"/>
+                  </a:lnTo>
+                  <a:lnTo>
+                    <a:pt x="7675334" y="0"/>
                   </a:lnTo>
                 </a:path>
               </a:pathLst>
             </a:custGeom>
-            <a:ln w="6775" cap="flat">
+            <a:ln w="13550" cap="flat">
               <a:solidFill>
                 <a:srgbClr val="EBEBEB">
                   <a:alpha val="100000"/>
@@ -25346,26 +27156,26 @@
           </p:nvSpPr>
           <p:spPr>
             <a:xfrm>
-              <a:off x="6136294" y="1557141"/>
-              <a:ext cx="0" cy="3837134"/>
+              <a:off x="941876" y="3475708"/>
+              <a:ext cx="7675334" cy="0"/>
             </a:xfrm>
             <a:custGeom>
               <a:avLst/>
               <a:pathLst>
-                <a:path w="0" h="3837134">
+                <a:path w="7675334" h="0">
                   <a:moveTo>
-                    <a:pt x="0" y="3837134"/>
+                    <a:pt x="0" y="0"/>
                   </a:moveTo>
                   <a:lnTo>
-                    <a:pt x="0" y="0"/>
-                  </a:lnTo>
-                  <a:lnTo>
-                    <a:pt x="0" y="0"/>
+                    <a:pt x="7675334" y="0"/>
+                  </a:lnTo>
+                  <a:lnTo>
+                    <a:pt x="7675334" y="0"/>
                   </a:lnTo>
                 </a:path>
               </a:pathLst>
             </a:custGeom>
-            <a:ln w="6775" cap="flat">
+            <a:ln w="13550" cap="flat">
               <a:solidFill>
                 <a:srgbClr val="EBEBEB">
                   <a:alpha val="100000"/>
@@ -25389,26 +27199,26 @@
           </p:nvSpPr>
           <p:spPr>
             <a:xfrm>
-              <a:off x="8074510" y="1557141"/>
-              <a:ext cx="0" cy="3837134"/>
+              <a:off x="941876" y="2603632"/>
+              <a:ext cx="7675334" cy="0"/>
             </a:xfrm>
             <a:custGeom>
               <a:avLst/>
               <a:pathLst>
-                <a:path w="0" h="3837134">
+                <a:path w="7675334" h="0">
                   <a:moveTo>
-                    <a:pt x="0" y="3837134"/>
+                    <a:pt x="0" y="0"/>
                   </a:moveTo>
                   <a:lnTo>
-                    <a:pt x="0" y="0"/>
-                  </a:lnTo>
-                  <a:lnTo>
-                    <a:pt x="0" y="0"/>
+                    <a:pt x="7675334" y="0"/>
+                  </a:lnTo>
+                  <a:lnTo>
+                    <a:pt x="7675334" y="0"/>
                   </a:lnTo>
                 </a:path>
               </a:pathLst>
             </a:custGeom>
-            <a:ln w="6775" cap="flat">
+            <a:ln w="13550" cap="flat">
               <a:solidFill>
                 <a:srgbClr val="EBEBEB">
                   <a:alpha val="100000"/>
@@ -25432,7 +27242,7 @@
           </p:nvSpPr>
           <p:spPr>
             <a:xfrm>
-              <a:off x="941876" y="5219860"/>
+              <a:off x="941876" y="1731556"/>
               <a:ext cx="7675334" cy="0"/>
             </a:xfrm>
             <a:custGeom>
@@ -25475,21 +27285,21 @@
           </p:nvSpPr>
           <p:spPr>
             <a:xfrm>
-              <a:off x="941876" y="4347784"/>
-              <a:ext cx="7675334" cy="0"/>
+              <a:off x="1290755" y="1557141"/>
+              <a:ext cx="0" cy="3837134"/>
             </a:xfrm>
             <a:custGeom>
               <a:avLst/>
               <a:pathLst>
-                <a:path w="7675334" h="0">
+                <a:path w="0" h="3837134">
                   <a:moveTo>
+                    <a:pt x="0" y="3837134"/>
+                  </a:moveTo>
+                  <a:lnTo>
                     <a:pt x="0" y="0"/>
-                  </a:moveTo>
-                  <a:lnTo>
-                    <a:pt x="7675334" y="0"/>
-                  </a:lnTo>
-                  <a:lnTo>
-                    <a:pt x="7675334" y="0"/>
+                  </a:lnTo>
+                  <a:lnTo>
+                    <a:pt x="0" y="0"/>
                   </a:lnTo>
                 </a:path>
               </a:pathLst>
@@ -25518,21 +27328,21 @@
           </p:nvSpPr>
           <p:spPr>
             <a:xfrm>
-              <a:off x="941876" y="3475708"/>
-              <a:ext cx="7675334" cy="0"/>
+              <a:off x="2066041" y="1557141"/>
+              <a:ext cx="0" cy="3837134"/>
             </a:xfrm>
             <a:custGeom>
               <a:avLst/>
               <a:pathLst>
-                <a:path w="7675334" h="0">
+                <a:path w="0" h="3837134">
                   <a:moveTo>
+                    <a:pt x="0" y="3837134"/>
+                  </a:moveTo>
+                  <a:lnTo>
                     <a:pt x="0" y="0"/>
-                  </a:moveTo>
-                  <a:lnTo>
-                    <a:pt x="7675334" y="0"/>
-                  </a:lnTo>
-                  <a:lnTo>
-                    <a:pt x="7675334" y="0"/>
+                  </a:lnTo>
+                  <a:lnTo>
+                    <a:pt x="0" y="0"/>
                   </a:lnTo>
                 </a:path>
               </a:pathLst>
@@ -25561,21 +27371,21 @@
           </p:nvSpPr>
           <p:spPr>
             <a:xfrm>
-              <a:off x="941876" y="2603632"/>
-              <a:ext cx="7675334" cy="0"/>
+              <a:off x="2841327" y="1557141"/>
+              <a:ext cx="0" cy="3837134"/>
             </a:xfrm>
             <a:custGeom>
               <a:avLst/>
               <a:pathLst>
-                <a:path w="7675334" h="0">
+                <a:path w="0" h="3837134">
                   <a:moveTo>
+                    <a:pt x="0" y="3837134"/>
+                  </a:moveTo>
+                  <a:lnTo>
                     <a:pt x="0" y="0"/>
-                  </a:moveTo>
-                  <a:lnTo>
-                    <a:pt x="7675334" y="0"/>
-                  </a:lnTo>
-                  <a:lnTo>
-                    <a:pt x="7675334" y="0"/>
+                  </a:lnTo>
+                  <a:lnTo>
+                    <a:pt x="0" y="0"/>
                   </a:lnTo>
                 </a:path>
               </a:pathLst>
@@ -25604,21 +27414,21 @@
           </p:nvSpPr>
           <p:spPr>
             <a:xfrm>
-              <a:off x="941876" y="1731556"/>
-              <a:ext cx="7675334" cy="0"/>
+              <a:off x="3616614" y="1557141"/>
+              <a:ext cx="0" cy="3837134"/>
             </a:xfrm>
             <a:custGeom>
               <a:avLst/>
               <a:pathLst>
-                <a:path w="7675334" h="0">
+                <a:path w="0" h="3837134">
                   <a:moveTo>
+                    <a:pt x="0" y="3837134"/>
+                  </a:moveTo>
+                  <a:lnTo>
                     <a:pt x="0" y="0"/>
-                  </a:moveTo>
-                  <a:lnTo>
-                    <a:pt x="7675334" y="0"/>
-                  </a:lnTo>
-                  <a:lnTo>
-                    <a:pt x="7675334" y="0"/>
+                  </a:lnTo>
+                  <a:lnTo>
+                    <a:pt x="0" y="0"/>
                   </a:lnTo>
                 </a:path>
               </a:pathLst>
@@ -25647,7 +27457,7 @@
           </p:nvSpPr>
           <p:spPr>
             <a:xfrm>
-              <a:off x="1290755" y="1557141"/>
+              <a:off x="4391900" y="1557141"/>
               <a:ext cx="0" cy="3837134"/>
             </a:xfrm>
             <a:custGeom>
@@ -25690,7 +27500,7 @@
           </p:nvSpPr>
           <p:spPr>
             <a:xfrm>
-              <a:off x="3228970" y="1557141"/>
+              <a:off x="5167186" y="1557141"/>
               <a:ext cx="0" cy="3837134"/>
             </a:xfrm>
             <a:custGeom>
@@ -25733,7 +27543,7 @@
           </p:nvSpPr>
           <p:spPr>
             <a:xfrm>
-              <a:off x="5167186" y="1557141"/>
+              <a:off x="5942473" y="1557141"/>
               <a:ext cx="0" cy="3837134"/>
             </a:xfrm>
             <a:custGeom>
@@ -25776,7 +27586,7 @@
           </p:nvSpPr>
           <p:spPr>
             <a:xfrm>
-              <a:off x="7105402" y="1557141"/>
+              <a:off x="6717759" y="1557141"/>
               <a:ext cx="0" cy="3837134"/>
             </a:xfrm>
             <a:custGeom>
@@ -25819,7 +27629,7 @@
           </p:nvSpPr>
           <p:spPr>
             <a:xfrm>
-              <a:off x="5167186" y="1557141"/>
+              <a:off x="7493045" y="1557141"/>
               <a:ext cx="0" cy="3837134"/>
             </a:xfrm>
             <a:custGeom>
@@ -25838,9 +27648,95 @@
                 </a:path>
               </a:pathLst>
             </a:custGeom>
-            <a:ln w="10840" cap="flat">
+            <a:ln w="13550" cap="flat">
               <a:solidFill>
-                <a:srgbClr val="8C8C8C">
+                <a:srgbClr val="EBEBEB">
+                  <a:alpha val="100000"/>
+                </a:srgbClr>
+              </a:solidFill>
+              <a:prstDash val="solid"/>
+              <a:round/>
+            </a:ln>
+          </p:spPr>
+          <p:txBody>
+            <a:bodyPr/>
+            <a:lstStyle/>
+            <a:p/>
+          </p:txBody>
+        </p:sp>
+        <p:sp>
+          <p:nvSpPr>
+            <p:cNvPr id="22" name="pl22"/>
+            <p:cNvSpPr/>
+            <p:nvPr/>
+          </p:nvSpPr>
+          <p:spPr>
+            <a:xfrm>
+              <a:off x="8268332" y="1557141"/>
+              <a:ext cx="0" cy="3837134"/>
+            </a:xfrm>
+            <a:custGeom>
+              <a:avLst/>
+              <a:pathLst>
+                <a:path w="0" h="3837134">
+                  <a:moveTo>
+                    <a:pt x="0" y="3837134"/>
+                  </a:moveTo>
+                  <a:lnTo>
+                    <a:pt x="0" y="0"/>
+                  </a:lnTo>
+                  <a:lnTo>
+                    <a:pt x="0" y="0"/>
+                  </a:lnTo>
+                </a:path>
+              </a:pathLst>
+            </a:custGeom>
+            <a:ln w="13550" cap="flat">
+              <a:solidFill>
+                <a:srgbClr val="EBEBEB">
+                  <a:alpha val="100000"/>
+                </a:srgbClr>
+              </a:solidFill>
+              <a:prstDash val="solid"/>
+              <a:round/>
+            </a:ln>
+          </p:spPr>
+          <p:txBody>
+            <a:bodyPr/>
+            <a:lstStyle/>
+            <a:p/>
+          </p:txBody>
+        </p:sp>
+        <p:sp>
+          <p:nvSpPr>
+            <p:cNvPr id="23" name="pl23"/>
+            <p:cNvSpPr/>
+            <p:nvPr/>
+          </p:nvSpPr>
+          <p:spPr>
+            <a:xfrm>
+              <a:off x="4391900" y="1557141"/>
+              <a:ext cx="0" cy="3837134"/>
+            </a:xfrm>
+            <a:custGeom>
+              <a:avLst/>
+              <a:pathLst>
+                <a:path w="0" h="3837134">
+                  <a:moveTo>
+                    <a:pt x="0" y="3837134"/>
+                  </a:moveTo>
+                  <a:lnTo>
+                    <a:pt x="0" y="0"/>
+                  </a:lnTo>
+                  <a:lnTo>
+                    <a:pt x="0" y="0"/>
+                  </a:lnTo>
+                </a:path>
+              </a:pathLst>
+            </a:custGeom>
+            <a:ln w="13550" cap="flat">
+              <a:solidFill>
+                <a:srgbClr val="000000">
                   <a:alpha val="100000"/>
                 </a:srgbClr>
               </a:solidFill>
@@ -25856,7 +27752,7 @@
         </p:sp>
         <p:sp>
           <p:nvSpPr>
-            <p:cNvPr id="22" name="pg22"/>
+            <p:cNvPr id="24" name="pg24"/>
             <p:cNvSpPr/>
             <p:nvPr/>
           </p:nvSpPr>
@@ -27087,7 +28983,7 @@
         </p:sp>
         <p:sp>
           <p:nvSpPr>
-            <p:cNvPr id="23" name="pl23"/>
+            <p:cNvPr id="25" name="pl25"/>
             <p:cNvSpPr/>
             <p:nvPr/>
           </p:nvSpPr>
@@ -27712,7 +29608,7 @@
         </p:sp>
         <p:sp>
           <p:nvSpPr>
-            <p:cNvPr id="24" name="pl24"/>
+            <p:cNvPr id="26" name="pl26"/>
             <p:cNvSpPr/>
             <p:nvPr/>
           </p:nvSpPr>
@@ -28337,7 +30233,7 @@
         </p:sp>
         <p:sp>
           <p:nvSpPr>
-            <p:cNvPr id="25" name="pl25"/>
+            <p:cNvPr id="27" name="pl27"/>
             <p:cNvSpPr/>
             <p:nvPr/>
           </p:nvSpPr>
@@ -28971,7 +30867,7 @@
         </p:sp>
         <p:sp>
           <p:nvSpPr>
-            <p:cNvPr id="26" name="tx26"/>
+            <p:cNvPr id="28" name="tx28"/>
             <p:cNvSpPr/>
             <p:nvPr/>
           </p:nvSpPr>
@@ -29017,7 +30913,7 @@
         </p:sp>
         <p:sp>
           <p:nvSpPr>
-            <p:cNvPr id="27" name="tx27"/>
+            <p:cNvPr id="29" name="tx29"/>
             <p:cNvSpPr/>
             <p:nvPr/>
           </p:nvSpPr>
@@ -29063,7 +30959,7 @@
         </p:sp>
         <p:sp>
           <p:nvSpPr>
-            <p:cNvPr id="28" name="tx28"/>
+            <p:cNvPr id="30" name="tx30"/>
             <p:cNvSpPr/>
             <p:nvPr/>
           </p:nvSpPr>
@@ -29109,7 +31005,7 @@
         </p:sp>
         <p:sp>
           <p:nvSpPr>
-            <p:cNvPr id="29" name="tx29"/>
+            <p:cNvPr id="31" name="tx31"/>
             <p:cNvSpPr/>
             <p:nvPr/>
           </p:nvSpPr>
@@ -29155,7 +31051,7 @@
         </p:sp>
         <p:sp>
           <p:nvSpPr>
-            <p:cNvPr id="30" name="tx30"/>
+            <p:cNvPr id="32" name="tx32"/>
             <p:cNvSpPr/>
             <p:nvPr/>
           </p:nvSpPr>
@@ -29201,14 +31097,14 @@
         </p:sp>
         <p:sp>
           <p:nvSpPr>
-            <p:cNvPr id="31" name="tx31"/>
+            <p:cNvPr id="33" name="tx33"/>
             <p:cNvSpPr/>
             <p:nvPr/>
           </p:nvSpPr>
           <p:spPr>
             <a:xfrm>
-              <a:off x="1209967" y="5456905"/>
-              <a:ext cx="161574" cy="80101"/>
+              <a:off x="1160315" y="5456905"/>
+              <a:ext cx="260878" cy="80101"/>
             </a:xfrm>
             <a:prstGeom prst="rect">
               <a:avLst/>
@@ -29240,21 +31136,21 @@
                   <a:latin typeface="Helvetica"/>
                   <a:cs typeface="Helvetica"/>
                 </a:rPr>
-                <a:t>-50</a:t>
+                <a:t>-50%</a:t>
               </a:r>
             </a:p>
           </p:txBody>
         </p:sp>
         <p:sp>
           <p:nvSpPr>
-            <p:cNvPr id="32" name="tx32"/>
+            <p:cNvPr id="34" name="tx34"/>
             <p:cNvSpPr/>
             <p:nvPr/>
           </p:nvSpPr>
           <p:spPr>
             <a:xfrm>
-              <a:off x="3148183" y="5456905"/>
-              <a:ext cx="161574" cy="80101"/>
+              <a:off x="1935602" y="5456905"/>
+              <a:ext cx="260878" cy="80101"/>
             </a:xfrm>
             <a:prstGeom prst="rect">
               <a:avLst/>
@@ -29286,21 +31182,21 @@
                   <a:latin typeface="Helvetica"/>
                   <a:cs typeface="Helvetica"/>
                 </a:rPr>
-                <a:t>-25</a:t>
+                <a:t>-40%</a:t>
               </a:r>
             </a:p>
           </p:txBody>
         </p:sp>
         <p:sp>
           <p:nvSpPr>
-            <p:cNvPr id="33" name="tx33"/>
+            <p:cNvPr id="35" name="tx35"/>
             <p:cNvSpPr/>
             <p:nvPr/>
           </p:nvSpPr>
           <p:spPr>
             <a:xfrm>
-              <a:off x="5136097" y="5456905"/>
-              <a:ext cx="62179" cy="80101"/>
+              <a:off x="2710888" y="5456905"/>
+              <a:ext cx="260878" cy="80101"/>
             </a:xfrm>
             <a:prstGeom prst="rect">
               <a:avLst/>
@@ -29332,21 +31228,21 @@
                   <a:latin typeface="Helvetica"/>
                   <a:cs typeface="Helvetica"/>
                 </a:rPr>
-                <a:t>0</a:t>
+                <a:t>-30%</a:t>
               </a:r>
             </a:p>
           </p:txBody>
         </p:sp>
         <p:sp>
           <p:nvSpPr>
-            <p:cNvPr id="34" name="tx34"/>
+            <p:cNvPr id="36" name="tx36"/>
             <p:cNvSpPr/>
             <p:nvPr/>
           </p:nvSpPr>
           <p:spPr>
             <a:xfrm>
-              <a:off x="7043223" y="5456905"/>
-              <a:ext cx="124358" cy="80101"/>
+              <a:off x="3486174" y="5456905"/>
+              <a:ext cx="260878" cy="80101"/>
             </a:xfrm>
             <a:prstGeom prst="rect">
               <a:avLst/>
@@ -29378,14 +31274,290 @@
                   <a:latin typeface="Helvetica"/>
                   <a:cs typeface="Helvetica"/>
                 </a:rPr>
-                <a:t>25</a:t>
+                <a:t>-20%</a:t>
               </a:r>
             </a:p>
           </p:txBody>
         </p:sp>
         <p:sp>
           <p:nvSpPr>
-            <p:cNvPr id="35" name="tx35"/>
+            <p:cNvPr id="37" name="tx37"/>
+            <p:cNvSpPr/>
+            <p:nvPr/>
+          </p:nvSpPr>
+          <p:spPr>
+            <a:xfrm>
+              <a:off x="4261461" y="5456905"/>
+              <a:ext cx="260878" cy="80101"/>
+            </a:xfrm>
+            <a:prstGeom prst="rect">
+              <a:avLst/>
+            </a:prstGeom>
+            <a:noFill/>
+          </p:spPr>
+          <p:txBody>
+            <a:bodyPr lIns="0" rIns="0" tIns="0" bIns="0" anchorCtr="1" anchor="ctr" wrap="none"/>
+            <a:lstStyle/>
+            <a:p>
+              <a:pPr algn="l" marL="0" marR="0" indent="0">
+                <a:lnSpc>
+                  <a:spcPts val="880"/>
+                </a:lnSpc>
+                <a:spcBef>
+                  <a:spcPts val="0"/>
+                </a:spcBef>
+                <a:spcAft>
+                  <a:spcPts val="0"/>
+                </a:spcAft>
+              </a:pPr>
+              <a:r>
+                <a:rPr sz="880">
+                  <a:solidFill>
+                    <a:srgbClr val="4D4D4D">
+                      <a:alpha val="100000"/>
+                    </a:srgbClr>
+                  </a:solidFill>
+                  <a:latin typeface="Helvetica"/>
+                  <a:cs typeface="Helvetica"/>
+                </a:rPr>
+                <a:t>-10%</a:t>
+              </a:r>
+            </a:p>
+          </p:txBody>
+        </p:sp>
+        <p:sp>
+          <p:nvSpPr>
+            <p:cNvPr id="38" name="tx38"/>
+            <p:cNvSpPr/>
+            <p:nvPr/>
+          </p:nvSpPr>
+          <p:spPr>
+            <a:xfrm>
+              <a:off x="5086445" y="5456905"/>
+              <a:ext cx="161483" cy="80101"/>
+            </a:xfrm>
+            <a:prstGeom prst="rect">
+              <a:avLst/>
+            </a:prstGeom>
+            <a:noFill/>
+          </p:spPr>
+          <p:txBody>
+            <a:bodyPr lIns="0" rIns="0" tIns="0" bIns="0" anchorCtr="1" anchor="ctr" wrap="none"/>
+            <a:lstStyle/>
+            <a:p>
+              <a:pPr algn="l" marL="0" marR="0" indent="0">
+                <a:lnSpc>
+                  <a:spcPts val="880"/>
+                </a:lnSpc>
+                <a:spcBef>
+                  <a:spcPts val="0"/>
+                </a:spcBef>
+                <a:spcAft>
+                  <a:spcPts val="0"/>
+                </a:spcAft>
+              </a:pPr>
+              <a:r>
+                <a:rPr sz="880">
+                  <a:solidFill>
+                    <a:srgbClr val="4D4D4D">
+                      <a:alpha val="100000"/>
+                    </a:srgbClr>
+                  </a:solidFill>
+                  <a:latin typeface="Helvetica"/>
+                  <a:cs typeface="Helvetica"/>
+                </a:rPr>
+                <a:t>0%</a:t>
+              </a:r>
+            </a:p>
+          </p:txBody>
+        </p:sp>
+        <p:sp>
+          <p:nvSpPr>
+            <p:cNvPr id="39" name="tx39"/>
+            <p:cNvSpPr/>
+            <p:nvPr/>
+          </p:nvSpPr>
+          <p:spPr>
+            <a:xfrm>
+              <a:off x="5830641" y="5456905"/>
+              <a:ext cx="223662" cy="80101"/>
+            </a:xfrm>
+            <a:prstGeom prst="rect">
+              <a:avLst/>
+            </a:prstGeom>
+            <a:noFill/>
+          </p:spPr>
+          <p:txBody>
+            <a:bodyPr lIns="0" rIns="0" tIns="0" bIns="0" anchorCtr="1" anchor="ctr" wrap="none"/>
+            <a:lstStyle/>
+            <a:p>
+              <a:pPr algn="l" marL="0" marR="0" indent="0">
+                <a:lnSpc>
+                  <a:spcPts val="880"/>
+                </a:lnSpc>
+                <a:spcBef>
+                  <a:spcPts val="0"/>
+                </a:spcBef>
+                <a:spcAft>
+                  <a:spcPts val="0"/>
+                </a:spcAft>
+              </a:pPr>
+              <a:r>
+                <a:rPr sz="880">
+                  <a:solidFill>
+                    <a:srgbClr val="4D4D4D">
+                      <a:alpha val="100000"/>
+                    </a:srgbClr>
+                  </a:solidFill>
+                  <a:latin typeface="Helvetica"/>
+                  <a:cs typeface="Helvetica"/>
+                </a:rPr>
+                <a:t>10%</a:t>
+              </a:r>
+            </a:p>
+          </p:txBody>
+        </p:sp>
+        <p:sp>
+          <p:nvSpPr>
+            <p:cNvPr id="40" name="tx40"/>
+            <p:cNvSpPr/>
+            <p:nvPr/>
+          </p:nvSpPr>
+          <p:spPr>
+            <a:xfrm>
+              <a:off x="6605928" y="5456905"/>
+              <a:ext cx="223662" cy="80101"/>
+            </a:xfrm>
+            <a:prstGeom prst="rect">
+              <a:avLst/>
+            </a:prstGeom>
+            <a:noFill/>
+          </p:spPr>
+          <p:txBody>
+            <a:bodyPr lIns="0" rIns="0" tIns="0" bIns="0" anchorCtr="1" anchor="ctr" wrap="none"/>
+            <a:lstStyle/>
+            <a:p>
+              <a:pPr algn="l" marL="0" marR="0" indent="0">
+                <a:lnSpc>
+                  <a:spcPts val="880"/>
+                </a:lnSpc>
+                <a:spcBef>
+                  <a:spcPts val="0"/>
+                </a:spcBef>
+                <a:spcAft>
+                  <a:spcPts val="0"/>
+                </a:spcAft>
+              </a:pPr>
+              <a:r>
+                <a:rPr sz="880">
+                  <a:solidFill>
+                    <a:srgbClr val="4D4D4D">
+                      <a:alpha val="100000"/>
+                    </a:srgbClr>
+                  </a:solidFill>
+                  <a:latin typeface="Helvetica"/>
+                  <a:cs typeface="Helvetica"/>
+                </a:rPr>
+                <a:t>20%</a:t>
+              </a:r>
+            </a:p>
+          </p:txBody>
+        </p:sp>
+        <p:sp>
+          <p:nvSpPr>
+            <p:cNvPr id="41" name="tx41"/>
+            <p:cNvSpPr/>
+            <p:nvPr/>
+          </p:nvSpPr>
+          <p:spPr>
+            <a:xfrm>
+              <a:off x="7381214" y="5456905"/>
+              <a:ext cx="223662" cy="80101"/>
+            </a:xfrm>
+            <a:prstGeom prst="rect">
+              <a:avLst/>
+            </a:prstGeom>
+            <a:noFill/>
+          </p:spPr>
+          <p:txBody>
+            <a:bodyPr lIns="0" rIns="0" tIns="0" bIns="0" anchorCtr="1" anchor="ctr" wrap="none"/>
+            <a:lstStyle/>
+            <a:p>
+              <a:pPr algn="l" marL="0" marR="0" indent="0">
+                <a:lnSpc>
+                  <a:spcPts val="880"/>
+                </a:lnSpc>
+                <a:spcBef>
+                  <a:spcPts val="0"/>
+                </a:spcBef>
+                <a:spcAft>
+                  <a:spcPts val="0"/>
+                </a:spcAft>
+              </a:pPr>
+              <a:r>
+                <a:rPr sz="880">
+                  <a:solidFill>
+                    <a:srgbClr val="4D4D4D">
+                      <a:alpha val="100000"/>
+                    </a:srgbClr>
+                  </a:solidFill>
+                  <a:latin typeface="Helvetica"/>
+                  <a:cs typeface="Helvetica"/>
+                </a:rPr>
+                <a:t>30%</a:t>
+              </a:r>
+            </a:p>
+          </p:txBody>
+        </p:sp>
+        <p:sp>
+          <p:nvSpPr>
+            <p:cNvPr id="42" name="tx42"/>
+            <p:cNvSpPr/>
+            <p:nvPr/>
+          </p:nvSpPr>
+          <p:spPr>
+            <a:xfrm>
+              <a:off x="8156500" y="5456905"/>
+              <a:ext cx="223662" cy="80101"/>
+            </a:xfrm>
+            <a:prstGeom prst="rect">
+              <a:avLst/>
+            </a:prstGeom>
+            <a:noFill/>
+          </p:spPr>
+          <p:txBody>
+            <a:bodyPr lIns="0" rIns="0" tIns="0" bIns="0" anchorCtr="1" anchor="ctr" wrap="none"/>
+            <a:lstStyle/>
+            <a:p>
+              <a:pPr algn="l" marL="0" marR="0" indent="0">
+                <a:lnSpc>
+                  <a:spcPts val="880"/>
+                </a:lnSpc>
+                <a:spcBef>
+                  <a:spcPts val="0"/>
+                </a:spcBef>
+                <a:spcAft>
+                  <a:spcPts val="0"/>
+                </a:spcAft>
+              </a:pPr>
+              <a:r>
+                <a:rPr sz="880">
+                  <a:solidFill>
+                    <a:srgbClr val="4D4D4D">
+                      <a:alpha val="100000"/>
+                    </a:srgbClr>
+                  </a:solidFill>
+                  <a:latin typeface="Helvetica"/>
+                  <a:cs typeface="Helvetica"/>
+                </a:rPr>
+                <a:t>40%</a:t>
+              </a:r>
+            </a:p>
+          </p:txBody>
+        </p:sp>
+        <p:sp>
+          <p:nvSpPr>
+            <p:cNvPr id="43" name="tx43"/>
             <p:cNvSpPr/>
             <p:nvPr/>
           </p:nvSpPr>
@@ -29431,7 +31603,7 @@
         </p:sp>
         <p:sp>
           <p:nvSpPr>
-            <p:cNvPr id="36" name="tx36"/>
+            <p:cNvPr id="44" name="tx44"/>
             <p:cNvSpPr/>
             <p:nvPr/>
           </p:nvSpPr>
@@ -29477,7 +31649,7 @@
         </p:sp>
         <p:sp>
           <p:nvSpPr>
-            <p:cNvPr id="37" name="tx37"/>
+            <p:cNvPr id="45" name="tx45"/>
             <p:cNvSpPr/>
             <p:nvPr/>
           </p:nvSpPr>
@@ -29523,7 +31695,7 @@
         </p:sp>
         <p:sp>
           <p:nvSpPr>
-            <p:cNvPr id="38" name="tx38"/>
+            <p:cNvPr id="46" name="tx46"/>
             <p:cNvSpPr/>
             <p:nvPr/>
           </p:nvSpPr>
@@ -29822,26 +31994,26 @@
           </p:nvSpPr>
           <p:spPr>
             <a:xfrm>
-              <a:off x="2259863" y="1557141"/>
-              <a:ext cx="0" cy="3837134"/>
+              <a:off x="941876" y="5219860"/>
+              <a:ext cx="7675334" cy="0"/>
             </a:xfrm>
             <a:custGeom>
               <a:avLst/>
               <a:pathLst>
-                <a:path w="0" h="3837134">
+                <a:path w="7675334" h="0">
                   <a:moveTo>
-                    <a:pt x="0" y="3837134"/>
+                    <a:pt x="0" y="0"/>
                   </a:moveTo>
                   <a:lnTo>
-                    <a:pt x="0" y="0"/>
-                  </a:lnTo>
-                  <a:lnTo>
-                    <a:pt x="0" y="0"/>
+                    <a:pt x="7675334" y="0"/>
+                  </a:lnTo>
+                  <a:lnTo>
+                    <a:pt x="7675334" y="0"/>
                   </a:lnTo>
                 </a:path>
               </a:pathLst>
             </a:custGeom>
-            <a:ln w="6775" cap="flat">
+            <a:ln w="13550" cap="flat">
               <a:solidFill>
                 <a:srgbClr val="EBEBEB">
                   <a:alpha val="100000"/>
@@ -29865,26 +32037,26 @@
           </p:nvSpPr>
           <p:spPr>
             <a:xfrm>
-              <a:off x="4198078" y="1557141"/>
-              <a:ext cx="0" cy="3837134"/>
+              <a:off x="941876" y="4347784"/>
+              <a:ext cx="7675334" cy="0"/>
             </a:xfrm>
             <a:custGeom>
               <a:avLst/>
               <a:pathLst>
-                <a:path w="0" h="3837134">
+                <a:path w="7675334" h="0">
                   <a:moveTo>
-                    <a:pt x="0" y="3837134"/>
+                    <a:pt x="0" y="0"/>
                   </a:moveTo>
                   <a:lnTo>
-                    <a:pt x="0" y="0"/>
-                  </a:lnTo>
-                  <a:lnTo>
-                    <a:pt x="0" y="0"/>
+                    <a:pt x="7675334" y="0"/>
+                  </a:lnTo>
+                  <a:lnTo>
+                    <a:pt x="7675334" y="0"/>
                   </a:lnTo>
                 </a:path>
               </a:pathLst>
             </a:custGeom>
-            <a:ln w="6775" cap="flat">
+            <a:ln w="13550" cap="flat">
               <a:solidFill>
                 <a:srgbClr val="EBEBEB">
                   <a:alpha val="100000"/>
@@ -29908,26 +32080,26 @@
           </p:nvSpPr>
           <p:spPr>
             <a:xfrm>
-              <a:off x="6136294" y="1557141"/>
-              <a:ext cx="0" cy="3837134"/>
+              <a:off x="941876" y="3475708"/>
+              <a:ext cx="7675334" cy="0"/>
             </a:xfrm>
             <a:custGeom>
               <a:avLst/>
               <a:pathLst>
-                <a:path w="0" h="3837134">
+                <a:path w="7675334" h="0">
                   <a:moveTo>
-                    <a:pt x="0" y="3837134"/>
+                    <a:pt x="0" y="0"/>
                   </a:moveTo>
                   <a:lnTo>
-                    <a:pt x="0" y="0"/>
-                  </a:lnTo>
-                  <a:lnTo>
-                    <a:pt x="0" y="0"/>
+                    <a:pt x="7675334" y="0"/>
+                  </a:lnTo>
+                  <a:lnTo>
+                    <a:pt x="7675334" y="0"/>
                   </a:lnTo>
                 </a:path>
               </a:pathLst>
             </a:custGeom>
-            <a:ln w="6775" cap="flat">
+            <a:ln w="13550" cap="flat">
               <a:solidFill>
                 <a:srgbClr val="EBEBEB">
                   <a:alpha val="100000"/>
@@ -29951,26 +32123,26 @@
           </p:nvSpPr>
           <p:spPr>
             <a:xfrm>
-              <a:off x="8074510" y="1557141"/>
-              <a:ext cx="0" cy="3837134"/>
+              <a:off x="941876" y="2603632"/>
+              <a:ext cx="7675334" cy="0"/>
             </a:xfrm>
             <a:custGeom>
               <a:avLst/>
               <a:pathLst>
-                <a:path w="0" h="3837134">
+                <a:path w="7675334" h="0">
                   <a:moveTo>
-                    <a:pt x="0" y="3837134"/>
+                    <a:pt x="0" y="0"/>
                   </a:moveTo>
                   <a:lnTo>
-                    <a:pt x="0" y="0"/>
-                  </a:lnTo>
-                  <a:lnTo>
-                    <a:pt x="0" y="0"/>
+                    <a:pt x="7675334" y="0"/>
+                  </a:lnTo>
+                  <a:lnTo>
+                    <a:pt x="7675334" y="0"/>
                   </a:lnTo>
                 </a:path>
               </a:pathLst>
             </a:custGeom>
-            <a:ln w="6775" cap="flat">
+            <a:ln w="13550" cap="flat">
               <a:solidFill>
                 <a:srgbClr val="EBEBEB">
                   <a:alpha val="100000"/>
@@ -29994,7 +32166,7 @@
           </p:nvSpPr>
           <p:spPr>
             <a:xfrm>
-              <a:off x="941876" y="5219860"/>
+              <a:off x="941876" y="1731556"/>
               <a:ext cx="7675334" cy="0"/>
             </a:xfrm>
             <a:custGeom>
@@ -30037,21 +32209,21 @@
           </p:nvSpPr>
           <p:spPr>
             <a:xfrm>
-              <a:off x="941876" y="4347784"/>
-              <a:ext cx="7675334" cy="0"/>
+              <a:off x="1290755" y="1557141"/>
+              <a:ext cx="0" cy="3837134"/>
             </a:xfrm>
             <a:custGeom>
               <a:avLst/>
               <a:pathLst>
-                <a:path w="7675334" h="0">
+                <a:path w="0" h="3837134">
                   <a:moveTo>
+                    <a:pt x="0" y="3837134"/>
+                  </a:moveTo>
+                  <a:lnTo>
                     <a:pt x="0" y="0"/>
-                  </a:moveTo>
-                  <a:lnTo>
-                    <a:pt x="7675334" y="0"/>
-                  </a:lnTo>
-                  <a:lnTo>
-                    <a:pt x="7675334" y="0"/>
+                  </a:lnTo>
+                  <a:lnTo>
+                    <a:pt x="0" y="0"/>
                   </a:lnTo>
                 </a:path>
               </a:pathLst>
@@ -30080,21 +32252,21 @@
           </p:nvSpPr>
           <p:spPr>
             <a:xfrm>
-              <a:off x="941876" y="3475708"/>
-              <a:ext cx="7675334" cy="0"/>
+              <a:off x="2066041" y="1557141"/>
+              <a:ext cx="0" cy="3837134"/>
             </a:xfrm>
             <a:custGeom>
               <a:avLst/>
               <a:pathLst>
-                <a:path w="7675334" h="0">
+                <a:path w="0" h="3837134">
                   <a:moveTo>
+                    <a:pt x="0" y="3837134"/>
+                  </a:moveTo>
+                  <a:lnTo>
                     <a:pt x="0" y="0"/>
-                  </a:moveTo>
-                  <a:lnTo>
-                    <a:pt x="7675334" y="0"/>
-                  </a:lnTo>
-                  <a:lnTo>
-                    <a:pt x="7675334" y="0"/>
+                  </a:lnTo>
+                  <a:lnTo>
+                    <a:pt x="0" y="0"/>
                   </a:lnTo>
                 </a:path>
               </a:pathLst>
@@ -30123,21 +32295,21 @@
           </p:nvSpPr>
           <p:spPr>
             <a:xfrm>
-              <a:off x="941876" y="2603632"/>
-              <a:ext cx="7675334" cy="0"/>
+              <a:off x="2841327" y="1557141"/>
+              <a:ext cx="0" cy="3837134"/>
             </a:xfrm>
             <a:custGeom>
               <a:avLst/>
               <a:pathLst>
-                <a:path w="7675334" h="0">
+                <a:path w="0" h="3837134">
                   <a:moveTo>
+                    <a:pt x="0" y="3837134"/>
+                  </a:moveTo>
+                  <a:lnTo>
                     <a:pt x="0" y="0"/>
-                  </a:moveTo>
-                  <a:lnTo>
-                    <a:pt x="7675334" y="0"/>
-                  </a:lnTo>
-                  <a:lnTo>
-                    <a:pt x="7675334" y="0"/>
+                  </a:lnTo>
+                  <a:lnTo>
+                    <a:pt x="0" y="0"/>
                   </a:lnTo>
                 </a:path>
               </a:pathLst>
@@ -30166,21 +32338,21 @@
           </p:nvSpPr>
           <p:spPr>
             <a:xfrm>
-              <a:off x="941876" y="1731556"/>
-              <a:ext cx="7675334" cy="0"/>
+              <a:off x="3616614" y="1557141"/>
+              <a:ext cx="0" cy="3837134"/>
             </a:xfrm>
             <a:custGeom>
               <a:avLst/>
               <a:pathLst>
-                <a:path w="7675334" h="0">
+                <a:path w="0" h="3837134">
                   <a:moveTo>
+                    <a:pt x="0" y="3837134"/>
+                  </a:moveTo>
+                  <a:lnTo>
                     <a:pt x="0" y="0"/>
-                  </a:moveTo>
-                  <a:lnTo>
-                    <a:pt x="7675334" y="0"/>
-                  </a:lnTo>
-                  <a:lnTo>
-                    <a:pt x="7675334" y="0"/>
+                  </a:lnTo>
+                  <a:lnTo>
+                    <a:pt x="0" y="0"/>
                   </a:lnTo>
                 </a:path>
               </a:pathLst>
@@ -30209,7 +32381,7 @@
           </p:nvSpPr>
           <p:spPr>
             <a:xfrm>
-              <a:off x="1290755" y="1557141"/>
+              <a:off x="4391900" y="1557141"/>
               <a:ext cx="0" cy="3837134"/>
             </a:xfrm>
             <a:custGeom>
@@ -30252,7 +32424,7 @@
           </p:nvSpPr>
           <p:spPr>
             <a:xfrm>
-              <a:off x="3228970" y="1557141"/>
+              <a:off x="5167186" y="1557141"/>
               <a:ext cx="0" cy="3837134"/>
             </a:xfrm>
             <a:custGeom>
@@ -30295,7 +32467,7 @@
           </p:nvSpPr>
           <p:spPr>
             <a:xfrm>
-              <a:off x="5167186" y="1557141"/>
+              <a:off x="5942473" y="1557141"/>
               <a:ext cx="0" cy="3837134"/>
             </a:xfrm>
             <a:custGeom>
@@ -30338,7 +32510,7 @@
           </p:nvSpPr>
           <p:spPr>
             <a:xfrm>
-              <a:off x="7105402" y="1557141"/>
+              <a:off x="6717759" y="1557141"/>
               <a:ext cx="0" cy="3837134"/>
             </a:xfrm>
             <a:custGeom>
@@ -30381,7 +32553,7 @@
           </p:nvSpPr>
           <p:spPr>
             <a:xfrm>
-              <a:off x="5167186" y="1557141"/>
+              <a:off x="7493045" y="1557141"/>
               <a:ext cx="0" cy="3837134"/>
             </a:xfrm>
             <a:custGeom>
@@ -30400,9 +32572,95 @@
                 </a:path>
               </a:pathLst>
             </a:custGeom>
-            <a:ln w="10840" cap="flat">
+            <a:ln w="13550" cap="flat">
               <a:solidFill>
-                <a:srgbClr val="8C8C8C">
+                <a:srgbClr val="EBEBEB">
+                  <a:alpha val="100000"/>
+                </a:srgbClr>
+              </a:solidFill>
+              <a:prstDash val="solid"/>
+              <a:round/>
+            </a:ln>
+          </p:spPr>
+          <p:txBody>
+            <a:bodyPr/>
+            <a:lstStyle/>
+            <a:p/>
+          </p:txBody>
+        </p:sp>
+        <p:sp>
+          <p:nvSpPr>
+            <p:cNvPr id="22" name="pl22"/>
+            <p:cNvSpPr/>
+            <p:nvPr/>
+          </p:nvSpPr>
+          <p:spPr>
+            <a:xfrm>
+              <a:off x="8268332" y="1557141"/>
+              <a:ext cx="0" cy="3837134"/>
+            </a:xfrm>
+            <a:custGeom>
+              <a:avLst/>
+              <a:pathLst>
+                <a:path w="0" h="3837134">
+                  <a:moveTo>
+                    <a:pt x="0" y="3837134"/>
+                  </a:moveTo>
+                  <a:lnTo>
+                    <a:pt x="0" y="0"/>
+                  </a:lnTo>
+                  <a:lnTo>
+                    <a:pt x="0" y="0"/>
+                  </a:lnTo>
+                </a:path>
+              </a:pathLst>
+            </a:custGeom>
+            <a:ln w="13550" cap="flat">
+              <a:solidFill>
+                <a:srgbClr val="EBEBEB">
+                  <a:alpha val="100000"/>
+                </a:srgbClr>
+              </a:solidFill>
+              <a:prstDash val="solid"/>
+              <a:round/>
+            </a:ln>
+          </p:spPr>
+          <p:txBody>
+            <a:bodyPr/>
+            <a:lstStyle/>
+            <a:p/>
+          </p:txBody>
+        </p:sp>
+        <p:sp>
+          <p:nvSpPr>
+            <p:cNvPr id="23" name="pl23"/>
+            <p:cNvSpPr/>
+            <p:nvPr/>
+          </p:nvSpPr>
+          <p:spPr>
+            <a:xfrm>
+              <a:off x="4391900" y="1557141"/>
+              <a:ext cx="0" cy="3837134"/>
+            </a:xfrm>
+            <a:custGeom>
+              <a:avLst/>
+              <a:pathLst>
+                <a:path w="0" h="3837134">
+                  <a:moveTo>
+                    <a:pt x="0" y="3837134"/>
+                  </a:moveTo>
+                  <a:lnTo>
+                    <a:pt x="0" y="0"/>
+                  </a:lnTo>
+                  <a:lnTo>
+                    <a:pt x="0" y="0"/>
+                  </a:lnTo>
+                </a:path>
+              </a:pathLst>
+            </a:custGeom>
+            <a:ln w="13550" cap="flat">
+              <a:solidFill>
+                <a:srgbClr val="000000">
                   <a:alpha val="100000"/>
                 </a:srgbClr>
               </a:solidFill>
@@ -30418,7 +32676,7 @@
         </p:sp>
         <p:sp>
           <p:nvSpPr>
-            <p:cNvPr id="22" name="pg22"/>
+            <p:cNvPr id="24" name="pg24"/>
             <p:cNvSpPr/>
             <p:nvPr/>
           </p:nvSpPr>
@@ -31649,7 +33907,7 @@
         </p:sp>
         <p:sp>
           <p:nvSpPr>
-            <p:cNvPr id="23" name="pl23"/>
+            <p:cNvPr id="25" name="pl25"/>
             <p:cNvSpPr/>
             <p:nvPr/>
           </p:nvSpPr>
@@ -32274,7 +34532,7 @@
         </p:sp>
         <p:sp>
           <p:nvSpPr>
-            <p:cNvPr id="24" name="pl24"/>
+            <p:cNvPr id="26" name="pl26"/>
             <p:cNvSpPr/>
             <p:nvPr/>
           </p:nvSpPr>
@@ -32899,7 +35157,7 @@
         </p:sp>
         <p:sp>
           <p:nvSpPr>
-            <p:cNvPr id="25" name="pl25"/>
+            <p:cNvPr id="27" name="pl27"/>
             <p:cNvSpPr/>
             <p:nvPr/>
           </p:nvSpPr>
@@ -33533,7 +35791,7 @@
         </p:sp>
         <p:sp>
           <p:nvSpPr>
-            <p:cNvPr id="26" name="tx26"/>
+            <p:cNvPr id="28" name="tx28"/>
             <p:cNvSpPr/>
             <p:nvPr/>
           </p:nvSpPr>
@@ -33579,7 +35837,7 @@
         </p:sp>
         <p:sp>
           <p:nvSpPr>
-            <p:cNvPr id="27" name="tx27"/>
+            <p:cNvPr id="29" name="tx29"/>
             <p:cNvSpPr/>
             <p:nvPr/>
           </p:nvSpPr>
@@ -33625,7 +35883,7 @@
         </p:sp>
         <p:sp>
           <p:nvSpPr>
-            <p:cNvPr id="28" name="tx28"/>
+            <p:cNvPr id="30" name="tx30"/>
             <p:cNvSpPr/>
             <p:nvPr/>
           </p:nvSpPr>
@@ -33671,7 +35929,7 @@
         </p:sp>
         <p:sp>
           <p:nvSpPr>
-            <p:cNvPr id="29" name="tx29"/>
+            <p:cNvPr id="31" name="tx31"/>
             <p:cNvSpPr/>
             <p:nvPr/>
           </p:nvSpPr>
@@ -33717,7 +35975,7 @@
         </p:sp>
         <p:sp>
           <p:nvSpPr>
-            <p:cNvPr id="30" name="tx30"/>
+            <p:cNvPr id="32" name="tx32"/>
             <p:cNvSpPr/>
             <p:nvPr/>
           </p:nvSpPr>
@@ -33763,14 +36021,14 @@
         </p:sp>
         <p:sp>
           <p:nvSpPr>
-            <p:cNvPr id="31" name="tx31"/>
+            <p:cNvPr id="33" name="tx33"/>
             <p:cNvSpPr/>
             <p:nvPr/>
           </p:nvSpPr>
           <p:spPr>
             <a:xfrm>
-              <a:off x="1209967" y="5456905"/>
-              <a:ext cx="161574" cy="80101"/>
+              <a:off x="1160315" y="5456905"/>
+              <a:ext cx="260878" cy="80101"/>
             </a:xfrm>
             <a:prstGeom prst="rect">
               <a:avLst/>
@@ -33802,21 +36060,21 @@
                   <a:latin typeface="Helvetica"/>
                   <a:cs typeface="Helvetica"/>
                 </a:rPr>
-                <a:t>-50</a:t>
+                <a:t>-50%</a:t>
               </a:r>
             </a:p>
           </p:txBody>
         </p:sp>
         <p:sp>
           <p:nvSpPr>
-            <p:cNvPr id="32" name="tx32"/>
+            <p:cNvPr id="34" name="tx34"/>
             <p:cNvSpPr/>
             <p:nvPr/>
           </p:nvSpPr>
           <p:spPr>
             <a:xfrm>
-              <a:off x="3148183" y="5456905"/>
-              <a:ext cx="161574" cy="80101"/>
+              <a:off x="1935602" y="5456905"/>
+              <a:ext cx="260878" cy="80101"/>
             </a:xfrm>
             <a:prstGeom prst="rect">
               <a:avLst/>
@@ -33848,21 +36106,21 @@
                   <a:latin typeface="Helvetica"/>
                   <a:cs typeface="Helvetica"/>
                 </a:rPr>
-                <a:t>-25</a:t>
+                <a:t>-40%</a:t>
               </a:r>
             </a:p>
           </p:txBody>
         </p:sp>
         <p:sp>
           <p:nvSpPr>
-            <p:cNvPr id="33" name="tx33"/>
+            <p:cNvPr id="35" name="tx35"/>
             <p:cNvSpPr/>
             <p:nvPr/>
           </p:nvSpPr>
           <p:spPr>
             <a:xfrm>
-              <a:off x="5136097" y="5456905"/>
-              <a:ext cx="62179" cy="80101"/>
+              <a:off x="2710888" y="5456905"/>
+              <a:ext cx="260878" cy="80101"/>
             </a:xfrm>
             <a:prstGeom prst="rect">
               <a:avLst/>
@@ -33894,21 +36152,21 @@
                   <a:latin typeface="Helvetica"/>
                   <a:cs typeface="Helvetica"/>
                 </a:rPr>
-                <a:t>0</a:t>
+                <a:t>-30%</a:t>
               </a:r>
             </a:p>
           </p:txBody>
         </p:sp>
         <p:sp>
           <p:nvSpPr>
-            <p:cNvPr id="34" name="tx34"/>
+            <p:cNvPr id="36" name="tx36"/>
             <p:cNvSpPr/>
             <p:nvPr/>
           </p:nvSpPr>
           <p:spPr>
             <a:xfrm>
-              <a:off x="7043223" y="5456905"/>
-              <a:ext cx="124358" cy="80101"/>
+              <a:off x="3486174" y="5456905"/>
+              <a:ext cx="260878" cy="80101"/>
             </a:xfrm>
             <a:prstGeom prst="rect">
               <a:avLst/>
@@ -33940,14 +36198,290 @@
                   <a:latin typeface="Helvetica"/>
                   <a:cs typeface="Helvetica"/>
                 </a:rPr>
-                <a:t>25</a:t>
+                <a:t>-20%</a:t>
               </a:r>
             </a:p>
           </p:txBody>
         </p:sp>
         <p:sp>
           <p:nvSpPr>
-            <p:cNvPr id="35" name="tx35"/>
+            <p:cNvPr id="37" name="tx37"/>
+            <p:cNvSpPr/>
+            <p:nvPr/>
+          </p:nvSpPr>
+          <p:spPr>
+            <a:xfrm>
+              <a:off x="4261461" y="5456905"/>
+              <a:ext cx="260878" cy="80101"/>
+            </a:xfrm>
+            <a:prstGeom prst="rect">
+              <a:avLst/>
+            </a:prstGeom>
+            <a:noFill/>
+          </p:spPr>
+          <p:txBody>
+            <a:bodyPr lIns="0" rIns="0" tIns="0" bIns="0" anchorCtr="1" anchor="ctr" wrap="none"/>
+            <a:lstStyle/>
+            <a:p>
+              <a:pPr algn="l" marL="0" marR="0" indent="0">
+                <a:lnSpc>
+                  <a:spcPts val="880"/>
+                </a:lnSpc>
+                <a:spcBef>
+                  <a:spcPts val="0"/>
+                </a:spcBef>
+                <a:spcAft>
+                  <a:spcPts val="0"/>
+                </a:spcAft>
+              </a:pPr>
+              <a:r>
+                <a:rPr sz="880">
+                  <a:solidFill>
+                    <a:srgbClr val="4D4D4D">
+                      <a:alpha val="100000"/>
+                    </a:srgbClr>
+                  </a:solidFill>
+                  <a:latin typeface="Helvetica"/>
+                  <a:cs typeface="Helvetica"/>
+                </a:rPr>
+                <a:t>-10%</a:t>
+              </a:r>
+            </a:p>
+          </p:txBody>
+        </p:sp>
+        <p:sp>
+          <p:nvSpPr>
+            <p:cNvPr id="38" name="tx38"/>
+            <p:cNvSpPr/>
+            <p:nvPr/>
+          </p:nvSpPr>
+          <p:spPr>
+            <a:xfrm>
+              <a:off x="5086445" y="5456905"/>
+              <a:ext cx="161483" cy="80101"/>
+            </a:xfrm>
+            <a:prstGeom prst="rect">
+              <a:avLst/>
+            </a:prstGeom>
+            <a:noFill/>
+          </p:spPr>
+          <p:txBody>
+            <a:bodyPr lIns="0" rIns="0" tIns="0" bIns="0" anchorCtr="1" anchor="ctr" wrap="none"/>
+            <a:lstStyle/>
+            <a:p>
+              <a:pPr algn="l" marL="0" marR="0" indent="0">
+                <a:lnSpc>
+                  <a:spcPts val="880"/>
+                </a:lnSpc>
+                <a:spcBef>
+                  <a:spcPts val="0"/>
+                </a:spcBef>
+                <a:spcAft>
+                  <a:spcPts val="0"/>
+                </a:spcAft>
+              </a:pPr>
+              <a:r>
+                <a:rPr sz="880">
+                  <a:solidFill>
+                    <a:srgbClr val="4D4D4D">
+                      <a:alpha val="100000"/>
+                    </a:srgbClr>
+                  </a:solidFill>
+                  <a:latin typeface="Helvetica"/>
+                  <a:cs typeface="Helvetica"/>
+                </a:rPr>
+                <a:t>0%</a:t>
+              </a:r>
+            </a:p>
+          </p:txBody>
+        </p:sp>
+        <p:sp>
+          <p:nvSpPr>
+            <p:cNvPr id="39" name="tx39"/>
+            <p:cNvSpPr/>
+            <p:nvPr/>
+          </p:nvSpPr>
+          <p:spPr>
+            <a:xfrm>
+              <a:off x="5830641" y="5456905"/>
+              <a:ext cx="223662" cy="80101"/>
+            </a:xfrm>
+            <a:prstGeom prst="rect">
+              <a:avLst/>
+            </a:prstGeom>
+            <a:noFill/>
+          </p:spPr>
+          <p:txBody>
+            <a:bodyPr lIns="0" rIns="0" tIns="0" bIns="0" anchorCtr="1" anchor="ctr" wrap="none"/>
+            <a:lstStyle/>
+            <a:p>
+              <a:pPr algn="l" marL="0" marR="0" indent="0">
+                <a:lnSpc>
+                  <a:spcPts val="880"/>
+                </a:lnSpc>
+                <a:spcBef>
+                  <a:spcPts val="0"/>
+                </a:spcBef>
+                <a:spcAft>
+                  <a:spcPts val="0"/>
+                </a:spcAft>
+              </a:pPr>
+              <a:r>
+                <a:rPr sz="880">
+                  <a:solidFill>
+                    <a:srgbClr val="4D4D4D">
+                      <a:alpha val="100000"/>
+                    </a:srgbClr>
+                  </a:solidFill>
+                  <a:latin typeface="Helvetica"/>
+                  <a:cs typeface="Helvetica"/>
+                </a:rPr>
+                <a:t>10%</a:t>
+              </a:r>
+            </a:p>
+          </p:txBody>
+        </p:sp>
+        <p:sp>
+          <p:nvSpPr>
+            <p:cNvPr id="40" name="tx40"/>
+            <p:cNvSpPr/>
+            <p:nvPr/>
+          </p:nvSpPr>
+          <p:spPr>
+            <a:xfrm>
+              <a:off x="6605928" y="5456905"/>
+              <a:ext cx="223662" cy="80101"/>
+            </a:xfrm>
+            <a:prstGeom prst="rect">
+              <a:avLst/>
+            </a:prstGeom>
+            <a:noFill/>
+          </p:spPr>
+          <p:txBody>
+            <a:bodyPr lIns="0" rIns="0" tIns="0" bIns="0" anchorCtr="1" anchor="ctr" wrap="none"/>
+            <a:lstStyle/>
+            <a:p>
+              <a:pPr algn="l" marL="0" marR="0" indent="0">
+                <a:lnSpc>
+                  <a:spcPts val="880"/>
+                </a:lnSpc>
+                <a:spcBef>
+                  <a:spcPts val="0"/>
+                </a:spcBef>
+                <a:spcAft>
+                  <a:spcPts val="0"/>
+                </a:spcAft>
+              </a:pPr>
+              <a:r>
+                <a:rPr sz="880">
+                  <a:solidFill>
+                    <a:srgbClr val="4D4D4D">
+                      <a:alpha val="100000"/>
+                    </a:srgbClr>
+                  </a:solidFill>
+                  <a:latin typeface="Helvetica"/>
+                  <a:cs typeface="Helvetica"/>
+                </a:rPr>
+                <a:t>20%</a:t>
+              </a:r>
+            </a:p>
+          </p:txBody>
+        </p:sp>
+        <p:sp>
+          <p:nvSpPr>
+            <p:cNvPr id="41" name="tx41"/>
+            <p:cNvSpPr/>
+            <p:nvPr/>
+          </p:nvSpPr>
+          <p:spPr>
+            <a:xfrm>
+              <a:off x="7381214" y="5456905"/>
+              <a:ext cx="223662" cy="80101"/>
+            </a:xfrm>
+            <a:prstGeom prst="rect">
+              <a:avLst/>
+            </a:prstGeom>
+            <a:noFill/>
+          </p:spPr>
+          <p:txBody>
+            <a:bodyPr lIns="0" rIns="0" tIns="0" bIns="0" anchorCtr="1" anchor="ctr" wrap="none"/>
+            <a:lstStyle/>
+            <a:p>
+              <a:pPr algn="l" marL="0" marR="0" indent="0">
+                <a:lnSpc>
+                  <a:spcPts val="880"/>
+                </a:lnSpc>
+                <a:spcBef>
+                  <a:spcPts val="0"/>
+                </a:spcBef>
+                <a:spcAft>
+                  <a:spcPts val="0"/>
+                </a:spcAft>
+              </a:pPr>
+              <a:r>
+                <a:rPr sz="880">
+                  <a:solidFill>
+                    <a:srgbClr val="4D4D4D">
+                      <a:alpha val="100000"/>
+                    </a:srgbClr>
+                  </a:solidFill>
+                  <a:latin typeface="Helvetica"/>
+                  <a:cs typeface="Helvetica"/>
+                </a:rPr>
+                <a:t>30%</a:t>
+              </a:r>
+            </a:p>
+          </p:txBody>
+        </p:sp>
+        <p:sp>
+          <p:nvSpPr>
+            <p:cNvPr id="42" name="tx42"/>
+            <p:cNvSpPr/>
+            <p:nvPr/>
+          </p:nvSpPr>
+          <p:spPr>
+            <a:xfrm>
+              <a:off x="8156500" y="5456905"/>
+              <a:ext cx="223662" cy="80101"/>
+            </a:xfrm>
+            <a:prstGeom prst="rect">
+              <a:avLst/>
+            </a:prstGeom>
+            <a:noFill/>
+          </p:spPr>
+          <p:txBody>
+            <a:bodyPr lIns="0" rIns="0" tIns="0" bIns="0" anchorCtr="1" anchor="ctr" wrap="none"/>
+            <a:lstStyle/>
+            <a:p>
+              <a:pPr algn="l" marL="0" marR="0" indent="0">
+                <a:lnSpc>
+                  <a:spcPts val="880"/>
+                </a:lnSpc>
+                <a:spcBef>
+                  <a:spcPts val="0"/>
+                </a:spcBef>
+                <a:spcAft>
+                  <a:spcPts val="0"/>
+                </a:spcAft>
+              </a:pPr>
+              <a:r>
+                <a:rPr sz="880">
+                  <a:solidFill>
+                    <a:srgbClr val="4D4D4D">
+                      <a:alpha val="100000"/>
+                    </a:srgbClr>
+                  </a:solidFill>
+                  <a:latin typeface="Helvetica"/>
+                  <a:cs typeface="Helvetica"/>
+                </a:rPr>
+                <a:t>40%</a:t>
+              </a:r>
+            </a:p>
+          </p:txBody>
+        </p:sp>
+        <p:sp>
+          <p:nvSpPr>
+            <p:cNvPr id="43" name="tx43"/>
             <p:cNvSpPr/>
             <p:nvPr/>
           </p:nvSpPr>
@@ -33993,7 +36527,7 @@
         </p:sp>
         <p:sp>
           <p:nvSpPr>
-            <p:cNvPr id="36" name="tx36"/>
+            <p:cNvPr id="44" name="tx44"/>
             <p:cNvSpPr/>
             <p:nvPr/>
           </p:nvSpPr>
@@ -34039,7 +36573,7 @@
         </p:sp>
         <p:sp>
           <p:nvSpPr>
-            <p:cNvPr id="37" name="tx37"/>
+            <p:cNvPr id="45" name="tx45"/>
             <p:cNvSpPr/>
             <p:nvPr/>
           </p:nvSpPr>
@@ -34085,7 +36619,7 @@
         </p:sp>
         <p:sp>
           <p:nvSpPr>
-            <p:cNvPr id="38" name="tx38"/>
+            <p:cNvPr id="46" name="tx46"/>
             <p:cNvSpPr/>
             <p:nvPr/>
           </p:nvSpPr>
@@ -34384,26 +36918,26 @@
           </p:nvSpPr>
           <p:spPr>
             <a:xfrm>
-              <a:off x="2259863" y="1557141"/>
-              <a:ext cx="0" cy="3837134"/>
+              <a:off x="941876" y="5219860"/>
+              <a:ext cx="7675334" cy="0"/>
             </a:xfrm>
             <a:custGeom>
               <a:avLst/>
               <a:pathLst>
-                <a:path w="0" h="3837134">
+                <a:path w="7675334" h="0">
                   <a:moveTo>
-                    <a:pt x="0" y="3837134"/>
+                    <a:pt x="0" y="0"/>
                   </a:moveTo>
                   <a:lnTo>
-                    <a:pt x="0" y="0"/>
-                  </a:lnTo>
-                  <a:lnTo>
-                    <a:pt x="0" y="0"/>
+                    <a:pt x="7675334" y="0"/>
+                  </a:lnTo>
+                  <a:lnTo>
+                    <a:pt x="7675334" y="0"/>
                   </a:lnTo>
                 </a:path>
               </a:pathLst>
             </a:custGeom>
-            <a:ln w="6775" cap="flat">
+            <a:ln w="13550" cap="flat">
               <a:solidFill>
                 <a:srgbClr val="EBEBEB">
                   <a:alpha val="100000"/>
@@ -34427,26 +36961,26 @@
           </p:nvSpPr>
           <p:spPr>
             <a:xfrm>
-              <a:off x="4198078" y="1557141"/>
-              <a:ext cx="0" cy="3837134"/>
+              <a:off x="941876" y="4347784"/>
+              <a:ext cx="7675334" cy="0"/>
             </a:xfrm>
             <a:custGeom>
               <a:avLst/>
               <a:pathLst>
-                <a:path w="0" h="3837134">
+                <a:path w="7675334" h="0">
                   <a:moveTo>
-                    <a:pt x="0" y="3837134"/>
+                    <a:pt x="0" y="0"/>
                   </a:moveTo>
                   <a:lnTo>
-                    <a:pt x="0" y="0"/>
-                  </a:lnTo>
-                  <a:lnTo>
-                    <a:pt x="0" y="0"/>
+                    <a:pt x="7675334" y="0"/>
+                  </a:lnTo>
+                  <a:lnTo>
+                    <a:pt x="7675334" y="0"/>
                   </a:lnTo>
                 </a:path>
               </a:pathLst>
             </a:custGeom>
-            <a:ln w="6775" cap="flat">
+            <a:ln w="13550" cap="flat">
               <a:solidFill>
                 <a:srgbClr val="EBEBEB">
                   <a:alpha val="100000"/>
@@ -34470,26 +37004,26 @@
           </p:nvSpPr>
           <p:spPr>
             <a:xfrm>
-              <a:off x="6136294" y="1557141"/>
-              <a:ext cx="0" cy="3837134"/>
+              <a:off x="941876" y="3475708"/>
+              <a:ext cx="7675334" cy="0"/>
             </a:xfrm>
             <a:custGeom>
               <a:avLst/>
               <a:pathLst>
-                <a:path w="0" h="3837134">
+                <a:path w="7675334" h="0">
                   <a:moveTo>
-                    <a:pt x="0" y="3837134"/>
+                    <a:pt x="0" y="0"/>
                   </a:moveTo>
                   <a:lnTo>
-                    <a:pt x="0" y="0"/>
-                  </a:lnTo>
-                  <a:lnTo>
-                    <a:pt x="0" y="0"/>
+                    <a:pt x="7675334" y="0"/>
+                  </a:lnTo>
+                  <a:lnTo>
+                    <a:pt x="7675334" y="0"/>
                   </a:lnTo>
                 </a:path>
               </a:pathLst>
             </a:custGeom>
-            <a:ln w="6775" cap="flat">
+            <a:ln w="13550" cap="flat">
               <a:solidFill>
                 <a:srgbClr val="EBEBEB">
                   <a:alpha val="100000"/>
@@ -34513,26 +37047,26 @@
           </p:nvSpPr>
           <p:spPr>
             <a:xfrm>
-              <a:off x="8074510" y="1557141"/>
-              <a:ext cx="0" cy="3837134"/>
+              <a:off x="941876" y="2603632"/>
+              <a:ext cx="7675334" cy="0"/>
             </a:xfrm>
             <a:custGeom>
               <a:avLst/>
               <a:pathLst>
-                <a:path w="0" h="3837134">
+                <a:path w="7675334" h="0">
                   <a:moveTo>
-                    <a:pt x="0" y="3837134"/>
+                    <a:pt x="0" y="0"/>
                   </a:moveTo>
                   <a:lnTo>
-                    <a:pt x="0" y="0"/>
-                  </a:lnTo>
-                  <a:lnTo>
-                    <a:pt x="0" y="0"/>
+                    <a:pt x="7675334" y="0"/>
+                  </a:lnTo>
+                  <a:lnTo>
+                    <a:pt x="7675334" y="0"/>
                   </a:lnTo>
                 </a:path>
               </a:pathLst>
             </a:custGeom>
-            <a:ln w="6775" cap="flat">
+            <a:ln w="13550" cap="flat">
               <a:solidFill>
                 <a:srgbClr val="EBEBEB">
                   <a:alpha val="100000"/>
@@ -34556,7 +37090,7 @@
           </p:nvSpPr>
           <p:spPr>
             <a:xfrm>
-              <a:off x="941876" y="5219860"/>
+              <a:off x="941876" y="1731556"/>
               <a:ext cx="7675334" cy="0"/>
             </a:xfrm>
             <a:custGeom>
@@ -34599,21 +37133,21 @@
           </p:nvSpPr>
           <p:spPr>
             <a:xfrm>
-              <a:off x="941876" y="4347784"/>
-              <a:ext cx="7675334" cy="0"/>
+              <a:off x="1290755" y="1557141"/>
+              <a:ext cx="0" cy="3837134"/>
             </a:xfrm>
             <a:custGeom>
               <a:avLst/>
               <a:pathLst>
-                <a:path w="7675334" h="0">
+                <a:path w="0" h="3837134">
                   <a:moveTo>
+                    <a:pt x="0" y="3837134"/>
+                  </a:moveTo>
+                  <a:lnTo>
                     <a:pt x="0" y="0"/>
-                  </a:moveTo>
-                  <a:lnTo>
-                    <a:pt x="7675334" y="0"/>
-                  </a:lnTo>
-                  <a:lnTo>
-                    <a:pt x="7675334" y="0"/>
+                  </a:lnTo>
+                  <a:lnTo>
+                    <a:pt x="0" y="0"/>
                   </a:lnTo>
                 </a:path>
               </a:pathLst>
@@ -34642,21 +37176,21 @@
           </p:nvSpPr>
           <p:spPr>
             <a:xfrm>
-              <a:off x="941876" y="3475708"/>
-              <a:ext cx="7675334" cy="0"/>
+              <a:off x="2066041" y="1557141"/>
+              <a:ext cx="0" cy="3837134"/>
             </a:xfrm>
             <a:custGeom>
               <a:avLst/>
               <a:pathLst>
-                <a:path w="7675334" h="0">
+                <a:path w="0" h="3837134">
                   <a:moveTo>
+                    <a:pt x="0" y="3837134"/>
+                  </a:moveTo>
+                  <a:lnTo>
                     <a:pt x="0" y="0"/>
-                  </a:moveTo>
-                  <a:lnTo>
-                    <a:pt x="7675334" y="0"/>
-                  </a:lnTo>
-                  <a:lnTo>
-                    <a:pt x="7675334" y="0"/>
+                  </a:lnTo>
+                  <a:lnTo>
+                    <a:pt x="0" y="0"/>
                   </a:lnTo>
                 </a:path>
               </a:pathLst>
@@ -34685,21 +37219,21 @@
           </p:nvSpPr>
           <p:spPr>
             <a:xfrm>
-              <a:off x="941876" y="2603632"/>
-              <a:ext cx="7675334" cy="0"/>
+              <a:off x="2841327" y="1557141"/>
+              <a:ext cx="0" cy="3837134"/>
             </a:xfrm>
             <a:custGeom>
               <a:avLst/>
               <a:pathLst>
-                <a:path w="7675334" h="0">
+                <a:path w="0" h="3837134">
                   <a:moveTo>
+                    <a:pt x="0" y="3837134"/>
+                  </a:moveTo>
+                  <a:lnTo>
                     <a:pt x="0" y="0"/>
-                  </a:moveTo>
-                  <a:lnTo>
-                    <a:pt x="7675334" y="0"/>
-                  </a:lnTo>
-                  <a:lnTo>
-                    <a:pt x="7675334" y="0"/>
+                  </a:lnTo>
+                  <a:lnTo>
+                    <a:pt x="0" y="0"/>
                   </a:lnTo>
                 </a:path>
               </a:pathLst>
@@ -34728,21 +37262,21 @@
           </p:nvSpPr>
           <p:spPr>
             <a:xfrm>
-              <a:off x="941876" y="1731556"/>
-              <a:ext cx="7675334" cy="0"/>
+              <a:off x="3616614" y="1557141"/>
+              <a:ext cx="0" cy="3837134"/>
             </a:xfrm>
             <a:custGeom>
               <a:avLst/>
               <a:pathLst>
-                <a:path w="7675334" h="0">
+                <a:path w="0" h="3837134">
                   <a:moveTo>
+                    <a:pt x="0" y="3837134"/>
+                  </a:moveTo>
+                  <a:lnTo>
                     <a:pt x="0" y="0"/>
-                  </a:moveTo>
-                  <a:lnTo>
-                    <a:pt x="7675334" y="0"/>
-                  </a:lnTo>
-                  <a:lnTo>
-                    <a:pt x="7675334" y="0"/>
+                  </a:lnTo>
+                  <a:lnTo>
+                    <a:pt x="0" y="0"/>
                   </a:lnTo>
                 </a:path>
               </a:pathLst>
@@ -34771,7 +37305,7 @@
           </p:nvSpPr>
           <p:spPr>
             <a:xfrm>
-              <a:off x="1290755" y="1557141"/>
+              <a:off x="4391900" y="1557141"/>
               <a:ext cx="0" cy="3837134"/>
             </a:xfrm>
             <a:custGeom>
@@ -34814,7 +37348,7 @@
           </p:nvSpPr>
           <p:spPr>
             <a:xfrm>
-              <a:off x="3228970" y="1557141"/>
+              <a:off x="5167186" y="1557141"/>
               <a:ext cx="0" cy="3837134"/>
             </a:xfrm>
             <a:custGeom>
@@ -34857,7 +37391,7 @@
           </p:nvSpPr>
           <p:spPr>
             <a:xfrm>
-              <a:off x="5167186" y="1557141"/>
+              <a:off x="5942473" y="1557141"/>
               <a:ext cx="0" cy="3837134"/>
             </a:xfrm>
             <a:custGeom>
@@ -34900,7 +37434,7 @@
           </p:nvSpPr>
           <p:spPr>
             <a:xfrm>
-              <a:off x="7105402" y="1557141"/>
+              <a:off x="6717759" y="1557141"/>
               <a:ext cx="0" cy="3837134"/>
             </a:xfrm>
             <a:custGeom>
@@ -34943,7 +37477,7 @@
           </p:nvSpPr>
           <p:spPr>
             <a:xfrm>
-              <a:off x="5167186" y="1557141"/>
+              <a:off x="7493045" y="1557141"/>
               <a:ext cx="0" cy="3837134"/>
             </a:xfrm>
             <a:custGeom>
@@ -34962,9 +37496,95 @@
                 </a:path>
               </a:pathLst>
             </a:custGeom>
-            <a:ln w="10840" cap="flat">
+            <a:ln w="13550" cap="flat">
               <a:solidFill>
-                <a:srgbClr val="8C8C8C">
+                <a:srgbClr val="EBEBEB">
+                  <a:alpha val="100000"/>
+                </a:srgbClr>
+              </a:solidFill>
+              <a:prstDash val="solid"/>
+              <a:round/>
+            </a:ln>
+          </p:spPr>
+          <p:txBody>
+            <a:bodyPr/>
+            <a:lstStyle/>
+            <a:p/>
+          </p:txBody>
+        </p:sp>
+        <p:sp>
+          <p:nvSpPr>
+            <p:cNvPr id="22" name="pl22"/>
+            <p:cNvSpPr/>
+            <p:nvPr/>
+          </p:nvSpPr>
+          <p:spPr>
+            <a:xfrm>
+              <a:off x="8268332" y="1557141"/>
+              <a:ext cx="0" cy="3837134"/>
+            </a:xfrm>
+            <a:custGeom>
+              <a:avLst/>
+              <a:pathLst>
+                <a:path w="0" h="3837134">
+                  <a:moveTo>
+                    <a:pt x="0" y="3837134"/>
+                  </a:moveTo>
+                  <a:lnTo>
+                    <a:pt x="0" y="0"/>
+                  </a:lnTo>
+                  <a:lnTo>
+                    <a:pt x="0" y="0"/>
+                  </a:lnTo>
+                </a:path>
+              </a:pathLst>
+            </a:custGeom>
+            <a:ln w="13550" cap="flat">
+              <a:solidFill>
+                <a:srgbClr val="EBEBEB">
+                  <a:alpha val="100000"/>
+                </a:srgbClr>
+              </a:solidFill>
+              <a:prstDash val="solid"/>
+              <a:round/>
+            </a:ln>
+          </p:spPr>
+          <p:txBody>
+            <a:bodyPr/>
+            <a:lstStyle/>
+            <a:p/>
+          </p:txBody>
+        </p:sp>
+        <p:sp>
+          <p:nvSpPr>
+            <p:cNvPr id="23" name="pl23"/>
+            <p:cNvSpPr/>
+            <p:nvPr/>
+          </p:nvSpPr>
+          <p:spPr>
+            <a:xfrm>
+              <a:off x="4391900" y="1557141"/>
+              <a:ext cx="0" cy="3837134"/>
+            </a:xfrm>
+            <a:custGeom>
+              <a:avLst/>
+              <a:pathLst>
+                <a:path w="0" h="3837134">
+                  <a:moveTo>
+                    <a:pt x="0" y="3837134"/>
+                  </a:moveTo>
+                  <a:lnTo>
+                    <a:pt x="0" y="0"/>
+                  </a:lnTo>
+                  <a:lnTo>
+                    <a:pt x="0" y="0"/>
+                  </a:lnTo>
+                </a:path>
+              </a:pathLst>
+            </a:custGeom>
+            <a:ln w="13550" cap="flat">
+              <a:solidFill>
+                <a:srgbClr val="000000">
                   <a:alpha val="100000"/>
                 </a:srgbClr>
               </a:solidFill>
@@ -34980,7 +37600,7 @@
         </p:sp>
         <p:sp>
           <p:nvSpPr>
-            <p:cNvPr id="22" name="pg22"/>
+            <p:cNvPr id="24" name="pg24"/>
             <p:cNvSpPr/>
             <p:nvPr/>
           </p:nvSpPr>
@@ -36211,7 +38831,7 @@
         </p:sp>
         <p:sp>
           <p:nvSpPr>
-            <p:cNvPr id="23" name="pl23"/>
+            <p:cNvPr id="25" name="pl25"/>
             <p:cNvSpPr/>
             <p:nvPr/>
           </p:nvSpPr>
@@ -36836,7 +39456,7 @@
         </p:sp>
         <p:sp>
           <p:nvSpPr>
-            <p:cNvPr id="24" name="pl24"/>
+            <p:cNvPr id="26" name="pl26"/>
             <p:cNvSpPr/>
             <p:nvPr/>
           </p:nvSpPr>
@@ -37461,7 +40081,7 @@
         </p:sp>
         <p:sp>
           <p:nvSpPr>
-            <p:cNvPr id="25" name="pl25"/>
+            <p:cNvPr id="27" name="pl27"/>
             <p:cNvSpPr/>
             <p:nvPr/>
           </p:nvSpPr>
@@ -38095,7 +40715,7 @@
         </p:sp>
         <p:sp>
           <p:nvSpPr>
-            <p:cNvPr id="26" name="tx26"/>
+            <p:cNvPr id="28" name="tx28"/>
             <p:cNvSpPr/>
             <p:nvPr/>
           </p:nvSpPr>
@@ -38141,7 +40761,7 @@
         </p:sp>
         <p:sp>
           <p:nvSpPr>
-            <p:cNvPr id="27" name="tx27"/>
+            <p:cNvPr id="29" name="tx29"/>
             <p:cNvSpPr/>
             <p:nvPr/>
           </p:nvSpPr>
@@ -38187,7 +40807,7 @@
         </p:sp>
         <p:sp>
           <p:nvSpPr>
-            <p:cNvPr id="28" name="tx28"/>
+            <p:cNvPr id="30" name="tx30"/>
             <p:cNvSpPr/>
             <p:nvPr/>
           </p:nvSpPr>
@@ -38233,7 +40853,7 @@
         </p:sp>
         <p:sp>
           <p:nvSpPr>
-            <p:cNvPr id="29" name="tx29"/>
+            <p:cNvPr id="31" name="tx31"/>
             <p:cNvSpPr/>
             <p:nvPr/>
           </p:nvSpPr>
@@ -38279,7 +40899,7 @@
         </p:sp>
         <p:sp>
           <p:nvSpPr>
-            <p:cNvPr id="30" name="tx30"/>
+            <p:cNvPr id="32" name="tx32"/>
             <p:cNvSpPr/>
             <p:nvPr/>
           </p:nvSpPr>
@@ -38325,14 +40945,14 @@
         </p:sp>
         <p:sp>
           <p:nvSpPr>
-            <p:cNvPr id="31" name="tx31"/>
+            <p:cNvPr id="33" name="tx33"/>
             <p:cNvSpPr/>
             <p:nvPr/>
           </p:nvSpPr>
           <p:spPr>
             <a:xfrm>
-              <a:off x="1209967" y="5456905"/>
-              <a:ext cx="161574" cy="80101"/>
+              <a:off x="1160315" y="5456905"/>
+              <a:ext cx="260878" cy="80101"/>
             </a:xfrm>
             <a:prstGeom prst="rect">
               <a:avLst/>
@@ -38364,21 +40984,21 @@
                   <a:latin typeface="Helvetica"/>
                   <a:cs typeface="Helvetica"/>
                 </a:rPr>
-                <a:t>-50</a:t>
+                <a:t>-50%</a:t>
               </a:r>
             </a:p>
           </p:txBody>
         </p:sp>
         <p:sp>
           <p:nvSpPr>
-            <p:cNvPr id="32" name="tx32"/>
+            <p:cNvPr id="34" name="tx34"/>
             <p:cNvSpPr/>
             <p:nvPr/>
           </p:nvSpPr>
           <p:spPr>
             <a:xfrm>
-              <a:off x="3148183" y="5456905"/>
-              <a:ext cx="161574" cy="80101"/>
+              <a:off x="1935602" y="5456905"/>
+              <a:ext cx="260878" cy="80101"/>
             </a:xfrm>
             <a:prstGeom prst="rect">
               <a:avLst/>
@@ -38410,21 +41030,21 @@
                   <a:latin typeface="Helvetica"/>
                   <a:cs typeface="Helvetica"/>
                 </a:rPr>
-                <a:t>-25</a:t>
+                <a:t>-40%</a:t>
               </a:r>
             </a:p>
           </p:txBody>
         </p:sp>
         <p:sp>
           <p:nvSpPr>
-            <p:cNvPr id="33" name="tx33"/>
+            <p:cNvPr id="35" name="tx35"/>
             <p:cNvSpPr/>
             <p:nvPr/>
           </p:nvSpPr>
           <p:spPr>
             <a:xfrm>
-              <a:off x="5136097" y="5456905"/>
-              <a:ext cx="62179" cy="80101"/>
+              <a:off x="2710888" y="5456905"/>
+              <a:ext cx="260878" cy="80101"/>
             </a:xfrm>
             <a:prstGeom prst="rect">
               <a:avLst/>
@@ -38456,21 +41076,21 @@
                   <a:latin typeface="Helvetica"/>
                   <a:cs typeface="Helvetica"/>
                 </a:rPr>
-                <a:t>0</a:t>
+                <a:t>-30%</a:t>
               </a:r>
             </a:p>
           </p:txBody>
         </p:sp>
         <p:sp>
           <p:nvSpPr>
-            <p:cNvPr id="34" name="tx34"/>
+            <p:cNvPr id="36" name="tx36"/>
             <p:cNvSpPr/>
             <p:nvPr/>
           </p:nvSpPr>
           <p:spPr>
             <a:xfrm>
-              <a:off x="7043223" y="5456905"/>
-              <a:ext cx="124358" cy="80101"/>
+              <a:off x="3486174" y="5456905"/>
+              <a:ext cx="260878" cy="80101"/>
             </a:xfrm>
             <a:prstGeom prst="rect">
               <a:avLst/>
@@ -38502,14 +41122,290 @@
                   <a:latin typeface="Helvetica"/>
                   <a:cs typeface="Helvetica"/>
                 </a:rPr>
-                <a:t>25</a:t>
+                <a:t>-20%</a:t>
               </a:r>
             </a:p>
           </p:txBody>
         </p:sp>
         <p:sp>
           <p:nvSpPr>
-            <p:cNvPr id="35" name="tx35"/>
+            <p:cNvPr id="37" name="tx37"/>
+            <p:cNvSpPr/>
+            <p:nvPr/>
+          </p:nvSpPr>
+          <p:spPr>
+            <a:xfrm>
+              <a:off x="4261461" y="5456905"/>
+              <a:ext cx="260878" cy="80101"/>
+            </a:xfrm>
+            <a:prstGeom prst="rect">
+              <a:avLst/>
+            </a:prstGeom>
+            <a:noFill/>
+          </p:spPr>
+          <p:txBody>
+            <a:bodyPr lIns="0" rIns="0" tIns="0" bIns="0" anchorCtr="1" anchor="ctr" wrap="none"/>
+            <a:lstStyle/>
+            <a:p>
+              <a:pPr algn="l" marL="0" marR="0" indent="0">
+                <a:lnSpc>
+                  <a:spcPts val="880"/>
+                </a:lnSpc>
+                <a:spcBef>
+                  <a:spcPts val="0"/>
+                </a:spcBef>
+                <a:spcAft>
+                  <a:spcPts val="0"/>
+                </a:spcAft>
+              </a:pPr>
+              <a:r>
+                <a:rPr sz="880">
+                  <a:solidFill>
+                    <a:srgbClr val="4D4D4D">
+                      <a:alpha val="100000"/>
+                    </a:srgbClr>
+                  </a:solidFill>
+                  <a:latin typeface="Helvetica"/>
+                  <a:cs typeface="Helvetica"/>
+                </a:rPr>
+                <a:t>-10%</a:t>
+              </a:r>
+            </a:p>
+          </p:txBody>
+        </p:sp>
+        <p:sp>
+          <p:nvSpPr>
+            <p:cNvPr id="38" name="tx38"/>
+            <p:cNvSpPr/>
+            <p:nvPr/>
+          </p:nvSpPr>
+          <p:spPr>
+            <a:xfrm>
+              <a:off x="5086445" y="5456905"/>
+              <a:ext cx="161483" cy="80101"/>
+            </a:xfrm>
+            <a:prstGeom prst="rect">
+              <a:avLst/>
+            </a:prstGeom>
+            <a:noFill/>
+          </p:spPr>
+          <p:txBody>
+            <a:bodyPr lIns="0" rIns="0" tIns="0" bIns="0" anchorCtr="1" anchor="ctr" wrap="none"/>
+            <a:lstStyle/>
+            <a:p>
+              <a:pPr algn="l" marL="0" marR="0" indent="0">
+                <a:lnSpc>
+                  <a:spcPts val="880"/>
+                </a:lnSpc>
+                <a:spcBef>
+                  <a:spcPts val="0"/>
+                </a:spcBef>
+                <a:spcAft>
+                  <a:spcPts val="0"/>
+                </a:spcAft>
+              </a:pPr>
+              <a:r>
+                <a:rPr sz="880">
+                  <a:solidFill>
+                    <a:srgbClr val="4D4D4D">
+                      <a:alpha val="100000"/>
+                    </a:srgbClr>
+                  </a:solidFill>
+                  <a:latin typeface="Helvetica"/>
+                  <a:cs typeface="Helvetica"/>
+                </a:rPr>
+                <a:t>0%</a:t>
+              </a:r>
+            </a:p>
+          </p:txBody>
+        </p:sp>
+        <p:sp>
+          <p:nvSpPr>
+            <p:cNvPr id="39" name="tx39"/>
+            <p:cNvSpPr/>
+            <p:nvPr/>
+          </p:nvSpPr>
+          <p:spPr>
+            <a:xfrm>
+              <a:off x="5830641" y="5456905"/>
+              <a:ext cx="223662" cy="80101"/>
+            </a:xfrm>
+            <a:prstGeom prst="rect">
+              <a:avLst/>
+            </a:prstGeom>
+            <a:noFill/>
+          </p:spPr>
+          <p:txBody>
+            <a:bodyPr lIns="0" rIns="0" tIns="0" bIns="0" anchorCtr="1" anchor="ctr" wrap="none"/>
+            <a:lstStyle/>
+            <a:p>
+              <a:pPr algn="l" marL="0" marR="0" indent="0">
+                <a:lnSpc>
+                  <a:spcPts val="880"/>
+                </a:lnSpc>
+                <a:spcBef>
+                  <a:spcPts val="0"/>
+                </a:spcBef>
+                <a:spcAft>
+                  <a:spcPts val="0"/>
+                </a:spcAft>
+              </a:pPr>
+              <a:r>
+                <a:rPr sz="880">
+                  <a:solidFill>
+                    <a:srgbClr val="4D4D4D">
+                      <a:alpha val="100000"/>
+                    </a:srgbClr>
+                  </a:solidFill>
+                  <a:latin typeface="Helvetica"/>
+                  <a:cs typeface="Helvetica"/>
+                </a:rPr>
+                <a:t>10%</a:t>
+              </a:r>
+            </a:p>
+          </p:txBody>
+        </p:sp>
+        <p:sp>
+          <p:nvSpPr>
+            <p:cNvPr id="40" name="tx40"/>
+            <p:cNvSpPr/>
+            <p:nvPr/>
+          </p:nvSpPr>
+          <p:spPr>
+            <a:xfrm>
+              <a:off x="6605928" y="5456905"/>
+              <a:ext cx="223662" cy="80101"/>
+            </a:xfrm>
+            <a:prstGeom prst="rect">
+              <a:avLst/>
+            </a:prstGeom>
+            <a:noFill/>
+          </p:spPr>
+          <p:txBody>
+            <a:bodyPr lIns="0" rIns="0" tIns="0" bIns="0" anchorCtr="1" anchor="ctr" wrap="none"/>
+            <a:lstStyle/>
+            <a:p>
+              <a:pPr algn="l" marL="0" marR="0" indent="0">
+                <a:lnSpc>
+                  <a:spcPts val="880"/>
+                </a:lnSpc>
+                <a:spcBef>
+                  <a:spcPts val="0"/>
+                </a:spcBef>
+                <a:spcAft>
+                  <a:spcPts val="0"/>
+                </a:spcAft>
+              </a:pPr>
+              <a:r>
+                <a:rPr sz="880">
+                  <a:solidFill>
+                    <a:srgbClr val="4D4D4D">
+                      <a:alpha val="100000"/>
+                    </a:srgbClr>
+                  </a:solidFill>
+                  <a:latin typeface="Helvetica"/>
+                  <a:cs typeface="Helvetica"/>
+                </a:rPr>
+                <a:t>20%</a:t>
+              </a:r>
+            </a:p>
+          </p:txBody>
+        </p:sp>
+        <p:sp>
+          <p:nvSpPr>
+            <p:cNvPr id="41" name="tx41"/>
+            <p:cNvSpPr/>
+            <p:nvPr/>
+          </p:nvSpPr>
+          <p:spPr>
+            <a:xfrm>
+              <a:off x="7381214" y="5456905"/>
+              <a:ext cx="223662" cy="80101"/>
+            </a:xfrm>
+            <a:prstGeom prst="rect">
+              <a:avLst/>
+            </a:prstGeom>
+            <a:noFill/>
+          </p:spPr>
+          <p:txBody>
+            <a:bodyPr lIns="0" rIns="0" tIns="0" bIns="0" anchorCtr="1" anchor="ctr" wrap="none"/>
+            <a:lstStyle/>
+            <a:p>
+              <a:pPr algn="l" marL="0" marR="0" indent="0">
+                <a:lnSpc>
+                  <a:spcPts val="880"/>
+                </a:lnSpc>
+                <a:spcBef>
+                  <a:spcPts val="0"/>
+                </a:spcBef>
+                <a:spcAft>
+                  <a:spcPts val="0"/>
+                </a:spcAft>
+              </a:pPr>
+              <a:r>
+                <a:rPr sz="880">
+                  <a:solidFill>
+                    <a:srgbClr val="4D4D4D">
+                      <a:alpha val="100000"/>
+                    </a:srgbClr>
+                  </a:solidFill>
+                  <a:latin typeface="Helvetica"/>
+                  <a:cs typeface="Helvetica"/>
+                </a:rPr>
+                <a:t>30%</a:t>
+              </a:r>
+            </a:p>
+          </p:txBody>
+        </p:sp>
+        <p:sp>
+          <p:nvSpPr>
+            <p:cNvPr id="42" name="tx42"/>
+            <p:cNvSpPr/>
+            <p:nvPr/>
+          </p:nvSpPr>
+          <p:spPr>
+            <a:xfrm>
+              <a:off x="8156500" y="5456905"/>
+              <a:ext cx="223662" cy="80101"/>
+            </a:xfrm>
+            <a:prstGeom prst="rect">
+              <a:avLst/>
+            </a:prstGeom>
+            <a:noFill/>
+          </p:spPr>
+          <p:txBody>
+            <a:bodyPr lIns="0" rIns="0" tIns="0" bIns="0" anchorCtr="1" anchor="ctr" wrap="none"/>
+            <a:lstStyle/>
+            <a:p>
+              <a:pPr algn="l" marL="0" marR="0" indent="0">
+                <a:lnSpc>
+                  <a:spcPts val="880"/>
+                </a:lnSpc>
+                <a:spcBef>
+                  <a:spcPts val="0"/>
+                </a:spcBef>
+                <a:spcAft>
+                  <a:spcPts val="0"/>
+                </a:spcAft>
+              </a:pPr>
+              <a:r>
+                <a:rPr sz="880">
+                  <a:solidFill>
+                    <a:srgbClr val="4D4D4D">
+                      <a:alpha val="100000"/>
+                    </a:srgbClr>
+                  </a:solidFill>
+                  <a:latin typeface="Helvetica"/>
+                  <a:cs typeface="Helvetica"/>
+                </a:rPr>
+                <a:t>40%</a:t>
+              </a:r>
+            </a:p>
+          </p:txBody>
+        </p:sp>
+        <p:sp>
+          <p:nvSpPr>
+            <p:cNvPr id="43" name="tx43"/>
             <p:cNvSpPr/>
             <p:nvPr/>
           </p:nvSpPr>
@@ -38555,7 +41451,7 @@
         </p:sp>
         <p:sp>
           <p:nvSpPr>
-            <p:cNvPr id="36" name="tx36"/>
+            <p:cNvPr id="44" name="tx44"/>
             <p:cNvSpPr/>
             <p:nvPr/>
           </p:nvSpPr>
@@ -38601,7 +41497,7 @@
         </p:sp>
         <p:sp>
           <p:nvSpPr>
-            <p:cNvPr id="37" name="tx37"/>
+            <p:cNvPr id="45" name="tx45"/>
             <p:cNvSpPr/>
             <p:nvPr/>
           </p:nvSpPr>
@@ -38647,7 +41543,7 @@
         </p:sp>
         <p:sp>
           <p:nvSpPr>
-            <p:cNvPr id="38" name="tx38"/>
+            <p:cNvPr id="46" name="tx46"/>
             <p:cNvSpPr/>
             <p:nvPr/>
           </p:nvSpPr>
